--- a/shared/templates/bulletin/06_14_2026.pptx
+++ b/shared/templates/bulletin/06_14_2026.pptx
@@ -48,6 +48,18 @@
     <p:sldId id="291" r:id="rId44"/>
     <p:sldId id="292" r:id="rId45"/>
     <p:sldId id="293" r:id="rId46"/>
+    <p:sldId id="294" r:id="rId69"/>
+    <p:sldId id="295" r:id="rId70"/>
+    <p:sldId id="296" r:id="rId71"/>
+    <p:sldId id="297" r:id="rId72"/>
+    <p:sldId id="298" r:id="rId73"/>
+    <p:sldId id="299" r:id="rId74"/>
+    <p:sldId id="300" r:id="rId75"/>
+    <p:sldId id="301" r:id="rId76"/>
+    <p:sldId id="302" r:id="rId77"/>
+    <p:sldId id="303" r:id="rId78"/>
+    <p:sldId id="304" r:id="rId79"/>
+    <p:sldId id="305" r:id="rId80"/>
   </p:sldIdLst>
   <p:sldSz cy="5143500" cx="9144000"/>
   <p:notesSz cx="6858000" cy="9144000"/>
@@ -40442,6 +40454,314 @@
 </p:sld>
 </file>
 
+<file path=ppt/slides/slide39.xml><?xml version="1.0" encoding="utf-8"?>
+<p:sld xmlns:a="http://schemas.openxmlformats.org/drawingml/2006/main" xmlns:r="http://schemas.openxmlformats.org/officeDocument/2006/relationships" xmlns:mc="http://schemas.openxmlformats.org/markup-compatibility/2006" xmlns:mv="urn:schemas-microsoft-com:mac:vml" xmlns:p="http://schemas.openxmlformats.org/presentationml/2006/main" xmlns:c="http://schemas.openxmlformats.org/drawingml/2006/chart" xmlns:dgm="http://schemas.openxmlformats.org/drawingml/2006/diagram" xmlns:o="urn:schemas-microsoft-com:office:office" xmlns:v="urn:schemas-microsoft-com:vml" xmlns:pvml="urn:schemas-microsoft-com:office:powerpoint" xmlns:com="http://schemas.openxmlformats.org/drawingml/2006/compatibility" xmlns:p14="http://schemas.microsoft.com/office/powerpoint/2010/main" xmlns:p15="http://schemas.microsoft.com/office/powerpoint/2012/main" xmlns:ahyp="http://schemas.microsoft.com/office/drawing/2018/hyperlinkcolor" show="0">
+  <p:cSld>
+    <p:bg>
+      <p:bgPr>
+        <a:blipFill>
+          <a:blip r:embed="rId9003">
+            <a:alphaModFix/>
+          </a:blip>
+          <a:stretch>
+            <a:fillRect/>
+          </a:stretch>
+        </a:blipFill>
+      </p:bgPr>
+    </p:bg>
+    <p:spTree>
+      <p:nvGrpSpPr>
+        <p:cNvPr id="397" name="Shape 397"/>
+        <p:cNvGrpSpPr/>
+        <p:nvPr/>
+      </p:nvGrpSpPr>
+      <p:grpSpPr>
+        <a:xfrm>
+          <a:off x="0" y="0"/>
+          <a:ext cx="0" cy="0"/>
+          <a:chOff x="0" y="0"/>
+          <a:chExt cx="0" cy="0"/>
+        </a:xfrm>
+      </p:grpSpPr>
+      <p:sp>
+        <p:nvSpPr>
+          <p:cNvPr id="398" name="Google Shape;398;p67"/>
+          <p:cNvSpPr txBox="1"/>
+          <p:nvPr/>
+        </p:nvSpPr>
+        <p:spPr>
+          <a:xfrm>
+            <a:off x="0" y="0"/>
+            <a:ext cx="9144000" cy="892800"/>
+          </a:xfrm>
+          <a:prstGeom prst="rect">
+            <a:avLst/>
+          </a:prstGeom>
+          <a:noFill/>
+          <a:ln>
+            <a:noFill/>
+          </a:ln>
+        </p:spPr>
+        <p:txBody>
+          <a:bodyPr anchorCtr="0" anchor="t" bIns="91425" lIns="91425" spcFirstLastPara="1" rIns="91425" wrap="square" tIns="91425">
+            <a:spAutoFit/>
+          </a:bodyPr>
+          <a:lstStyle/>
+          <a:p>
+            <a:pPr indent="0" lvl="0" marL="0" rtl="0" algn="ctr">
+              <a:spcBef>
+                <a:spcPts val="0"/>
+              </a:spcBef>
+              <a:spcAft>
+                <a:spcPts val="0"/>
+              </a:spcAft>
+              <a:buNone/>
+            </a:pPr>
+            <a:r>
+              <a:rPr lang="en" sz="4600"/>
+              <a:t>  </a:t>
+            </a:r>
+            <a:r>
+              <a:rPr lang="en" sz="4600">
+                <a:solidFill>
+                  <a:srgbClr val="FF0000"/>
+                </a:solidFill>
+                <a:highlight>
+                  <a:srgbClr val="FFFF00"/>
+                </a:highlight>
+              </a:rPr>
+              <a:t>❤️</a:t>
+            </a:r>
+            <a:r>
+              <a:rPr b="1" lang="en" sz="3300">
+                <a:highlight>
+                  <a:srgbClr val="FFFF00"/>
+                </a:highlight>
+                <a:latin typeface="Lexend Deca"/>
+                <a:ea typeface="Lexend Deca"/>
+                <a:cs typeface="Lexend Deca"/>
+                <a:sym typeface="Lexend Deca"/>
+              </a:rPr>
+              <a:t>1月份生日的家人們</a:t>
+            </a:r>
+            <a:r>
+              <a:rPr lang="en" sz="4600">
+                <a:solidFill>
+                  <a:srgbClr val="FF0000"/>
+                </a:solidFill>
+                <a:highlight>
+                  <a:srgbClr val="FFFF00"/>
+                </a:highlight>
+              </a:rPr>
+              <a:t>❤️</a:t>
+            </a:r>
+            <a:r>
+              <a:rPr lang="en" sz="4600"/>
+              <a:t> </a:t>
+            </a:r>
+            <a:endParaRPr sz="4600">
+              <a:solidFill>
+                <a:srgbClr val="FF0000"/>
+              </a:solidFill>
+            </a:endParaRPr>
+          </a:p>
+        </p:txBody>
+      </p:sp>
+      <p:sp>
+        <p:nvSpPr>
+          <p:cNvPr id="399" name="Birthday Name 0"/>
+          <p:cNvSpPr txBox="1"/>
+          <p:nvPr/>
+        </p:nvSpPr>
+        <p:spPr>
+          <a:xfrm>
+            <a:off x="298800" y="920000"/>
+            <a:ext cx="8500000" cy="2800000"/>
+          </a:xfrm>
+          <a:prstGeom prst="rect">
+            <a:avLst/>
+          </a:prstGeom>
+          <a:noFill/>
+        </p:spPr>
+        <p:txBody>
+          <a:bodyPr wrap="none" anchor="ctr" lIns="45720" rIns="45720" tIns="0" bIns="0">
+            <a:noAutofit/>
+          </a:bodyPr>
+          <a:lstStyle/>
+          <a:p>
+            <a:pPr algn="ctr" fontAlgn="ctr">
+              <a:buNone/>
+            </a:pPr>
+            <a:r>
+              <a:rPr b="1" lang="en" sz="3600">
+                <a:solidFill>
+                  <a:srgbClr val="4C1130"/>
+                </a:solidFill>
+                <a:highlight>
+                  <a:schemeClr val="dk1"/>
+                </a:highlight>
+                <a:latin typeface="DFKai-SB"/>
+                <a:ea typeface="DFKai-SB"/>
+                <a:cs typeface="DFKai-SB"/>
+                <a:sym typeface="DFKai-SB"/>
+              </a:rPr>
+              <a:t xml:space="preserve"> </a:t>
+            </a:r>
+            <a:endParaRPr b="1" sz="3600"/>
+          </a:p>
+        </p:txBody>
+      </p:sp>
+      <p:sp>
+        <p:nvSpPr>
+          <p:cNvPr id="400" name="Google Shape;400;p67"/>
+          <p:cNvSpPr txBox="1"/>
+          <p:nvPr/>
+        </p:nvSpPr>
+        <p:spPr>
+          <a:xfrm>
+            <a:off x="0" y="2037522"/>
+            <a:ext cx="9144000" cy="400200"/>
+          </a:xfrm>
+          <a:prstGeom prst="rect">
+            <a:avLst/>
+          </a:prstGeom>
+          <a:noFill/>
+          <a:ln>
+            <a:noFill/>
+          </a:ln>
+        </p:spPr>
+        <p:txBody>
+          <a:bodyPr anchorCtr="0" anchor="t" bIns="91425" lIns="91425" spcFirstLastPara="1" rIns="91425" wrap="square" tIns="91425">
+            <a:spAutoFit/>
+          </a:bodyPr>
+          <a:lstStyle/>
+          <a:p>
+            <a:pPr indent="0" lvl="0" marL="0" rtl="0" algn="l">
+              <a:spcBef>
+                <a:spcPts val="0"/>
+              </a:spcBef>
+              <a:spcAft>
+                <a:spcPts val="0"/>
+              </a:spcAft>
+              <a:buNone/>
+            </a:pPr>
+            <a:r>
+              <a:t/>
+            </a:r>
+            <a:endParaRPr>
+              <a:latin typeface="Lato"/>
+              <a:ea typeface="Lato"/>
+              <a:cs typeface="Lato"/>
+              <a:sym typeface="Lato"/>
+            </a:endParaRPr>
+          </a:p>
+        </p:txBody>
+      </p:sp>
+      <p:sp>
+        <p:nvSpPr>
+          <p:cNvPr id="401" name="Google Shape;401;p67"/>
+          <p:cNvSpPr txBox="1"/>
+          <p:nvPr/>
+        </p:nvSpPr>
+        <p:spPr>
+          <a:xfrm>
+            <a:off x="228325" y="3894775"/>
+            <a:ext cx="4893900" cy="960600"/>
+          </a:xfrm>
+          <a:prstGeom prst="rect">
+            <a:avLst/>
+          </a:prstGeom>
+          <a:noFill/>
+          <a:ln>
+            <a:noFill/>
+          </a:ln>
+        </p:spPr>
+        <p:txBody>
+          <a:bodyPr anchorCtr="0" anchor="t" bIns="91425" lIns="91425" spcFirstLastPara="1" rIns="91425" wrap="square" tIns="91425">
+            <a:spAutoFit/>
+          </a:bodyPr>
+          <a:lstStyle/>
+          <a:p>
+            <a:pPr indent="0" lvl="0" marL="0" rtl="0" algn="ctr">
+              <a:lnSpc>
+                <a:spcPct val="90000"/>
+              </a:lnSpc>
+              <a:spcBef>
+                <a:spcPts val="0"/>
+              </a:spcBef>
+              <a:spcAft>
+                <a:spcPts val="0"/>
+              </a:spcAft>
+              <a:buNone/>
+            </a:pPr>
+            <a:r>
+              <a:rPr b="1" lang="en" sz="2800">
+                <a:solidFill>
+                  <a:srgbClr val="FF0000"/>
+                </a:solidFill>
+                <a:highlight>
+                  <a:schemeClr val="dk1"/>
+                </a:highlight>
+                <a:latin typeface="Lexend Deca"/>
+                <a:ea typeface="Lexend Deca"/>
+                <a:cs typeface="Lexend Deca"/>
+                <a:sym typeface="Lexend Deca"/>
+              </a:rPr>
+              <a:t>我們將在午餐聚會時禱告祝福</a:t>
+            </a:r>
+            <a:endParaRPr b="1" sz="2800">
+              <a:solidFill>
+                <a:srgbClr val="FF0000"/>
+              </a:solidFill>
+              <a:highlight>
+                <a:schemeClr val="dk1"/>
+              </a:highlight>
+              <a:latin typeface="Lexend Deca"/>
+              <a:ea typeface="Lexend Deca"/>
+              <a:cs typeface="Lexend Deca"/>
+              <a:sym typeface="Lexend Deca"/>
+            </a:endParaRPr>
+          </a:p>
+          <a:p>
+            <a:pPr indent="0" lvl="0" marL="0" rtl="0" algn="ctr">
+              <a:lnSpc>
+                <a:spcPct val="90000"/>
+              </a:lnSpc>
+              <a:spcBef>
+                <a:spcPts val="0"/>
+              </a:spcBef>
+              <a:spcAft>
+                <a:spcPts val="0"/>
+              </a:spcAft>
+              <a:buNone/>
+            </a:pPr>
+            <a:r>
+              <a:rPr b="1" lang="en" sz="2800">
+                <a:solidFill>
+                  <a:srgbClr val="FF0000"/>
+                </a:solidFill>
+                <a:highlight>
+                  <a:schemeClr val="dk1"/>
+                </a:highlight>
+                <a:latin typeface="Lexend Deca"/>
+                <a:ea typeface="Lexend Deca"/>
+                <a:cs typeface="Lexend Deca"/>
+                <a:sym typeface="Lexend Deca"/>
+              </a:rPr>
+              <a:t> 唱生日歌與享用生日蛋糕</a:t>
+            </a:r>
+            <a:endParaRPr/>
+          </a:p>
+        </p:txBody>
+      </p:sp>
+    </p:spTree>
+  </p:cSld>
+  <p:clrMapOvr>
+    <a:masterClrMapping/>
+  </p:clrMapOvr>
+</p:sld>
+</file>
+
 <file path=ppt/slides/slide4.xml><?xml version="1.0" encoding="utf-8"?>
 <p:sld xmlns:a="http://schemas.openxmlformats.org/drawingml/2006/main" xmlns:r="http://schemas.openxmlformats.org/officeDocument/2006/relationships" xmlns:mc="http://schemas.openxmlformats.org/markup-compatibility/2006" xmlns:mv="urn:schemas-microsoft-com:mac:vml" xmlns:p="http://schemas.openxmlformats.org/presentationml/2006/main" xmlns:c="http://schemas.openxmlformats.org/drawingml/2006/chart" xmlns:dgm="http://schemas.openxmlformats.org/drawingml/2006/diagram" xmlns:o="urn:schemas-microsoft-com:office:office" xmlns:v="urn:schemas-microsoft-com:vml" xmlns:pvml="urn:schemas-microsoft-com:office:powerpoint" xmlns:com="http://schemas.openxmlformats.org/drawingml/2006/compatibility" xmlns:p14="http://schemas.microsoft.com/office/powerpoint/2010/main" xmlns:p15="http://schemas.microsoft.com/office/powerpoint/2012/main" xmlns:ahyp="http://schemas.microsoft.com/office/drawing/2018/hyperlinkcolor">
   <p:cSld>
@@ -40628,6 +40948,3086 @@
               <a:cs typeface="Corbel"/>
               <a:sym typeface="Corbel"/>
             </a:endParaRPr>
+          </a:p>
+        </p:txBody>
+      </p:sp>
+    </p:spTree>
+  </p:cSld>
+  <p:clrMapOvr>
+    <a:masterClrMapping/>
+  </p:clrMapOvr>
+</p:sld>
+</file>
+
+<file path=ppt/slides/slide40.xml><?xml version="1.0" encoding="utf-8"?>
+<p:sld xmlns:a="http://schemas.openxmlformats.org/drawingml/2006/main" xmlns:r="http://schemas.openxmlformats.org/officeDocument/2006/relationships" xmlns:mc="http://schemas.openxmlformats.org/markup-compatibility/2006" xmlns:mv="urn:schemas-microsoft-com:mac:vml" xmlns:p="http://schemas.openxmlformats.org/presentationml/2006/main" xmlns:c="http://schemas.openxmlformats.org/drawingml/2006/chart" xmlns:dgm="http://schemas.openxmlformats.org/drawingml/2006/diagram" xmlns:o="urn:schemas-microsoft-com:office:office" xmlns:v="urn:schemas-microsoft-com:vml" xmlns:pvml="urn:schemas-microsoft-com:office:powerpoint" xmlns:com="http://schemas.openxmlformats.org/drawingml/2006/compatibility" xmlns:p14="http://schemas.microsoft.com/office/powerpoint/2010/main" xmlns:p15="http://schemas.microsoft.com/office/powerpoint/2012/main" xmlns:ahyp="http://schemas.microsoft.com/office/drawing/2018/hyperlinkcolor" show="0">
+  <p:cSld>
+    <p:bg>
+      <p:bgPr>
+        <a:blipFill>
+          <a:blip r:embed="rId9003">
+            <a:alphaModFix/>
+          </a:blip>
+          <a:stretch>
+            <a:fillRect/>
+          </a:stretch>
+        </a:blipFill>
+      </p:bgPr>
+    </p:bg>
+    <p:spTree>
+      <p:nvGrpSpPr>
+        <p:cNvPr id="397" name="Shape 397"/>
+        <p:cNvGrpSpPr/>
+        <p:nvPr/>
+      </p:nvGrpSpPr>
+      <p:grpSpPr>
+        <a:xfrm>
+          <a:off x="0" y="0"/>
+          <a:ext cx="0" cy="0"/>
+          <a:chOff x="0" y="0"/>
+          <a:chExt cx="0" cy="0"/>
+        </a:xfrm>
+      </p:grpSpPr>
+      <p:sp>
+        <p:nvSpPr>
+          <p:cNvPr id="398" name="Google Shape;398;p67"/>
+          <p:cNvSpPr txBox="1"/>
+          <p:nvPr/>
+        </p:nvSpPr>
+        <p:spPr>
+          <a:xfrm>
+            <a:off x="0" y="0"/>
+            <a:ext cx="9144000" cy="892800"/>
+          </a:xfrm>
+          <a:prstGeom prst="rect">
+            <a:avLst/>
+          </a:prstGeom>
+          <a:noFill/>
+          <a:ln>
+            <a:noFill/>
+          </a:ln>
+        </p:spPr>
+        <p:txBody>
+          <a:bodyPr anchorCtr="0" anchor="t" bIns="91425" lIns="91425" spcFirstLastPara="1" rIns="91425" wrap="square" tIns="91425">
+            <a:spAutoFit/>
+          </a:bodyPr>
+          <a:lstStyle/>
+          <a:p>
+            <a:pPr indent="0" lvl="0" marL="0" rtl="0" algn="ctr">
+              <a:spcBef>
+                <a:spcPts val="0"/>
+              </a:spcBef>
+              <a:spcAft>
+                <a:spcPts val="0"/>
+              </a:spcAft>
+              <a:buNone/>
+            </a:pPr>
+            <a:r>
+              <a:rPr lang="en" sz="4600"/>
+              <a:t>  </a:t>
+            </a:r>
+            <a:r>
+              <a:rPr lang="en" sz="4600">
+                <a:solidFill>
+                  <a:srgbClr val="FF0000"/>
+                </a:solidFill>
+                <a:highlight>
+                  <a:srgbClr val="FFFF00"/>
+                </a:highlight>
+              </a:rPr>
+              <a:t>❤️</a:t>
+            </a:r>
+            <a:r>
+              <a:rPr b="1" lang="en" sz="3300">
+                <a:highlight>
+                  <a:srgbClr val="FFFF00"/>
+                </a:highlight>
+                <a:latin typeface="Lexend Deca"/>
+                <a:ea typeface="Lexend Deca"/>
+                <a:cs typeface="Lexend Deca"/>
+                <a:sym typeface="Lexend Deca"/>
+              </a:rPr>
+              <a:t>2月份生日的家人們</a:t>
+            </a:r>
+            <a:r>
+              <a:rPr lang="en" sz="4600">
+                <a:solidFill>
+                  <a:srgbClr val="FF0000"/>
+                </a:solidFill>
+                <a:highlight>
+                  <a:srgbClr val="FFFF00"/>
+                </a:highlight>
+              </a:rPr>
+              <a:t>❤️</a:t>
+            </a:r>
+            <a:r>
+              <a:rPr lang="en" sz="4600"/>
+              <a:t> </a:t>
+            </a:r>
+            <a:endParaRPr sz="4600">
+              <a:solidFill>
+                <a:srgbClr val="FF0000"/>
+              </a:solidFill>
+            </a:endParaRPr>
+          </a:p>
+        </p:txBody>
+      </p:sp>
+      <p:sp>
+        <p:nvSpPr>
+          <p:cNvPr id="399" name="Birthday Name 0"/>
+          <p:cNvSpPr txBox="1"/>
+          <p:nvPr/>
+        </p:nvSpPr>
+        <p:spPr>
+          <a:xfrm>
+            <a:off x="298800" y="920000"/>
+            <a:ext cx="8500000" cy="2800000"/>
+          </a:xfrm>
+          <a:prstGeom prst="rect">
+            <a:avLst/>
+          </a:prstGeom>
+          <a:noFill/>
+        </p:spPr>
+        <p:txBody>
+          <a:bodyPr wrap="none" anchor="ctr" lIns="45720" rIns="45720" tIns="0" bIns="0">
+            <a:noAutofit/>
+          </a:bodyPr>
+          <a:lstStyle/>
+          <a:p>
+            <a:pPr algn="ctr" fontAlgn="ctr">
+              <a:buNone/>
+            </a:pPr>
+            <a:r>
+              <a:rPr b="1" lang="en" sz="3600">
+                <a:solidFill>
+                  <a:srgbClr val="4C1130"/>
+                </a:solidFill>
+                <a:highlight>
+                  <a:schemeClr val="dk1"/>
+                </a:highlight>
+                <a:latin typeface="DFKai-SB"/>
+                <a:ea typeface="DFKai-SB"/>
+                <a:cs typeface="DFKai-SB"/>
+                <a:sym typeface="DFKai-SB"/>
+              </a:rPr>
+              <a:t xml:space="preserve"> </a:t>
+            </a:r>
+            <a:endParaRPr b="1" sz="3600"/>
+          </a:p>
+        </p:txBody>
+      </p:sp>
+      <p:sp>
+        <p:nvSpPr>
+          <p:cNvPr id="400" name="Google Shape;400;p67"/>
+          <p:cNvSpPr txBox="1"/>
+          <p:nvPr/>
+        </p:nvSpPr>
+        <p:spPr>
+          <a:xfrm>
+            <a:off x="0" y="2037522"/>
+            <a:ext cx="9144000" cy="400200"/>
+          </a:xfrm>
+          <a:prstGeom prst="rect">
+            <a:avLst/>
+          </a:prstGeom>
+          <a:noFill/>
+          <a:ln>
+            <a:noFill/>
+          </a:ln>
+        </p:spPr>
+        <p:txBody>
+          <a:bodyPr anchorCtr="0" anchor="t" bIns="91425" lIns="91425" spcFirstLastPara="1" rIns="91425" wrap="square" tIns="91425">
+            <a:spAutoFit/>
+          </a:bodyPr>
+          <a:lstStyle/>
+          <a:p>
+            <a:pPr indent="0" lvl="0" marL="0" rtl="0" algn="l">
+              <a:spcBef>
+                <a:spcPts val="0"/>
+              </a:spcBef>
+              <a:spcAft>
+                <a:spcPts val="0"/>
+              </a:spcAft>
+              <a:buNone/>
+            </a:pPr>
+            <a:r>
+              <a:t/>
+            </a:r>
+            <a:endParaRPr>
+              <a:latin typeface="Lato"/>
+              <a:ea typeface="Lato"/>
+              <a:cs typeface="Lato"/>
+              <a:sym typeface="Lato"/>
+            </a:endParaRPr>
+          </a:p>
+        </p:txBody>
+      </p:sp>
+      <p:sp>
+        <p:nvSpPr>
+          <p:cNvPr id="401" name="Google Shape;401;p67"/>
+          <p:cNvSpPr txBox="1"/>
+          <p:nvPr/>
+        </p:nvSpPr>
+        <p:spPr>
+          <a:xfrm>
+            <a:off x="228325" y="3894775"/>
+            <a:ext cx="4893900" cy="960600"/>
+          </a:xfrm>
+          <a:prstGeom prst="rect">
+            <a:avLst/>
+          </a:prstGeom>
+          <a:noFill/>
+          <a:ln>
+            <a:noFill/>
+          </a:ln>
+        </p:spPr>
+        <p:txBody>
+          <a:bodyPr anchorCtr="0" anchor="t" bIns="91425" lIns="91425" spcFirstLastPara="1" rIns="91425" wrap="square" tIns="91425">
+            <a:spAutoFit/>
+          </a:bodyPr>
+          <a:lstStyle/>
+          <a:p>
+            <a:pPr indent="0" lvl="0" marL="0" rtl="0" algn="ctr">
+              <a:lnSpc>
+                <a:spcPct val="90000"/>
+              </a:lnSpc>
+              <a:spcBef>
+                <a:spcPts val="0"/>
+              </a:spcBef>
+              <a:spcAft>
+                <a:spcPts val="0"/>
+              </a:spcAft>
+              <a:buNone/>
+            </a:pPr>
+            <a:r>
+              <a:rPr b="1" lang="en" sz="2800">
+                <a:solidFill>
+                  <a:srgbClr val="FF0000"/>
+                </a:solidFill>
+                <a:highlight>
+                  <a:schemeClr val="dk1"/>
+                </a:highlight>
+                <a:latin typeface="Lexend Deca"/>
+                <a:ea typeface="Lexend Deca"/>
+                <a:cs typeface="Lexend Deca"/>
+                <a:sym typeface="Lexend Deca"/>
+              </a:rPr>
+              <a:t>我們將在午餐聚會時禱告祝福</a:t>
+            </a:r>
+            <a:endParaRPr b="1" sz="2800">
+              <a:solidFill>
+                <a:srgbClr val="FF0000"/>
+              </a:solidFill>
+              <a:highlight>
+                <a:schemeClr val="dk1"/>
+              </a:highlight>
+              <a:latin typeface="Lexend Deca"/>
+              <a:ea typeface="Lexend Deca"/>
+              <a:cs typeface="Lexend Deca"/>
+              <a:sym typeface="Lexend Deca"/>
+            </a:endParaRPr>
+          </a:p>
+          <a:p>
+            <a:pPr indent="0" lvl="0" marL="0" rtl="0" algn="ctr">
+              <a:lnSpc>
+                <a:spcPct val="90000"/>
+              </a:lnSpc>
+              <a:spcBef>
+                <a:spcPts val="0"/>
+              </a:spcBef>
+              <a:spcAft>
+                <a:spcPts val="0"/>
+              </a:spcAft>
+              <a:buNone/>
+            </a:pPr>
+            <a:r>
+              <a:rPr b="1" lang="en" sz="2800">
+                <a:solidFill>
+                  <a:srgbClr val="FF0000"/>
+                </a:solidFill>
+                <a:highlight>
+                  <a:schemeClr val="dk1"/>
+                </a:highlight>
+                <a:latin typeface="Lexend Deca"/>
+                <a:ea typeface="Lexend Deca"/>
+                <a:cs typeface="Lexend Deca"/>
+                <a:sym typeface="Lexend Deca"/>
+              </a:rPr>
+              <a:t> 唱生日歌與享用生日蛋糕</a:t>
+            </a:r>
+            <a:endParaRPr/>
+          </a:p>
+        </p:txBody>
+      </p:sp>
+    </p:spTree>
+  </p:cSld>
+  <p:clrMapOvr>
+    <a:masterClrMapping/>
+  </p:clrMapOvr>
+</p:sld>
+</file>
+
+<file path=ppt/slides/slide41.xml><?xml version="1.0" encoding="utf-8"?>
+<p:sld xmlns:a="http://schemas.openxmlformats.org/drawingml/2006/main" xmlns:r="http://schemas.openxmlformats.org/officeDocument/2006/relationships" xmlns:mc="http://schemas.openxmlformats.org/markup-compatibility/2006" xmlns:mv="urn:schemas-microsoft-com:mac:vml" xmlns:p="http://schemas.openxmlformats.org/presentationml/2006/main" xmlns:c="http://schemas.openxmlformats.org/drawingml/2006/chart" xmlns:dgm="http://schemas.openxmlformats.org/drawingml/2006/diagram" xmlns:o="urn:schemas-microsoft-com:office:office" xmlns:v="urn:schemas-microsoft-com:vml" xmlns:pvml="urn:schemas-microsoft-com:office:powerpoint" xmlns:com="http://schemas.openxmlformats.org/drawingml/2006/compatibility" xmlns:p14="http://schemas.microsoft.com/office/powerpoint/2010/main" xmlns:p15="http://schemas.microsoft.com/office/powerpoint/2012/main" xmlns:ahyp="http://schemas.microsoft.com/office/drawing/2018/hyperlinkcolor" show="0">
+  <p:cSld>
+    <p:bg>
+      <p:bgPr>
+        <a:blipFill>
+          <a:blip r:embed="rId9003">
+            <a:alphaModFix/>
+          </a:blip>
+          <a:stretch>
+            <a:fillRect/>
+          </a:stretch>
+        </a:blipFill>
+      </p:bgPr>
+    </p:bg>
+    <p:spTree>
+      <p:nvGrpSpPr>
+        <p:cNvPr id="397" name="Shape 397"/>
+        <p:cNvGrpSpPr/>
+        <p:nvPr/>
+      </p:nvGrpSpPr>
+      <p:grpSpPr>
+        <a:xfrm>
+          <a:off x="0" y="0"/>
+          <a:ext cx="0" cy="0"/>
+          <a:chOff x="0" y="0"/>
+          <a:chExt cx="0" cy="0"/>
+        </a:xfrm>
+      </p:grpSpPr>
+      <p:sp>
+        <p:nvSpPr>
+          <p:cNvPr id="398" name="Google Shape;398;p67"/>
+          <p:cNvSpPr txBox="1"/>
+          <p:nvPr/>
+        </p:nvSpPr>
+        <p:spPr>
+          <a:xfrm>
+            <a:off x="0" y="0"/>
+            <a:ext cx="9144000" cy="892800"/>
+          </a:xfrm>
+          <a:prstGeom prst="rect">
+            <a:avLst/>
+          </a:prstGeom>
+          <a:noFill/>
+          <a:ln>
+            <a:noFill/>
+          </a:ln>
+        </p:spPr>
+        <p:txBody>
+          <a:bodyPr anchorCtr="0" anchor="t" bIns="91425" lIns="91425" spcFirstLastPara="1" rIns="91425" wrap="square" tIns="91425">
+            <a:spAutoFit/>
+          </a:bodyPr>
+          <a:lstStyle/>
+          <a:p>
+            <a:pPr indent="0" lvl="0" marL="0" rtl="0" algn="ctr">
+              <a:spcBef>
+                <a:spcPts val="0"/>
+              </a:spcBef>
+              <a:spcAft>
+                <a:spcPts val="0"/>
+              </a:spcAft>
+              <a:buNone/>
+            </a:pPr>
+            <a:r>
+              <a:rPr lang="en" sz="4600"/>
+              <a:t>  </a:t>
+            </a:r>
+            <a:r>
+              <a:rPr lang="en" sz="4600">
+                <a:solidFill>
+                  <a:srgbClr val="FF0000"/>
+                </a:solidFill>
+                <a:highlight>
+                  <a:srgbClr val="FFFF00"/>
+                </a:highlight>
+              </a:rPr>
+              <a:t>❤️</a:t>
+            </a:r>
+            <a:r>
+              <a:rPr b="1" lang="en" sz="3300">
+                <a:highlight>
+                  <a:srgbClr val="FFFF00"/>
+                </a:highlight>
+                <a:latin typeface="Lexend Deca"/>
+                <a:ea typeface="Lexend Deca"/>
+                <a:cs typeface="Lexend Deca"/>
+                <a:sym typeface="Lexend Deca"/>
+              </a:rPr>
+              <a:t>3月份生日的家人們</a:t>
+            </a:r>
+            <a:r>
+              <a:rPr lang="en" sz="4600">
+                <a:solidFill>
+                  <a:srgbClr val="FF0000"/>
+                </a:solidFill>
+                <a:highlight>
+                  <a:srgbClr val="FFFF00"/>
+                </a:highlight>
+              </a:rPr>
+              <a:t>❤️</a:t>
+            </a:r>
+            <a:r>
+              <a:rPr lang="en" sz="4600"/>
+              <a:t> </a:t>
+            </a:r>
+            <a:endParaRPr sz="4600">
+              <a:solidFill>
+                <a:srgbClr val="FF0000"/>
+              </a:solidFill>
+            </a:endParaRPr>
+          </a:p>
+        </p:txBody>
+      </p:sp>
+      <p:sp>
+        <p:nvSpPr>
+          <p:cNvPr id="399" name="Birthday Name 0"/>
+          <p:cNvSpPr txBox="1"/>
+          <p:nvPr/>
+        </p:nvSpPr>
+        <p:spPr>
+          <a:xfrm>
+            <a:off x="298800" y="920000"/>
+            <a:ext cx="8500000" cy="2800000"/>
+          </a:xfrm>
+          <a:prstGeom prst="rect">
+            <a:avLst/>
+          </a:prstGeom>
+          <a:noFill/>
+        </p:spPr>
+        <p:txBody>
+          <a:bodyPr wrap="none" anchor="ctr" lIns="45720" rIns="45720" tIns="0" bIns="0">
+            <a:noAutofit/>
+          </a:bodyPr>
+          <a:lstStyle/>
+          <a:p>
+            <a:pPr algn="ctr" fontAlgn="ctr">
+              <a:buNone/>
+            </a:pPr>
+            <a:r>
+              <a:rPr b="1" lang="en" sz="3600">
+                <a:solidFill>
+                  <a:srgbClr val="4C1130"/>
+                </a:solidFill>
+                <a:highlight>
+                  <a:schemeClr val="dk1"/>
+                </a:highlight>
+                <a:latin typeface="DFKai-SB"/>
+                <a:ea typeface="DFKai-SB"/>
+                <a:cs typeface="DFKai-SB"/>
+                <a:sym typeface="DFKai-SB"/>
+              </a:rPr>
+              <a:t xml:space="preserve"> </a:t>
+            </a:r>
+            <a:endParaRPr b="1" sz="3600"/>
+          </a:p>
+        </p:txBody>
+      </p:sp>
+      <p:sp>
+        <p:nvSpPr>
+          <p:cNvPr id="400" name="Google Shape;400;p67"/>
+          <p:cNvSpPr txBox="1"/>
+          <p:nvPr/>
+        </p:nvSpPr>
+        <p:spPr>
+          <a:xfrm>
+            <a:off x="0" y="2037522"/>
+            <a:ext cx="9144000" cy="400200"/>
+          </a:xfrm>
+          <a:prstGeom prst="rect">
+            <a:avLst/>
+          </a:prstGeom>
+          <a:noFill/>
+          <a:ln>
+            <a:noFill/>
+          </a:ln>
+        </p:spPr>
+        <p:txBody>
+          <a:bodyPr anchorCtr="0" anchor="t" bIns="91425" lIns="91425" spcFirstLastPara="1" rIns="91425" wrap="square" tIns="91425">
+            <a:spAutoFit/>
+          </a:bodyPr>
+          <a:lstStyle/>
+          <a:p>
+            <a:pPr indent="0" lvl="0" marL="0" rtl="0" algn="l">
+              <a:spcBef>
+                <a:spcPts val="0"/>
+              </a:spcBef>
+              <a:spcAft>
+                <a:spcPts val="0"/>
+              </a:spcAft>
+              <a:buNone/>
+            </a:pPr>
+            <a:r>
+              <a:t/>
+            </a:r>
+            <a:endParaRPr>
+              <a:latin typeface="Lato"/>
+              <a:ea typeface="Lato"/>
+              <a:cs typeface="Lato"/>
+              <a:sym typeface="Lato"/>
+            </a:endParaRPr>
+          </a:p>
+        </p:txBody>
+      </p:sp>
+      <p:sp>
+        <p:nvSpPr>
+          <p:cNvPr id="401" name="Google Shape;401;p67"/>
+          <p:cNvSpPr txBox="1"/>
+          <p:nvPr/>
+        </p:nvSpPr>
+        <p:spPr>
+          <a:xfrm>
+            <a:off x="228325" y="3894775"/>
+            <a:ext cx="4893900" cy="960600"/>
+          </a:xfrm>
+          <a:prstGeom prst="rect">
+            <a:avLst/>
+          </a:prstGeom>
+          <a:noFill/>
+          <a:ln>
+            <a:noFill/>
+          </a:ln>
+        </p:spPr>
+        <p:txBody>
+          <a:bodyPr anchorCtr="0" anchor="t" bIns="91425" lIns="91425" spcFirstLastPara="1" rIns="91425" wrap="square" tIns="91425">
+            <a:spAutoFit/>
+          </a:bodyPr>
+          <a:lstStyle/>
+          <a:p>
+            <a:pPr indent="0" lvl="0" marL="0" rtl="0" algn="ctr">
+              <a:lnSpc>
+                <a:spcPct val="90000"/>
+              </a:lnSpc>
+              <a:spcBef>
+                <a:spcPts val="0"/>
+              </a:spcBef>
+              <a:spcAft>
+                <a:spcPts val="0"/>
+              </a:spcAft>
+              <a:buNone/>
+            </a:pPr>
+            <a:r>
+              <a:rPr b="1" lang="en" sz="2800">
+                <a:solidFill>
+                  <a:srgbClr val="FF0000"/>
+                </a:solidFill>
+                <a:highlight>
+                  <a:schemeClr val="dk1"/>
+                </a:highlight>
+                <a:latin typeface="Lexend Deca"/>
+                <a:ea typeface="Lexend Deca"/>
+                <a:cs typeface="Lexend Deca"/>
+                <a:sym typeface="Lexend Deca"/>
+              </a:rPr>
+              <a:t>我們將在午餐聚會時禱告祝福</a:t>
+            </a:r>
+            <a:endParaRPr b="1" sz="2800">
+              <a:solidFill>
+                <a:srgbClr val="FF0000"/>
+              </a:solidFill>
+              <a:highlight>
+                <a:schemeClr val="dk1"/>
+              </a:highlight>
+              <a:latin typeface="Lexend Deca"/>
+              <a:ea typeface="Lexend Deca"/>
+              <a:cs typeface="Lexend Deca"/>
+              <a:sym typeface="Lexend Deca"/>
+            </a:endParaRPr>
+          </a:p>
+          <a:p>
+            <a:pPr indent="0" lvl="0" marL="0" rtl="0" algn="ctr">
+              <a:lnSpc>
+                <a:spcPct val="90000"/>
+              </a:lnSpc>
+              <a:spcBef>
+                <a:spcPts val="0"/>
+              </a:spcBef>
+              <a:spcAft>
+                <a:spcPts val="0"/>
+              </a:spcAft>
+              <a:buNone/>
+            </a:pPr>
+            <a:r>
+              <a:rPr b="1" lang="en" sz="2800">
+                <a:solidFill>
+                  <a:srgbClr val="FF0000"/>
+                </a:solidFill>
+                <a:highlight>
+                  <a:schemeClr val="dk1"/>
+                </a:highlight>
+                <a:latin typeface="Lexend Deca"/>
+                <a:ea typeface="Lexend Deca"/>
+                <a:cs typeface="Lexend Deca"/>
+                <a:sym typeface="Lexend Deca"/>
+              </a:rPr>
+              <a:t> 唱生日歌與享用生日蛋糕</a:t>
+            </a:r>
+            <a:endParaRPr/>
+          </a:p>
+        </p:txBody>
+      </p:sp>
+    </p:spTree>
+  </p:cSld>
+  <p:clrMapOvr>
+    <a:masterClrMapping/>
+  </p:clrMapOvr>
+</p:sld>
+</file>
+
+<file path=ppt/slides/slide42.xml><?xml version="1.0" encoding="utf-8"?>
+<p:sld xmlns:a="http://schemas.openxmlformats.org/drawingml/2006/main" xmlns:r="http://schemas.openxmlformats.org/officeDocument/2006/relationships" xmlns:mc="http://schemas.openxmlformats.org/markup-compatibility/2006" xmlns:mv="urn:schemas-microsoft-com:mac:vml" xmlns:p="http://schemas.openxmlformats.org/presentationml/2006/main" xmlns:c="http://schemas.openxmlformats.org/drawingml/2006/chart" xmlns:dgm="http://schemas.openxmlformats.org/drawingml/2006/diagram" xmlns:o="urn:schemas-microsoft-com:office:office" xmlns:v="urn:schemas-microsoft-com:vml" xmlns:pvml="urn:schemas-microsoft-com:office:powerpoint" xmlns:com="http://schemas.openxmlformats.org/drawingml/2006/compatibility" xmlns:p14="http://schemas.microsoft.com/office/powerpoint/2010/main" xmlns:p15="http://schemas.microsoft.com/office/powerpoint/2012/main" xmlns:ahyp="http://schemas.microsoft.com/office/drawing/2018/hyperlinkcolor" show="0">
+  <p:cSld>
+    <p:bg>
+      <p:bgPr>
+        <a:blipFill>
+          <a:blip r:embed="rId9003">
+            <a:alphaModFix/>
+          </a:blip>
+          <a:stretch>
+            <a:fillRect/>
+          </a:stretch>
+        </a:blipFill>
+      </p:bgPr>
+    </p:bg>
+    <p:spTree>
+      <p:nvGrpSpPr>
+        <p:cNvPr id="397" name="Shape 397"/>
+        <p:cNvGrpSpPr/>
+        <p:nvPr/>
+      </p:nvGrpSpPr>
+      <p:grpSpPr>
+        <a:xfrm>
+          <a:off x="0" y="0"/>
+          <a:ext cx="0" cy="0"/>
+          <a:chOff x="0" y="0"/>
+          <a:chExt cx="0" cy="0"/>
+        </a:xfrm>
+      </p:grpSpPr>
+      <p:sp>
+        <p:nvSpPr>
+          <p:cNvPr id="398" name="Google Shape;398;p67"/>
+          <p:cNvSpPr txBox="1"/>
+          <p:nvPr/>
+        </p:nvSpPr>
+        <p:spPr>
+          <a:xfrm>
+            <a:off x="0" y="0"/>
+            <a:ext cx="9144000" cy="892800"/>
+          </a:xfrm>
+          <a:prstGeom prst="rect">
+            <a:avLst/>
+          </a:prstGeom>
+          <a:noFill/>
+          <a:ln>
+            <a:noFill/>
+          </a:ln>
+        </p:spPr>
+        <p:txBody>
+          <a:bodyPr anchorCtr="0" anchor="t" bIns="91425" lIns="91425" spcFirstLastPara="1" rIns="91425" wrap="square" tIns="91425">
+            <a:spAutoFit/>
+          </a:bodyPr>
+          <a:lstStyle/>
+          <a:p>
+            <a:pPr indent="0" lvl="0" marL="0" rtl="0" algn="ctr">
+              <a:spcBef>
+                <a:spcPts val="0"/>
+              </a:spcBef>
+              <a:spcAft>
+                <a:spcPts val="0"/>
+              </a:spcAft>
+              <a:buNone/>
+            </a:pPr>
+            <a:r>
+              <a:rPr lang="en" sz="4600"/>
+              <a:t>  </a:t>
+            </a:r>
+            <a:r>
+              <a:rPr lang="en" sz="4600">
+                <a:solidFill>
+                  <a:srgbClr val="FF0000"/>
+                </a:solidFill>
+                <a:highlight>
+                  <a:srgbClr val="FFFF00"/>
+                </a:highlight>
+              </a:rPr>
+              <a:t>❤️</a:t>
+            </a:r>
+            <a:r>
+              <a:rPr b="1" lang="en" sz="3300">
+                <a:highlight>
+                  <a:srgbClr val="FFFF00"/>
+                </a:highlight>
+                <a:latin typeface="Lexend Deca"/>
+                <a:ea typeface="Lexend Deca"/>
+                <a:cs typeface="Lexend Deca"/>
+                <a:sym typeface="Lexend Deca"/>
+              </a:rPr>
+              <a:t>4月份生日的家人們</a:t>
+            </a:r>
+            <a:r>
+              <a:rPr lang="en" sz="4600">
+                <a:solidFill>
+                  <a:srgbClr val="FF0000"/>
+                </a:solidFill>
+                <a:highlight>
+                  <a:srgbClr val="FFFF00"/>
+                </a:highlight>
+              </a:rPr>
+              <a:t>❤️</a:t>
+            </a:r>
+            <a:r>
+              <a:rPr lang="en" sz="4600"/>
+              <a:t> </a:t>
+            </a:r>
+            <a:endParaRPr sz="4600">
+              <a:solidFill>
+                <a:srgbClr val="FF0000"/>
+              </a:solidFill>
+            </a:endParaRPr>
+          </a:p>
+        </p:txBody>
+      </p:sp>
+      <p:sp>
+        <p:nvSpPr>
+          <p:cNvPr id="399" name="Birthday Name 0"/>
+          <p:cNvSpPr txBox="1"/>
+          <p:nvPr/>
+        </p:nvSpPr>
+        <p:spPr>
+          <a:xfrm>
+            <a:off x="298800" y="920000"/>
+            <a:ext cx="8500000" cy="2800000"/>
+          </a:xfrm>
+          <a:prstGeom prst="rect">
+            <a:avLst/>
+          </a:prstGeom>
+          <a:noFill/>
+        </p:spPr>
+        <p:txBody>
+          <a:bodyPr wrap="none" anchor="ctr" lIns="45720" rIns="45720" tIns="0" bIns="0">
+            <a:noAutofit/>
+          </a:bodyPr>
+          <a:lstStyle/>
+          <a:p>
+            <a:pPr algn="ctr" fontAlgn="ctr">
+              <a:buNone/>
+            </a:pPr>
+            <a:r>
+              <a:rPr b="1" lang="en" sz="3600">
+                <a:solidFill>
+                  <a:srgbClr val="4C1130"/>
+                </a:solidFill>
+                <a:highlight>
+                  <a:schemeClr val="dk1"/>
+                </a:highlight>
+                <a:latin typeface="DFKai-SB"/>
+                <a:ea typeface="DFKai-SB"/>
+                <a:cs typeface="DFKai-SB"/>
+                <a:sym typeface="DFKai-SB"/>
+              </a:rPr>
+              <a:t xml:space="preserve"> </a:t>
+            </a:r>
+            <a:endParaRPr b="1" sz="3600"/>
+          </a:p>
+        </p:txBody>
+      </p:sp>
+      <p:sp>
+        <p:nvSpPr>
+          <p:cNvPr id="400" name="Google Shape;400;p67"/>
+          <p:cNvSpPr txBox="1"/>
+          <p:nvPr/>
+        </p:nvSpPr>
+        <p:spPr>
+          <a:xfrm>
+            <a:off x="0" y="2037522"/>
+            <a:ext cx="9144000" cy="400200"/>
+          </a:xfrm>
+          <a:prstGeom prst="rect">
+            <a:avLst/>
+          </a:prstGeom>
+          <a:noFill/>
+          <a:ln>
+            <a:noFill/>
+          </a:ln>
+        </p:spPr>
+        <p:txBody>
+          <a:bodyPr anchorCtr="0" anchor="t" bIns="91425" lIns="91425" spcFirstLastPara="1" rIns="91425" wrap="square" tIns="91425">
+            <a:spAutoFit/>
+          </a:bodyPr>
+          <a:lstStyle/>
+          <a:p>
+            <a:pPr indent="0" lvl="0" marL="0" rtl="0" algn="l">
+              <a:spcBef>
+                <a:spcPts val="0"/>
+              </a:spcBef>
+              <a:spcAft>
+                <a:spcPts val="0"/>
+              </a:spcAft>
+              <a:buNone/>
+            </a:pPr>
+            <a:r>
+              <a:t/>
+            </a:r>
+            <a:endParaRPr>
+              <a:latin typeface="Lato"/>
+              <a:ea typeface="Lato"/>
+              <a:cs typeface="Lato"/>
+              <a:sym typeface="Lato"/>
+            </a:endParaRPr>
+          </a:p>
+        </p:txBody>
+      </p:sp>
+      <p:sp>
+        <p:nvSpPr>
+          <p:cNvPr id="401" name="Google Shape;401;p67"/>
+          <p:cNvSpPr txBox="1"/>
+          <p:nvPr/>
+        </p:nvSpPr>
+        <p:spPr>
+          <a:xfrm>
+            <a:off x="228325" y="3894775"/>
+            <a:ext cx="4893900" cy="960600"/>
+          </a:xfrm>
+          <a:prstGeom prst="rect">
+            <a:avLst/>
+          </a:prstGeom>
+          <a:noFill/>
+          <a:ln>
+            <a:noFill/>
+          </a:ln>
+        </p:spPr>
+        <p:txBody>
+          <a:bodyPr anchorCtr="0" anchor="t" bIns="91425" lIns="91425" spcFirstLastPara="1" rIns="91425" wrap="square" tIns="91425">
+            <a:spAutoFit/>
+          </a:bodyPr>
+          <a:lstStyle/>
+          <a:p>
+            <a:pPr indent="0" lvl="0" marL="0" rtl="0" algn="ctr">
+              <a:lnSpc>
+                <a:spcPct val="90000"/>
+              </a:lnSpc>
+              <a:spcBef>
+                <a:spcPts val="0"/>
+              </a:spcBef>
+              <a:spcAft>
+                <a:spcPts val="0"/>
+              </a:spcAft>
+              <a:buNone/>
+            </a:pPr>
+            <a:r>
+              <a:rPr b="1" lang="en" sz="2800">
+                <a:solidFill>
+                  <a:srgbClr val="FF0000"/>
+                </a:solidFill>
+                <a:highlight>
+                  <a:schemeClr val="dk1"/>
+                </a:highlight>
+                <a:latin typeface="Lexend Deca"/>
+                <a:ea typeface="Lexend Deca"/>
+                <a:cs typeface="Lexend Deca"/>
+                <a:sym typeface="Lexend Deca"/>
+              </a:rPr>
+              <a:t>我們將在午餐聚會時禱告祝福</a:t>
+            </a:r>
+            <a:endParaRPr b="1" sz="2800">
+              <a:solidFill>
+                <a:srgbClr val="FF0000"/>
+              </a:solidFill>
+              <a:highlight>
+                <a:schemeClr val="dk1"/>
+              </a:highlight>
+              <a:latin typeface="Lexend Deca"/>
+              <a:ea typeface="Lexend Deca"/>
+              <a:cs typeface="Lexend Deca"/>
+              <a:sym typeface="Lexend Deca"/>
+            </a:endParaRPr>
+          </a:p>
+          <a:p>
+            <a:pPr indent="0" lvl="0" marL="0" rtl="0" algn="ctr">
+              <a:lnSpc>
+                <a:spcPct val="90000"/>
+              </a:lnSpc>
+              <a:spcBef>
+                <a:spcPts val="0"/>
+              </a:spcBef>
+              <a:spcAft>
+                <a:spcPts val="0"/>
+              </a:spcAft>
+              <a:buNone/>
+            </a:pPr>
+            <a:r>
+              <a:rPr b="1" lang="en" sz="2800">
+                <a:solidFill>
+                  <a:srgbClr val="FF0000"/>
+                </a:solidFill>
+                <a:highlight>
+                  <a:schemeClr val="dk1"/>
+                </a:highlight>
+                <a:latin typeface="Lexend Deca"/>
+                <a:ea typeface="Lexend Deca"/>
+                <a:cs typeface="Lexend Deca"/>
+                <a:sym typeface="Lexend Deca"/>
+              </a:rPr>
+              <a:t> 唱生日歌與享用生日蛋糕</a:t>
+            </a:r>
+            <a:endParaRPr/>
+          </a:p>
+        </p:txBody>
+      </p:sp>
+    </p:spTree>
+  </p:cSld>
+  <p:clrMapOvr>
+    <a:masterClrMapping/>
+  </p:clrMapOvr>
+</p:sld>
+</file>
+
+<file path=ppt/slides/slide43.xml><?xml version="1.0" encoding="utf-8"?>
+<p:sld xmlns:a="http://schemas.openxmlformats.org/drawingml/2006/main" xmlns:r="http://schemas.openxmlformats.org/officeDocument/2006/relationships" xmlns:mc="http://schemas.openxmlformats.org/markup-compatibility/2006" xmlns:mv="urn:schemas-microsoft-com:mac:vml" xmlns:p="http://schemas.openxmlformats.org/presentationml/2006/main" xmlns:c="http://schemas.openxmlformats.org/drawingml/2006/chart" xmlns:dgm="http://schemas.openxmlformats.org/drawingml/2006/diagram" xmlns:o="urn:schemas-microsoft-com:office:office" xmlns:v="urn:schemas-microsoft-com:vml" xmlns:pvml="urn:schemas-microsoft-com:office:powerpoint" xmlns:com="http://schemas.openxmlformats.org/drawingml/2006/compatibility" xmlns:p14="http://schemas.microsoft.com/office/powerpoint/2010/main" xmlns:p15="http://schemas.microsoft.com/office/powerpoint/2012/main" xmlns:ahyp="http://schemas.microsoft.com/office/drawing/2018/hyperlinkcolor" show="0">
+  <p:cSld>
+    <p:bg>
+      <p:bgPr>
+        <a:blipFill>
+          <a:blip r:embed="rId9003">
+            <a:alphaModFix/>
+          </a:blip>
+          <a:stretch>
+            <a:fillRect/>
+          </a:stretch>
+        </a:blipFill>
+      </p:bgPr>
+    </p:bg>
+    <p:spTree>
+      <p:nvGrpSpPr>
+        <p:cNvPr id="397" name="Shape 397"/>
+        <p:cNvGrpSpPr/>
+        <p:nvPr/>
+      </p:nvGrpSpPr>
+      <p:grpSpPr>
+        <a:xfrm>
+          <a:off x="0" y="0"/>
+          <a:ext cx="0" cy="0"/>
+          <a:chOff x="0" y="0"/>
+          <a:chExt cx="0" cy="0"/>
+        </a:xfrm>
+      </p:grpSpPr>
+      <p:sp>
+        <p:nvSpPr>
+          <p:cNvPr id="398" name="Google Shape;398;p67"/>
+          <p:cNvSpPr txBox="1"/>
+          <p:nvPr/>
+        </p:nvSpPr>
+        <p:spPr>
+          <a:xfrm>
+            <a:off x="0" y="0"/>
+            <a:ext cx="9144000" cy="892800"/>
+          </a:xfrm>
+          <a:prstGeom prst="rect">
+            <a:avLst/>
+          </a:prstGeom>
+          <a:noFill/>
+          <a:ln>
+            <a:noFill/>
+          </a:ln>
+        </p:spPr>
+        <p:txBody>
+          <a:bodyPr anchorCtr="0" anchor="t" bIns="91425" lIns="91425" spcFirstLastPara="1" rIns="91425" wrap="square" tIns="91425">
+            <a:spAutoFit/>
+          </a:bodyPr>
+          <a:lstStyle/>
+          <a:p>
+            <a:pPr indent="0" lvl="0" marL="0" rtl="0" algn="ctr">
+              <a:spcBef>
+                <a:spcPts val="0"/>
+              </a:spcBef>
+              <a:spcAft>
+                <a:spcPts val="0"/>
+              </a:spcAft>
+              <a:buNone/>
+            </a:pPr>
+            <a:r>
+              <a:rPr lang="en" sz="4600"/>
+              <a:t>  </a:t>
+            </a:r>
+            <a:r>
+              <a:rPr lang="en" sz="4600">
+                <a:solidFill>
+                  <a:srgbClr val="FF0000"/>
+                </a:solidFill>
+                <a:highlight>
+                  <a:srgbClr val="FFFF00"/>
+                </a:highlight>
+              </a:rPr>
+              <a:t>❤️</a:t>
+            </a:r>
+            <a:r>
+              <a:rPr b="1" lang="en" sz="3300">
+                <a:highlight>
+                  <a:srgbClr val="FFFF00"/>
+                </a:highlight>
+                <a:latin typeface="Lexend Deca"/>
+                <a:ea typeface="Lexend Deca"/>
+                <a:cs typeface="Lexend Deca"/>
+                <a:sym typeface="Lexend Deca"/>
+              </a:rPr>
+              <a:t>5月份生日的家人們</a:t>
+            </a:r>
+            <a:r>
+              <a:rPr lang="en" sz="4600">
+                <a:solidFill>
+                  <a:srgbClr val="FF0000"/>
+                </a:solidFill>
+                <a:highlight>
+                  <a:srgbClr val="FFFF00"/>
+                </a:highlight>
+              </a:rPr>
+              <a:t>❤️</a:t>
+            </a:r>
+            <a:r>
+              <a:rPr lang="en" sz="4600"/>
+              <a:t> </a:t>
+            </a:r>
+            <a:endParaRPr sz="4600">
+              <a:solidFill>
+                <a:srgbClr val="FF0000"/>
+              </a:solidFill>
+            </a:endParaRPr>
+          </a:p>
+        </p:txBody>
+      </p:sp>
+      <p:sp>
+        <p:nvSpPr>
+          <p:cNvPr id="399" name="Birthday Name 0"/>
+          <p:cNvSpPr txBox="1"/>
+          <p:nvPr/>
+        </p:nvSpPr>
+        <p:spPr>
+          <a:xfrm>
+            <a:off x="298800" y="920000"/>
+            <a:ext cx="8500000" cy="2800000"/>
+          </a:xfrm>
+          <a:prstGeom prst="rect">
+            <a:avLst/>
+          </a:prstGeom>
+          <a:noFill/>
+        </p:spPr>
+        <p:txBody>
+          <a:bodyPr wrap="none" anchor="ctr" lIns="45720" rIns="45720" tIns="0" bIns="0">
+            <a:noAutofit/>
+          </a:bodyPr>
+          <a:lstStyle/>
+          <a:p>
+            <a:pPr algn="ctr" fontAlgn="ctr">
+              <a:buNone/>
+            </a:pPr>
+            <a:r>
+              <a:rPr b="1" lang="en" sz="3600">
+                <a:solidFill>
+                  <a:srgbClr val="4C1130"/>
+                </a:solidFill>
+                <a:highlight>
+                  <a:schemeClr val="dk1"/>
+                </a:highlight>
+                <a:latin typeface="DFKai-SB"/>
+                <a:ea typeface="DFKai-SB"/>
+                <a:cs typeface="DFKai-SB"/>
+                <a:sym typeface="DFKai-SB"/>
+              </a:rPr>
+              <a:t xml:space="preserve"> </a:t>
+            </a:r>
+            <a:endParaRPr b="1" sz="3600"/>
+          </a:p>
+        </p:txBody>
+      </p:sp>
+      <p:sp>
+        <p:nvSpPr>
+          <p:cNvPr id="400" name="Google Shape;400;p67"/>
+          <p:cNvSpPr txBox="1"/>
+          <p:nvPr/>
+        </p:nvSpPr>
+        <p:spPr>
+          <a:xfrm>
+            <a:off x="0" y="2037522"/>
+            <a:ext cx="9144000" cy="400200"/>
+          </a:xfrm>
+          <a:prstGeom prst="rect">
+            <a:avLst/>
+          </a:prstGeom>
+          <a:noFill/>
+          <a:ln>
+            <a:noFill/>
+          </a:ln>
+        </p:spPr>
+        <p:txBody>
+          <a:bodyPr anchorCtr="0" anchor="t" bIns="91425" lIns="91425" spcFirstLastPara="1" rIns="91425" wrap="square" tIns="91425">
+            <a:spAutoFit/>
+          </a:bodyPr>
+          <a:lstStyle/>
+          <a:p>
+            <a:pPr indent="0" lvl="0" marL="0" rtl="0" algn="l">
+              <a:spcBef>
+                <a:spcPts val="0"/>
+              </a:spcBef>
+              <a:spcAft>
+                <a:spcPts val="0"/>
+              </a:spcAft>
+              <a:buNone/>
+            </a:pPr>
+            <a:r>
+              <a:t/>
+            </a:r>
+            <a:endParaRPr>
+              <a:latin typeface="Lato"/>
+              <a:ea typeface="Lato"/>
+              <a:cs typeface="Lato"/>
+              <a:sym typeface="Lato"/>
+            </a:endParaRPr>
+          </a:p>
+        </p:txBody>
+      </p:sp>
+      <p:sp>
+        <p:nvSpPr>
+          <p:cNvPr id="401" name="Google Shape;401;p67"/>
+          <p:cNvSpPr txBox="1"/>
+          <p:nvPr/>
+        </p:nvSpPr>
+        <p:spPr>
+          <a:xfrm>
+            <a:off x="228325" y="3894775"/>
+            <a:ext cx="4893900" cy="960600"/>
+          </a:xfrm>
+          <a:prstGeom prst="rect">
+            <a:avLst/>
+          </a:prstGeom>
+          <a:noFill/>
+          <a:ln>
+            <a:noFill/>
+          </a:ln>
+        </p:spPr>
+        <p:txBody>
+          <a:bodyPr anchorCtr="0" anchor="t" bIns="91425" lIns="91425" spcFirstLastPara="1" rIns="91425" wrap="square" tIns="91425">
+            <a:spAutoFit/>
+          </a:bodyPr>
+          <a:lstStyle/>
+          <a:p>
+            <a:pPr indent="0" lvl="0" marL="0" rtl="0" algn="ctr">
+              <a:lnSpc>
+                <a:spcPct val="90000"/>
+              </a:lnSpc>
+              <a:spcBef>
+                <a:spcPts val="0"/>
+              </a:spcBef>
+              <a:spcAft>
+                <a:spcPts val="0"/>
+              </a:spcAft>
+              <a:buNone/>
+            </a:pPr>
+            <a:r>
+              <a:rPr b="1" lang="en" sz="2800">
+                <a:solidFill>
+                  <a:srgbClr val="FF0000"/>
+                </a:solidFill>
+                <a:highlight>
+                  <a:schemeClr val="dk1"/>
+                </a:highlight>
+                <a:latin typeface="Lexend Deca"/>
+                <a:ea typeface="Lexend Deca"/>
+                <a:cs typeface="Lexend Deca"/>
+                <a:sym typeface="Lexend Deca"/>
+              </a:rPr>
+              <a:t>我們將在午餐聚會時禱告祝福</a:t>
+            </a:r>
+            <a:endParaRPr b="1" sz="2800">
+              <a:solidFill>
+                <a:srgbClr val="FF0000"/>
+              </a:solidFill>
+              <a:highlight>
+                <a:schemeClr val="dk1"/>
+              </a:highlight>
+              <a:latin typeface="Lexend Deca"/>
+              <a:ea typeface="Lexend Deca"/>
+              <a:cs typeface="Lexend Deca"/>
+              <a:sym typeface="Lexend Deca"/>
+            </a:endParaRPr>
+          </a:p>
+          <a:p>
+            <a:pPr indent="0" lvl="0" marL="0" rtl="0" algn="ctr">
+              <a:lnSpc>
+                <a:spcPct val="90000"/>
+              </a:lnSpc>
+              <a:spcBef>
+                <a:spcPts val="0"/>
+              </a:spcBef>
+              <a:spcAft>
+                <a:spcPts val="0"/>
+              </a:spcAft>
+              <a:buNone/>
+            </a:pPr>
+            <a:r>
+              <a:rPr b="1" lang="en" sz="2800">
+                <a:solidFill>
+                  <a:srgbClr val="FF0000"/>
+                </a:solidFill>
+                <a:highlight>
+                  <a:schemeClr val="dk1"/>
+                </a:highlight>
+                <a:latin typeface="Lexend Deca"/>
+                <a:ea typeface="Lexend Deca"/>
+                <a:cs typeface="Lexend Deca"/>
+                <a:sym typeface="Lexend Deca"/>
+              </a:rPr>
+              <a:t> 唱生日歌與享用生日蛋糕</a:t>
+            </a:r>
+            <a:endParaRPr/>
+          </a:p>
+        </p:txBody>
+      </p:sp>
+    </p:spTree>
+  </p:cSld>
+  <p:clrMapOvr>
+    <a:masterClrMapping/>
+  </p:clrMapOvr>
+</p:sld>
+</file>
+
+<file path=ppt/slides/slide44.xml><?xml version="1.0" encoding="utf-8"?>
+<p:sld xmlns:a="http://schemas.openxmlformats.org/drawingml/2006/main" xmlns:r="http://schemas.openxmlformats.org/officeDocument/2006/relationships" xmlns:mc="http://schemas.openxmlformats.org/markup-compatibility/2006" xmlns:mv="urn:schemas-microsoft-com:mac:vml" xmlns:p="http://schemas.openxmlformats.org/presentationml/2006/main" xmlns:c="http://schemas.openxmlformats.org/drawingml/2006/chart" xmlns:dgm="http://schemas.openxmlformats.org/drawingml/2006/diagram" xmlns:o="urn:schemas-microsoft-com:office:office" xmlns:v="urn:schemas-microsoft-com:vml" xmlns:pvml="urn:schemas-microsoft-com:office:powerpoint" xmlns:com="http://schemas.openxmlformats.org/drawingml/2006/compatibility" xmlns:p14="http://schemas.microsoft.com/office/powerpoint/2010/main" xmlns:p15="http://schemas.microsoft.com/office/powerpoint/2012/main" xmlns:ahyp="http://schemas.microsoft.com/office/drawing/2018/hyperlinkcolor" show="0">
+  <p:cSld>
+    <p:bg>
+      <p:bgPr>
+        <a:blipFill>
+          <a:blip r:embed="rId9003">
+            <a:alphaModFix/>
+          </a:blip>
+          <a:stretch>
+            <a:fillRect/>
+          </a:stretch>
+        </a:blipFill>
+      </p:bgPr>
+    </p:bg>
+    <p:spTree>
+      <p:nvGrpSpPr>
+        <p:cNvPr id="397" name="Shape 397"/>
+        <p:cNvGrpSpPr/>
+        <p:nvPr/>
+      </p:nvGrpSpPr>
+      <p:grpSpPr>
+        <a:xfrm>
+          <a:off x="0" y="0"/>
+          <a:ext cx="0" cy="0"/>
+          <a:chOff x="0" y="0"/>
+          <a:chExt cx="0" cy="0"/>
+        </a:xfrm>
+      </p:grpSpPr>
+      <p:sp>
+        <p:nvSpPr>
+          <p:cNvPr id="398" name="Google Shape;398;p67"/>
+          <p:cNvSpPr txBox="1"/>
+          <p:nvPr/>
+        </p:nvSpPr>
+        <p:spPr>
+          <a:xfrm>
+            <a:off x="0" y="0"/>
+            <a:ext cx="9144000" cy="892800"/>
+          </a:xfrm>
+          <a:prstGeom prst="rect">
+            <a:avLst/>
+          </a:prstGeom>
+          <a:noFill/>
+          <a:ln>
+            <a:noFill/>
+          </a:ln>
+        </p:spPr>
+        <p:txBody>
+          <a:bodyPr anchorCtr="0" anchor="t" bIns="91425" lIns="91425" spcFirstLastPara="1" rIns="91425" wrap="square" tIns="91425">
+            <a:spAutoFit/>
+          </a:bodyPr>
+          <a:lstStyle/>
+          <a:p>
+            <a:pPr indent="0" lvl="0" marL="0" rtl="0" algn="ctr">
+              <a:spcBef>
+                <a:spcPts val="0"/>
+              </a:spcBef>
+              <a:spcAft>
+                <a:spcPts val="0"/>
+              </a:spcAft>
+              <a:buNone/>
+            </a:pPr>
+            <a:r>
+              <a:rPr lang="en" sz="4600"/>
+              <a:t>  </a:t>
+            </a:r>
+            <a:r>
+              <a:rPr lang="en" sz="4600">
+                <a:solidFill>
+                  <a:srgbClr val="FF0000"/>
+                </a:solidFill>
+                <a:highlight>
+                  <a:srgbClr val="FFFF00"/>
+                </a:highlight>
+              </a:rPr>
+              <a:t>❤️</a:t>
+            </a:r>
+            <a:r>
+              <a:rPr b="1" lang="en" sz="3300">
+                <a:highlight>
+                  <a:srgbClr val="FFFF00"/>
+                </a:highlight>
+                <a:latin typeface="Lexend Deca"/>
+                <a:ea typeface="Lexend Deca"/>
+                <a:cs typeface="Lexend Deca"/>
+                <a:sym typeface="Lexend Deca"/>
+              </a:rPr>
+              <a:t>6月份生日的家人們</a:t>
+            </a:r>
+            <a:r>
+              <a:rPr lang="en" sz="4600">
+                <a:solidFill>
+                  <a:srgbClr val="FF0000"/>
+                </a:solidFill>
+                <a:highlight>
+                  <a:srgbClr val="FFFF00"/>
+                </a:highlight>
+              </a:rPr>
+              <a:t>❤️</a:t>
+            </a:r>
+            <a:r>
+              <a:rPr lang="en" sz="4600"/>
+              <a:t> </a:t>
+            </a:r>
+            <a:endParaRPr sz="4600">
+              <a:solidFill>
+                <a:srgbClr val="FF0000"/>
+              </a:solidFill>
+            </a:endParaRPr>
+          </a:p>
+        </p:txBody>
+      </p:sp>
+      <p:sp>
+        <p:nvSpPr>
+          <p:cNvPr id="399" name="Birthday Name 0"/>
+          <p:cNvSpPr txBox="1"/>
+          <p:nvPr/>
+        </p:nvSpPr>
+        <p:spPr>
+          <a:xfrm>
+            <a:off x="298800" y="920000"/>
+            <a:ext cx="8500000" cy="2800000"/>
+          </a:xfrm>
+          <a:prstGeom prst="rect">
+            <a:avLst/>
+          </a:prstGeom>
+          <a:noFill/>
+        </p:spPr>
+        <p:txBody>
+          <a:bodyPr wrap="none" anchor="ctr" lIns="45720" rIns="45720" tIns="0" bIns="0">
+            <a:noAutofit/>
+          </a:bodyPr>
+          <a:lstStyle/>
+          <a:p>
+            <a:pPr algn="ctr" fontAlgn="ctr">
+              <a:buNone/>
+            </a:pPr>
+            <a:r>
+              <a:rPr b="1" lang="en" sz="3600">
+                <a:solidFill>
+                  <a:srgbClr val="4C1130"/>
+                </a:solidFill>
+                <a:highlight>
+                  <a:schemeClr val="dk1"/>
+                </a:highlight>
+                <a:latin typeface="DFKai-SB"/>
+                <a:ea typeface="DFKai-SB"/>
+                <a:cs typeface="DFKai-SB"/>
+                <a:sym typeface="DFKai-SB"/>
+              </a:rPr>
+              <a:t xml:space="preserve"> </a:t>
+            </a:r>
+            <a:endParaRPr b="1" sz="3600"/>
+          </a:p>
+        </p:txBody>
+      </p:sp>
+      <p:sp>
+        <p:nvSpPr>
+          <p:cNvPr id="400" name="Google Shape;400;p67"/>
+          <p:cNvSpPr txBox="1"/>
+          <p:nvPr/>
+        </p:nvSpPr>
+        <p:spPr>
+          <a:xfrm>
+            <a:off x="0" y="2037522"/>
+            <a:ext cx="9144000" cy="400200"/>
+          </a:xfrm>
+          <a:prstGeom prst="rect">
+            <a:avLst/>
+          </a:prstGeom>
+          <a:noFill/>
+          <a:ln>
+            <a:noFill/>
+          </a:ln>
+        </p:spPr>
+        <p:txBody>
+          <a:bodyPr anchorCtr="0" anchor="t" bIns="91425" lIns="91425" spcFirstLastPara="1" rIns="91425" wrap="square" tIns="91425">
+            <a:spAutoFit/>
+          </a:bodyPr>
+          <a:lstStyle/>
+          <a:p>
+            <a:pPr indent="0" lvl="0" marL="0" rtl="0" algn="l">
+              <a:spcBef>
+                <a:spcPts val="0"/>
+              </a:spcBef>
+              <a:spcAft>
+                <a:spcPts val="0"/>
+              </a:spcAft>
+              <a:buNone/>
+            </a:pPr>
+            <a:r>
+              <a:t/>
+            </a:r>
+            <a:endParaRPr>
+              <a:latin typeface="Lato"/>
+              <a:ea typeface="Lato"/>
+              <a:cs typeface="Lato"/>
+              <a:sym typeface="Lato"/>
+            </a:endParaRPr>
+          </a:p>
+        </p:txBody>
+      </p:sp>
+      <p:sp>
+        <p:nvSpPr>
+          <p:cNvPr id="401" name="Google Shape;401;p67"/>
+          <p:cNvSpPr txBox="1"/>
+          <p:nvPr/>
+        </p:nvSpPr>
+        <p:spPr>
+          <a:xfrm>
+            <a:off x="228325" y="3894775"/>
+            <a:ext cx="4893900" cy="960600"/>
+          </a:xfrm>
+          <a:prstGeom prst="rect">
+            <a:avLst/>
+          </a:prstGeom>
+          <a:noFill/>
+          <a:ln>
+            <a:noFill/>
+          </a:ln>
+        </p:spPr>
+        <p:txBody>
+          <a:bodyPr anchorCtr="0" anchor="t" bIns="91425" lIns="91425" spcFirstLastPara="1" rIns="91425" wrap="square" tIns="91425">
+            <a:spAutoFit/>
+          </a:bodyPr>
+          <a:lstStyle/>
+          <a:p>
+            <a:pPr indent="0" lvl="0" marL="0" rtl="0" algn="ctr">
+              <a:lnSpc>
+                <a:spcPct val="90000"/>
+              </a:lnSpc>
+              <a:spcBef>
+                <a:spcPts val="0"/>
+              </a:spcBef>
+              <a:spcAft>
+                <a:spcPts val="0"/>
+              </a:spcAft>
+              <a:buNone/>
+            </a:pPr>
+            <a:r>
+              <a:rPr b="1" lang="en" sz="2800">
+                <a:solidFill>
+                  <a:srgbClr val="FF0000"/>
+                </a:solidFill>
+                <a:highlight>
+                  <a:schemeClr val="dk1"/>
+                </a:highlight>
+                <a:latin typeface="Lexend Deca"/>
+                <a:ea typeface="Lexend Deca"/>
+                <a:cs typeface="Lexend Deca"/>
+                <a:sym typeface="Lexend Deca"/>
+              </a:rPr>
+              <a:t>我們將在午餐聚會時禱告祝福</a:t>
+            </a:r>
+            <a:endParaRPr b="1" sz="2800">
+              <a:solidFill>
+                <a:srgbClr val="FF0000"/>
+              </a:solidFill>
+              <a:highlight>
+                <a:schemeClr val="dk1"/>
+              </a:highlight>
+              <a:latin typeface="Lexend Deca"/>
+              <a:ea typeface="Lexend Deca"/>
+              <a:cs typeface="Lexend Deca"/>
+              <a:sym typeface="Lexend Deca"/>
+            </a:endParaRPr>
+          </a:p>
+          <a:p>
+            <a:pPr indent="0" lvl="0" marL="0" rtl="0" algn="ctr">
+              <a:lnSpc>
+                <a:spcPct val="90000"/>
+              </a:lnSpc>
+              <a:spcBef>
+                <a:spcPts val="0"/>
+              </a:spcBef>
+              <a:spcAft>
+                <a:spcPts val="0"/>
+              </a:spcAft>
+              <a:buNone/>
+            </a:pPr>
+            <a:r>
+              <a:rPr b="1" lang="en" sz="2800">
+                <a:solidFill>
+                  <a:srgbClr val="FF0000"/>
+                </a:solidFill>
+                <a:highlight>
+                  <a:schemeClr val="dk1"/>
+                </a:highlight>
+                <a:latin typeface="Lexend Deca"/>
+                <a:ea typeface="Lexend Deca"/>
+                <a:cs typeface="Lexend Deca"/>
+                <a:sym typeface="Lexend Deca"/>
+              </a:rPr>
+              <a:t> 唱生日歌與享用生日蛋糕</a:t>
+            </a:r>
+            <a:endParaRPr/>
+          </a:p>
+        </p:txBody>
+      </p:sp>
+    </p:spTree>
+  </p:cSld>
+  <p:clrMapOvr>
+    <a:masterClrMapping/>
+  </p:clrMapOvr>
+</p:sld>
+</file>
+
+<file path=ppt/slides/slide45.xml><?xml version="1.0" encoding="utf-8"?>
+<p:sld xmlns:a="http://schemas.openxmlformats.org/drawingml/2006/main" xmlns:r="http://schemas.openxmlformats.org/officeDocument/2006/relationships" xmlns:mc="http://schemas.openxmlformats.org/markup-compatibility/2006" xmlns:mv="urn:schemas-microsoft-com:mac:vml" xmlns:p="http://schemas.openxmlformats.org/presentationml/2006/main" xmlns:c="http://schemas.openxmlformats.org/drawingml/2006/chart" xmlns:dgm="http://schemas.openxmlformats.org/drawingml/2006/diagram" xmlns:o="urn:schemas-microsoft-com:office:office" xmlns:v="urn:schemas-microsoft-com:vml" xmlns:pvml="urn:schemas-microsoft-com:office:powerpoint" xmlns:com="http://schemas.openxmlformats.org/drawingml/2006/compatibility" xmlns:p14="http://schemas.microsoft.com/office/powerpoint/2010/main" xmlns:p15="http://schemas.microsoft.com/office/powerpoint/2012/main" xmlns:ahyp="http://schemas.microsoft.com/office/drawing/2018/hyperlinkcolor" show="0">
+  <p:cSld>
+    <p:bg>
+      <p:bgPr>
+        <a:blipFill>
+          <a:blip r:embed="rId9003">
+            <a:alphaModFix/>
+          </a:blip>
+          <a:stretch>
+            <a:fillRect/>
+          </a:stretch>
+        </a:blipFill>
+      </p:bgPr>
+    </p:bg>
+    <p:spTree>
+      <p:nvGrpSpPr>
+        <p:cNvPr id="397" name="Shape 397"/>
+        <p:cNvGrpSpPr/>
+        <p:nvPr/>
+      </p:nvGrpSpPr>
+      <p:grpSpPr>
+        <a:xfrm>
+          <a:off x="0" y="0"/>
+          <a:ext cx="0" cy="0"/>
+          <a:chOff x="0" y="0"/>
+          <a:chExt cx="0" cy="0"/>
+        </a:xfrm>
+      </p:grpSpPr>
+      <p:sp>
+        <p:nvSpPr>
+          <p:cNvPr id="398" name="Google Shape;398;p67"/>
+          <p:cNvSpPr txBox="1"/>
+          <p:nvPr/>
+        </p:nvSpPr>
+        <p:spPr>
+          <a:xfrm>
+            <a:off x="0" y="0"/>
+            <a:ext cx="9144000" cy="892800"/>
+          </a:xfrm>
+          <a:prstGeom prst="rect">
+            <a:avLst/>
+          </a:prstGeom>
+          <a:noFill/>
+          <a:ln>
+            <a:noFill/>
+          </a:ln>
+        </p:spPr>
+        <p:txBody>
+          <a:bodyPr anchorCtr="0" anchor="t" bIns="91425" lIns="91425" spcFirstLastPara="1" rIns="91425" wrap="square" tIns="91425">
+            <a:spAutoFit/>
+          </a:bodyPr>
+          <a:lstStyle/>
+          <a:p>
+            <a:pPr indent="0" lvl="0" marL="0" rtl="0" algn="ctr">
+              <a:spcBef>
+                <a:spcPts val="0"/>
+              </a:spcBef>
+              <a:spcAft>
+                <a:spcPts val="0"/>
+              </a:spcAft>
+              <a:buNone/>
+            </a:pPr>
+            <a:r>
+              <a:rPr lang="en" sz="4600"/>
+              <a:t>  </a:t>
+            </a:r>
+            <a:r>
+              <a:rPr lang="en" sz="4600">
+                <a:solidFill>
+                  <a:srgbClr val="FF0000"/>
+                </a:solidFill>
+                <a:highlight>
+                  <a:srgbClr val="FFFF00"/>
+                </a:highlight>
+              </a:rPr>
+              <a:t>❤️</a:t>
+            </a:r>
+            <a:r>
+              <a:rPr b="1" lang="en" sz="3300">
+                <a:highlight>
+                  <a:srgbClr val="FFFF00"/>
+                </a:highlight>
+                <a:latin typeface="Lexend Deca"/>
+                <a:ea typeface="Lexend Deca"/>
+                <a:cs typeface="Lexend Deca"/>
+                <a:sym typeface="Lexend Deca"/>
+              </a:rPr>
+              <a:t>7月份生日的家人們</a:t>
+            </a:r>
+            <a:r>
+              <a:rPr lang="en" sz="4600">
+                <a:solidFill>
+                  <a:srgbClr val="FF0000"/>
+                </a:solidFill>
+                <a:highlight>
+                  <a:srgbClr val="FFFF00"/>
+                </a:highlight>
+              </a:rPr>
+              <a:t>❤️</a:t>
+            </a:r>
+            <a:r>
+              <a:rPr lang="en" sz="4600"/>
+              <a:t> </a:t>
+            </a:r>
+            <a:endParaRPr sz="4600">
+              <a:solidFill>
+                <a:srgbClr val="FF0000"/>
+              </a:solidFill>
+            </a:endParaRPr>
+          </a:p>
+        </p:txBody>
+      </p:sp>
+      <p:sp>
+        <p:nvSpPr>
+          <p:cNvPr id="399" name="Birthday Name 0"/>
+          <p:cNvSpPr txBox="1"/>
+          <p:nvPr/>
+        </p:nvSpPr>
+        <p:spPr>
+          <a:xfrm>
+            <a:off x="298800" y="920000"/>
+            <a:ext cx="8500000" cy="2800000"/>
+          </a:xfrm>
+          <a:prstGeom prst="rect">
+            <a:avLst/>
+          </a:prstGeom>
+          <a:noFill/>
+        </p:spPr>
+        <p:txBody>
+          <a:bodyPr wrap="none" anchor="ctr" lIns="45720" rIns="45720" tIns="0" bIns="0">
+            <a:noAutofit/>
+          </a:bodyPr>
+          <a:lstStyle/>
+          <a:p>
+            <a:pPr algn="ctr" fontAlgn="ctr">
+              <a:buNone/>
+            </a:pPr>
+            <a:r>
+              <a:rPr b="1" lang="en" sz="3600">
+                <a:solidFill>
+                  <a:srgbClr val="4C1130"/>
+                </a:solidFill>
+                <a:highlight>
+                  <a:schemeClr val="dk1"/>
+                </a:highlight>
+                <a:latin typeface="DFKai-SB"/>
+                <a:ea typeface="DFKai-SB"/>
+                <a:cs typeface="DFKai-SB"/>
+                <a:sym typeface="DFKai-SB"/>
+              </a:rPr>
+              <a:t xml:space="preserve"> </a:t>
+            </a:r>
+            <a:endParaRPr b="1" sz="3600"/>
+          </a:p>
+        </p:txBody>
+      </p:sp>
+      <p:sp>
+        <p:nvSpPr>
+          <p:cNvPr id="400" name="Google Shape;400;p67"/>
+          <p:cNvSpPr txBox="1"/>
+          <p:nvPr/>
+        </p:nvSpPr>
+        <p:spPr>
+          <a:xfrm>
+            <a:off x="0" y="2037522"/>
+            <a:ext cx="9144000" cy="400200"/>
+          </a:xfrm>
+          <a:prstGeom prst="rect">
+            <a:avLst/>
+          </a:prstGeom>
+          <a:noFill/>
+          <a:ln>
+            <a:noFill/>
+          </a:ln>
+        </p:spPr>
+        <p:txBody>
+          <a:bodyPr anchorCtr="0" anchor="t" bIns="91425" lIns="91425" spcFirstLastPara="1" rIns="91425" wrap="square" tIns="91425">
+            <a:spAutoFit/>
+          </a:bodyPr>
+          <a:lstStyle/>
+          <a:p>
+            <a:pPr indent="0" lvl="0" marL="0" rtl="0" algn="l">
+              <a:spcBef>
+                <a:spcPts val="0"/>
+              </a:spcBef>
+              <a:spcAft>
+                <a:spcPts val="0"/>
+              </a:spcAft>
+              <a:buNone/>
+            </a:pPr>
+            <a:r>
+              <a:t/>
+            </a:r>
+            <a:endParaRPr>
+              <a:latin typeface="Lato"/>
+              <a:ea typeface="Lato"/>
+              <a:cs typeface="Lato"/>
+              <a:sym typeface="Lato"/>
+            </a:endParaRPr>
+          </a:p>
+        </p:txBody>
+      </p:sp>
+      <p:sp>
+        <p:nvSpPr>
+          <p:cNvPr id="401" name="Google Shape;401;p67"/>
+          <p:cNvSpPr txBox="1"/>
+          <p:nvPr/>
+        </p:nvSpPr>
+        <p:spPr>
+          <a:xfrm>
+            <a:off x="228325" y="3894775"/>
+            <a:ext cx="4893900" cy="960600"/>
+          </a:xfrm>
+          <a:prstGeom prst="rect">
+            <a:avLst/>
+          </a:prstGeom>
+          <a:noFill/>
+          <a:ln>
+            <a:noFill/>
+          </a:ln>
+        </p:spPr>
+        <p:txBody>
+          <a:bodyPr anchorCtr="0" anchor="t" bIns="91425" lIns="91425" spcFirstLastPara="1" rIns="91425" wrap="square" tIns="91425">
+            <a:spAutoFit/>
+          </a:bodyPr>
+          <a:lstStyle/>
+          <a:p>
+            <a:pPr indent="0" lvl="0" marL="0" rtl="0" algn="ctr">
+              <a:lnSpc>
+                <a:spcPct val="90000"/>
+              </a:lnSpc>
+              <a:spcBef>
+                <a:spcPts val="0"/>
+              </a:spcBef>
+              <a:spcAft>
+                <a:spcPts val="0"/>
+              </a:spcAft>
+              <a:buNone/>
+            </a:pPr>
+            <a:r>
+              <a:rPr b="1" lang="en" sz="2800">
+                <a:solidFill>
+                  <a:srgbClr val="FF0000"/>
+                </a:solidFill>
+                <a:highlight>
+                  <a:schemeClr val="dk1"/>
+                </a:highlight>
+                <a:latin typeface="Lexend Deca"/>
+                <a:ea typeface="Lexend Deca"/>
+                <a:cs typeface="Lexend Deca"/>
+                <a:sym typeface="Lexend Deca"/>
+              </a:rPr>
+              <a:t>我們將在午餐聚會時禱告祝福</a:t>
+            </a:r>
+            <a:endParaRPr b="1" sz="2800">
+              <a:solidFill>
+                <a:srgbClr val="FF0000"/>
+              </a:solidFill>
+              <a:highlight>
+                <a:schemeClr val="dk1"/>
+              </a:highlight>
+              <a:latin typeface="Lexend Deca"/>
+              <a:ea typeface="Lexend Deca"/>
+              <a:cs typeface="Lexend Deca"/>
+              <a:sym typeface="Lexend Deca"/>
+            </a:endParaRPr>
+          </a:p>
+          <a:p>
+            <a:pPr indent="0" lvl="0" marL="0" rtl="0" algn="ctr">
+              <a:lnSpc>
+                <a:spcPct val="90000"/>
+              </a:lnSpc>
+              <a:spcBef>
+                <a:spcPts val="0"/>
+              </a:spcBef>
+              <a:spcAft>
+                <a:spcPts val="0"/>
+              </a:spcAft>
+              <a:buNone/>
+            </a:pPr>
+            <a:r>
+              <a:rPr b="1" lang="en" sz="2800">
+                <a:solidFill>
+                  <a:srgbClr val="FF0000"/>
+                </a:solidFill>
+                <a:highlight>
+                  <a:schemeClr val="dk1"/>
+                </a:highlight>
+                <a:latin typeface="Lexend Deca"/>
+                <a:ea typeface="Lexend Deca"/>
+                <a:cs typeface="Lexend Deca"/>
+                <a:sym typeface="Lexend Deca"/>
+              </a:rPr>
+              <a:t> 唱生日歌與享用生日蛋糕</a:t>
+            </a:r>
+            <a:endParaRPr/>
+          </a:p>
+        </p:txBody>
+      </p:sp>
+    </p:spTree>
+  </p:cSld>
+  <p:clrMapOvr>
+    <a:masterClrMapping/>
+  </p:clrMapOvr>
+</p:sld>
+</file>
+
+<file path=ppt/slides/slide46.xml><?xml version="1.0" encoding="utf-8"?>
+<p:sld xmlns:a="http://schemas.openxmlformats.org/drawingml/2006/main" xmlns:r="http://schemas.openxmlformats.org/officeDocument/2006/relationships" xmlns:mc="http://schemas.openxmlformats.org/markup-compatibility/2006" xmlns:mv="urn:schemas-microsoft-com:mac:vml" xmlns:p="http://schemas.openxmlformats.org/presentationml/2006/main" xmlns:c="http://schemas.openxmlformats.org/drawingml/2006/chart" xmlns:dgm="http://schemas.openxmlformats.org/drawingml/2006/diagram" xmlns:o="urn:schemas-microsoft-com:office:office" xmlns:v="urn:schemas-microsoft-com:vml" xmlns:pvml="urn:schemas-microsoft-com:office:powerpoint" xmlns:com="http://schemas.openxmlformats.org/drawingml/2006/compatibility" xmlns:p14="http://schemas.microsoft.com/office/powerpoint/2010/main" xmlns:p15="http://schemas.microsoft.com/office/powerpoint/2012/main" xmlns:ahyp="http://schemas.microsoft.com/office/drawing/2018/hyperlinkcolor" show="0">
+  <p:cSld>
+    <p:bg>
+      <p:bgPr>
+        <a:blipFill>
+          <a:blip r:embed="rId9003">
+            <a:alphaModFix/>
+          </a:blip>
+          <a:stretch>
+            <a:fillRect/>
+          </a:stretch>
+        </a:blipFill>
+      </p:bgPr>
+    </p:bg>
+    <p:spTree>
+      <p:nvGrpSpPr>
+        <p:cNvPr id="397" name="Shape 397"/>
+        <p:cNvGrpSpPr/>
+        <p:nvPr/>
+      </p:nvGrpSpPr>
+      <p:grpSpPr>
+        <a:xfrm>
+          <a:off x="0" y="0"/>
+          <a:ext cx="0" cy="0"/>
+          <a:chOff x="0" y="0"/>
+          <a:chExt cx="0" cy="0"/>
+        </a:xfrm>
+      </p:grpSpPr>
+      <p:sp>
+        <p:nvSpPr>
+          <p:cNvPr id="398" name="Google Shape;398;p67"/>
+          <p:cNvSpPr txBox="1"/>
+          <p:nvPr/>
+        </p:nvSpPr>
+        <p:spPr>
+          <a:xfrm>
+            <a:off x="0" y="0"/>
+            <a:ext cx="9144000" cy="892800"/>
+          </a:xfrm>
+          <a:prstGeom prst="rect">
+            <a:avLst/>
+          </a:prstGeom>
+          <a:noFill/>
+          <a:ln>
+            <a:noFill/>
+          </a:ln>
+        </p:spPr>
+        <p:txBody>
+          <a:bodyPr anchorCtr="0" anchor="t" bIns="91425" lIns="91425" spcFirstLastPara="1" rIns="91425" wrap="square" tIns="91425">
+            <a:spAutoFit/>
+          </a:bodyPr>
+          <a:lstStyle/>
+          <a:p>
+            <a:pPr indent="0" lvl="0" marL="0" rtl="0" algn="ctr">
+              <a:spcBef>
+                <a:spcPts val="0"/>
+              </a:spcBef>
+              <a:spcAft>
+                <a:spcPts val="0"/>
+              </a:spcAft>
+              <a:buNone/>
+            </a:pPr>
+            <a:r>
+              <a:rPr lang="en" sz="4600"/>
+              <a:t>  </a:t>
+            </a:r>
+            <a:r>
+              <a:rPr lang="en" sz="4600">
+                <a:solidFill>
+                  <a:srgbClr val="FF0000"/>
+                </a:solidFill>
+                <a:highlight>
+                  <a:srgbClr val="FFFF00"/>
+                </a:highlight>
+              </a:rPr>
+              <a:t>❤️</a:t>
+            </a:r>
+            <a:r>
+              <a:rPr b="1" lang="en" sz="3300">
+                <a:highlight>
+                  <a:srgbClr val="FFFF00"/>
+                </a:highlight>
+                <a:latin typeface="Lexend Deca"/>
+                <a:ea typeface="Lexend Deca"/>
+                <a:cs typeface="Lexend Deca"/>
+                <a:sym typeface="Lexend Deca"/>
+              </a:rPr>
+              <a:t>8月份生日的家人們</a:t>
+            </a:r>
+            <a:r>
+              <a:rPr lang="en" sz="4600">
+                <a:solidFill>
+                  <a:srgbClr val="FF0000"/>
+                </a:solidFill>
+                <a:highlight>
+                  <a:srgbClr val="FFFF00"/>
+                </a:highlight>
+              </a:rPr>
+              <a:t>❤️</a:t>
+            </a:r>
+            <a:r>
+              <a:rPr lang="en" sz="4600"/>
+              <a:t> </a:t>
+            </a:r>
+            <a:endParaRPr sz="4600">
+              <a:solidFill>
+                <a:srgbClr val="FF0000"/>
+              </a:solidFill>
+            </a:endParaRPr>
+          </a:p>
+        </p:txBody>
+      </p:sp>
+      <p:sp>
+        <p:nvSpPr>
+          <p:cNvPr id="399" name="Birthday Name 0"/>
+          <p:cNvSpPr txBox="1"/>
+          <p:nvPr/>
+        </p:nvSpPr>
+        <p:spPr>
+          <a:xfrm>
+            <a:off x="298800" y="920000"/>
+            <a:ext cx="8500000" cy="2800000"/>
+          </a:xfrm>
+          <a:prstGeom prst="rect">
+            <a:avLst/>
+          </a:prstGeom>
+          <a:noFill/>
+        </p:spPr>
+        <p:txBody>
+          <a:bodyPr wrap="none" anchor="ctr" lIns="45720" rIns="45720" tIns="0" bIns="0">
+            <a:noAutofit/>
+          </a:bodyPr>
+          <a:lstStyle/>
+          <a:p>
+            <a:pPr algn="ctr" fontAlgn="ctr">
+              <a:buNone/>
+            </a:pPr>
+            <a:r>
+              <a:rPr b="1" lang="en" sz="3600">
+                <a:solidFill>
+                  <a:srgbClr val="4C1130"/>
+                </a:solidFill>
+                <a:highlight>
+                  <a:schemeClr val="dk1"/>
+                </a:highlight>
+                <a:latin typeface="DFKai-SB"/>
+                <a:ea typeface="DFKai-SB"/>
+                <a:cs typeface="DFKai-SB"/>
+                <a:sym typeface="DFKai-SB"/>
+              </a:rPr>
+              <a:t xml:space="preserve"> </a:t>
+            </a:r>
+            <a:endParaRPr b="1" sz="3600"/>
+          </a:p>
+        </p:txBody>
+      </p:sp>
+      <p:sp>
+        <p:nvSpPr>
+          <p:cNvPr id="400" name="Google Shape;400;p67"/>
+          <p:cNvSpPr txBox="1"/>
+          <p:nvPr/>
+        </p:nvSpPr>
+        <p:spPr>
+          <a:xfrm>
+            <a:off x="0" y="2037522"/>
+            <a:ext cx="9144000" cy="400200"/>
+          </a:xfrm>
+          <a:prstGeom prst="rect">
+            <a:avLst/>
+          </a:prstGeom>
+          <a:noFill/>
+          <a:ln>
+            <a:noFill/>
+          </a:ln>
+        </p:spPr>
+        <p:txBody>
+          <a:bodyPr anchorCtr="0" anchor="t" bIns="91425" lIns="91425" spcFirstLastPara="1" rIns="91425" wrap="square" tIns="91425">
+            <a:spAutoFit/>
+          </a:bodyPr>
+          <a:lstStyle/>
+          <a:p>
+            <a:pPr indent="0" lvl="0" marL="0" rtl="0" algn="l">
+              <a:spcBef>
+                <a:spcPts val="0"/>
+              </a:spcBef>
+              <a:spcAft>
+                <a:spcPts val="0"/>
+              </a:spcAft>
+              <a:buNone/>
+            </a:pPr>
+            <a:r>
+              <a:t/>
+            </a:r>
+            <a:endParaRPr>
+              <a:latin typeface="Lato"/>
+              <a:ea typeface="Lato"/>
+              <a:cs typeface="Lato"/>
+              <a:sym typeface="Lato"/>
+            </a:endParaRPr>
+          </a:p>
+        </p:txBody>
+      </p:sp>
+      <p:sp>
+        <p:nvSpPr>
+          <p:cNvPr id="401" name="Google Shape;401;p67"/>
+          <p:cNvSpPr txBox="1"/>
+          <p:nvPr/>
+        </p:nvSpPr>
+        <p:spPr>
+          <a:xfrm>
+            <a:off x="228325" y="3894775"/>
+            <a:ext cx="4893900" cy="960600"/>
+          </a:xfrm>
+          <a:prstGeom prst="rect">
+            <a:avLst/>
+          </a:prstGeom>
+          <a:noFill/>
+          <a:ln>
+            <a:noFill/>
+          </a:ln>
+        </p:spPr>
+        <p:txBody>
+          <a:bodyPr anchorCtr="0" anchor="t" bIns="91425" lIns="91425" spcFirstLastPara="1" rIns="91425" wrap="square" tIns="91425">
+            <a:spAutoFit/>
+          </a:bodyPr>
+          <a:lstStyle/>
+          <a:p>
+            <a:pPr indent="0" lvl="0" marL="0" rtl="0" algn="ctr">
+              <a:lnSpc>
+                <a:spcPct val="90000"/>
+              </a:lnSpc>
+              <a:spcBef>
+                <a:spcPts val="0"/>
+              </a:spcBef>
+              <a:spcAft>
+                <a:spcPts val="0"/>
+              </a:spcAft>
+              <a:buNone/>
+            </a:pPr>
+            <a:r>
+              <a:rPr b="1" lang="en" sz="2800">
+                <a:solidFill>
+                  <a:srgbClr val="FF0000"/>
+                </a:solidFill>
+                <a:highlight>
+                  <a:schemeClr val="dk1"/>
+                </a:highlight>
+                <a:latin typeface="Lexend Deca"/>
+                <a:ea typeface="Lexend Deca"/>
+                <a:cs typeface="Lexend Deca"/>
+                <a:sym typeface="Lexend Deca"/>
+              </a:rPr>
+              <a:t>我們將在午餐聚會時禱告祝福</a:t>
+            </a:r>
+            <a:endParaRPr b="1" sz="2800">
+              <a:solidFill>
+                <a:srgbClr val="FF0000"/>
+              </a:solidFill>
+              <a:highlight>
+                <a:schemeClr val="dk1"/>
+              </a:highlight>
+              <a:latin typeface="Lexend Deca"/>
+              <a:ea typeface="Lexend Deca"/>
+              <a:cs typeface="Lexend Deca"/>
+              <a:sym typeface="Lexend Deca"/>
+            </a:endParaRPr>
+          </a:p>
+          <a:p>
+            <a:pPr indent="0" lvl="0" marL="0" rtl="0" algn="ctr">
+              <a:lnSpc>
+                <a:spcPct val="90000"/>
+              </a:lnSpc>
+              <a:spcBef>
+                <a:spcPts val="0"/>
+              </a:spcBef>
+              <a:spcAft>
+                <a:spcPts val="0"/>
+              </a:spcAft>
+              <a:buNone/>
+            </a:pPr>
+            <a:r>
+              <a:rPr b="1" lang="en" sz="2800">
+                <a:solidFill>
+                  <a:srgbClr val="FF0000"/>
+                </a:solidFill>
+                <a:highlight>
+                  <a:schemeClr val="dk1"/>
+                </a:highlight>
+                <a:latin typeface="Lexend Deca"/>
+                <a:ea typeface="Lexend Deca"/>
+                <a:cs typeface="Lexend Deca"/>
+                <a:sym typeface="Lexend Deca"/>
+              </a:rPr>
+              <a:t> 唱生日歌與享用生日蛋糕</a:t>
+            </a:r>
+            <a:endParaRPr/>
+          </a:p>
+        </p:txBody>
+      </p:sp>
+    </p:spTree>
+  </p:cSld>
+  <p:clrMapOvr>
+    <a:masterClrMapping/>
+  </p:clrMapOvr>
+</p:sld>
+</file>
+
+<file path=ppt/slides/slide47.xml><?xml version="1.0" encoding="utf-8"?>
+<p:sld xmlns:a="http://schemas.openxmlformats.org/drawingml/2006/main" xmlns:r="http://schemas.openxmlformats.org/officeDocument/2006/relationships" xmlns:mc="http://schemas.openxmlformats.org/markup-compatibility/2006" xmlns:mv="urn:schemas-microsoft-com:mac:vml" xmlns:p="http://schemas.openxmlformats.org/presentationml/2006/main" xmlns:c="http://schemas.openxmlformats.org/drawingml/2006/chart" xmlns:dgm="http://schemas.openxmlformats.org/drawingml/2006/diagram" xmlns:o="urn:schemas-microsoft-com:office:office" xmlns:v="urn:schemas-microsoft-com:vml" xmlns:pvml="urn:schemas-microsoft-com:office:powerpoint" xmlns:com="http://schemas.openxmlformats.org/drawingml/2006/compatibility" xmlns:p14="http://schemas.microsoft.com/office/powerpoint/2010/main" xmlns:p15="http://schemas.microsoft.com/office/powerpoint/2012/main" xmlns:ahyp="http://schemas.microsoft.com/office/drawing/2018/hyperlinkcolor" show="0">
+  <p:cSld>
+    <p:bg>
+      <p:bgPr>
+        <a:blipFill>
+          <a:blip r:embed="rId9003">
+            <a:alphaModFix/>
+          </a:blip>
+          <a:stretch>
+            <a:fillRect/>
+          </a:stretch>
+        </a:blipFill>
+      </p:bgPr>
+    </p:bg>
+    <p:spTree>
+      <p:nvGrpSpPr>
+        <p:cNvPr id="397" name="Shape 397"/>
+        <p:cNvGrpSpPr/>
+        <p:nvPr/>
+      </p:nvGrpSpPr>
+      <p:grpSpPr>
+        <a:xfrm>
+          <a:off x="0" y="0"/>
+          <a:ext cx="0" cy="0"/>
+          <a:chOff x="0" y="0"/>
+          <a:chExt cx="0" cy="0"/>
+        </a:xfrm>
+      </p:grpSpPr>
+      <p:sp>
+        <p:nvSpPr>
+          <p:cNvPr id="398" name="Google Shape;398;p67"/>
+          <p:cNvSpPr txBox="1"/>
+          <p:nvPr/>
+        </p:nvSpPr>
+        <p:spPr>
+          <a:xfrm>
+            <a:off x="0" y="0"/>
+            <a:ext cx="9144000" cy="892800"/>
+          </a:xfrm>
+          <a:prstGeom prst="rect">
+            <a:avLst/>
+          </a:prstGeom>
+          <a:noFill/>
+          <a:ln>
+            <a:noFill/>
+          </a:ln>
+        </p:spPr>
+        <p:txBody>
+          <a:bodyPr anchorCtr="0" anchor="t" bIns="91425" lIns="91425" spcFirstLastPara="1" rIns="91425" wrap="square" tIns="91425">
+            <a:spAutoFit/>
+          </a:bodyPr>
+          <a:lstStyle/>
+          <a:p>
+            <a:pPr indent="0" lvl="0" marL="0" rtl="0" algn="ctr">
+              <a:spcBef>
+                <a:spcPts val="0"/>
+              </a:spcBef>
+              <a:spcAft>
+                <a:spcPts val="0"/>
+              </a:spcAft>
+              <a:buNone/>
+            </a:pPr>
+            <a:r>
+              <a:rPr lang="en" sz="4600"/>
+              <a:t>  </a:t>
+            </a:r>
+            <a:r>
+              <a:rPr lang="en" sz="4600">
+                <a:solidFill>
+                  <a:srgbClr val="FF0000"/>
+                </a:solidFill>
+                <a:highlight>
+                  <a:srgbClr val="FFFF00"/>
+                </a:highlight>
+              </a:rPr>
+              <a:t>❤️</a:t>
+            </a:r>
+            <a:r>
+              <a:rPr b="1" lang="en" sz="3300">
+                <a:highlight>
+                  <a:srgbClr val="FFFF00"/>
+                </a:highlight>
+                <a:latin typeface="Lexend Deca"/>
+                <a:ea typeface="Lexend Deca"/>
+                <a:cs typeface="Lexend Deca"/>
+                <a:sym typeface="Lexend Deca"/>
+              </a:rPr>
+              <a:t>9月份生日的家人們</a:t>
+            </a:r>
+            <a:r>
+              <a:rPr lang="en" sz="4600">
+                <a:solidFill>
+                  <a:srgbClr val="FF0000"/>
+                </a:solidFill>
+                <a:highlight>
+                  <a:srgbClr val="FFFF00"/>
+                </a:highlight>
+              </a:rPr>
+              <a:t>❤️</a:t>
+            </a:r>
+            <a:r>
+              <a:rPr lang="en" sz="4600"/>
+              <a:t> </a:t>
+            </a:r>
+            <a:endParaRPr sz="4600">
+              <a:solidFill>
+                <a:srgbClr val="FF0000"/>
+              </a:solidFill>
+            </a:endParaRPr>
+          </a:p>
+        </p:txBody>
+      </p:sp>
+      <p:sp>
+        <p:nvSpPr>
+          <p:cNvPr id="399" name="Birthday Name 0"/>
+          <p:cNvSpPr txBox="1"/>
+          <p:nvPr/>
+        </p:nvSpPr>
+        <p:spPr>
+          <a:xfrm>
+            <a:off x="298800" y="920000"/>
+            <a:ext cx="8500000" cy="2800000"/>
+          </a:xfrm>
+          <a:prstGeom prst="rect">
+            <a:avLst/>
+          </a:prstGeom>
+          <a:noFill/>
+        </p:spPr>
+        <p:txBody>
+          <a:bodyPr wrap="none" anchor="ctr" lIns="45720" rIns="45720" tIns="0" bIns="0">
+            <a:noAutofit/>
+          </a:bodyPr>
+          <a:lstStyle/>
+          <a:p>
+            <a:pPr algn="ctr" fontAlgn="ctr">
+              <a:buNone/>
+            </a:pPr>
+            <a:r>
+              <a:rPr b="1" lang="en" sz="3600">
+                <a:solidFill>
+                  <a:srgbClr val="4C1130"/>
+                </a:solidFill>
+                <a:highlight>
+                  <a:schemeClr val="dk1"/>
+                </a:highlight>
+                <a:latin typeface="DFKai-SB"/>
+                <a:ea typeface="DFKai-SB"/>
+                <a:cs typeface="DFKai-SB"/>
+                <a:sym typeface="DFKai-SB"/>
+              </a:rPr>
+              <a:t xml:space="preserve"> </a:t>
+            </a:r>
+            <a:endParaRPr b="1" sz="3600"/>
+          </a:p>
+        </p:txBody>
+      </p:sp>
+      <p:sp>
+        <p:nvSpPr>
+          <p:cNvPr id="400" name="Google Shape;400;p67"/>
+          <p:cNvSpPr txBox="1"/>
+          <p:nvPr/>
+        </p:nvSpPr>
+        <p:spPr>
+          <a:xfrm>
+            <a:off x="0" y="2037522"/>
+            <a:ext cx="9144000" cy="400200"/>
+          </a:xfrm>
+          <a:prstGeom prst="rect">
+            <a:avLst/>
+          </a:prstGeom>
+          <a:noFill/>
+          <a:ln>
+            <a:noFill/>
+          </a:ln>
+        </p:spPr>
+        <p:txBody>
+          <a:bodyPr anchorCtr="0" anchor="t" bIns="91425" lIns="91425" spcFirstLastPara="1" rIns="91425" wrap="square" tIns="91425">
+            <a:spAutoFit/>
+          </a:bodyPr>
+          <a:lstStyle/>
+          <a:p>
+            <a:pPr indent="0" lvl="0" marL="0" rtl="0" algn="l">
+              <a:spcBef>
+                <a:spcPts val="0"/>
+              </a:spcBef>
+              <a:spcAft>
+                <a:spcPts val="0"/>
+              </a:spcAft>
+              <a:buNone/>
+            </a:pPr>
+            <a:r>
+              <a:t/>
+            </a:r>
+            <a:endParaRPr>
+              <a:latin typeface="Lato"/>
+              <a:ea typeface="Lato"/>
+              <a:cs typeface="Lato"/>
+              <a:sym typeface="Lato"/>
+            </a:endParaRPr>
+          </a:p>
+        </p:txBody>
+      </p:sp>
+      <p:sp>
+        <p:nvSpPr>
+          <p:cNvPr id="401" name="Google Shape;401;p67"/>
+          <p:cNvSpPr txBox="1"/>
+          <p:nvPr/>
+        </p:nvSpPr>
+        <p:spPr>
+          <a:xfrm>
+            <a:off x="228325" y="3894775"/>
+            <a:ext cx="4893900" cy="960600"/>
+          </a:xfrm>
+          <a:prstGeom prst="rect">
+            <a:avLst/>
+          </a:prstGeom>
+          <a:noFill/>
+          <a:ln>
+            <a:noFill/>
+          </a:ln>
+        </p:spPr>
+        <p:txBody>
+          <a:bodyPr anchorCtr="0" anchor="t" bIns="91425" lIns="91425" spcFirstLastPara="1" rIns="91425" wrap="square" tIns="91425">
+            <a:spAutoFit/>
+          </a:bodyPr>
+          <a:lstStyle/>
+          <a:p>
+            <a:pPr indent="0" lvl="0" marL="0" rtl="0" algn="ctr">
+              <a:lnSpc>
+                <a:spcPct val="90000"/>
+              </a:lnSpc>
+              <a:spcBef>
+                <a:spcPts val="0"/>
+              </a:spcBef>
+              <a:spcAft>
+                <a:spcPts val="0"/>
+              </a:spcAft>
+              <a:buNone/>
+            </a:pPr>
+            <a:r>
+              <a:rPr b="1" lang="en" sz="2800">
+                <a:solidFill>
+                  <a:srgbClr val="FF0000"/>
+                </a:solidFill>
+                <a:highlight>
+                  <a:schemeClr val="dk1"/>
+                </a:highlight>
+                <a:latin typeface="Lexend Deca"/>
+                <a:ea typeface="Lexend Deca"/>
+                <a:cs typeface="Lexend Deca"/>
+                <a:sym typeface="Lexend Deca"/>
+              </a:rPr>
+              <a:t>我們將在午餐聚會時禱告祝福</a:t>
+            </a:r>
+            <a:endParaRPr b="1" sz="2800">
+              <a:solidFill>
+                <a:srgbClr val="FF0000"/>
+              </a:solidFill>
+              <a:highlight>
+                <a:schemeClr val="dk1"/>
+              </a:highlight>
+              <a:latin typeface="Lexend Deca"/>
+              <a:ea typeface="Lexend Deca"/>
+              <a:cs typeface="Lexend Deca"/>
+              <a:sym typeface="Lexend Deca"/>
+            </a:endParaRPr>
+          </a:p>
+          <a:p>
+            <a:pPr indent="0" lvl="0" marL="0" rtl="0" algn="ctr">
+              <a:lnSpc>
+                <a:spcPct val="90000"/>
+              </a:lnSpc>
+              <a:spcBef>
+                <a:spcPts val="0"/>
+              </a:spcBef>
+              <a:spcAft>
+                <a:spcPts val="0"/>
+              </a:spcAft>
+              <a:buNone/>
+            </a:pPr>
+            <a:r>
+              <a:rPr b="1" lang="en" sz="2800">
+                <a:solidFill>
+                  <a:srgbClr val="FF0000"/>
+                </a:solidFill>
+                <a:highlight>
+                  <a:schemeClr val="dk1"/>
+                </a:highlight>
+                <a:latin typeface="Lexend Deca"/>
+                <a:ea typeface="Lexend Deca"/>
+                <a:cs typeface="Lexend Deca"/>
+                <a:sym typeface="Lexend Deca"/>
+              </a:rPr>
+              <a:t> 唱生日歌與享用生日蛋糕</a:t>
+            </a:r>
+            <a:endParaRPr/>
+          </a:p>
+        </p:txBody>
+      </p:sp>
+    </p:spTree>
+  </p:cSld>
+  <p:clrMapOvr>
+    <a:masterClrMapping/>
+  </p:clrMapOvr>
+</p:sld>
+</file>
+
+<file path=ppt/slides/slide48.xml><?xml version="1.0" encoding="utf-8"?>
+<p:sld xmlns:a="http://schemas.openxmlformats.org/drawingml/2006/main" xmlns:r="http://schemas.openxmlformats.org/officeDocument/2006/relationships" xmlns:mc="http://schemas.openxmlformats.org/markup-compatibility/2006" xmlns:mv="urn:schemas-microsoft-com:mac:vml" xmlns:p="http://schemas.openxmlformats.org/presentationml/2006/main" xmlns:c="http://schemas.openxmlformats.org/drawingml/2006/chart" xmlns:dgm="http://schemas.openxmlformats.org/drawingml/2006/diagram" xmlns:o="urn:schemas-microsoft-com:office:office" xmlns:v="urn:schemas-microsoft-com:vml" xmlns:pvml="urn:schemas-microsoft-com:office:powerpoint" xmlns:com="http://schemas.openxmlformats.org/drawingml/2006/compatibility" xmlns:p14="http://schemas.microsoft.com/office/powerpoint/2010/main" xmlns:p15="http://schemas.microsoft.com/office/powerpoint/2012/main" xmlns:ahyp="http://schemas.microsoft.com/office/drawing/2018/hyperlinkcolor" show="0">
+  <p:cSld>
+    <p:bg>
+      <p:bgPr>
+        <a:blipFill>
+          <a:blip r:embed="rId9003">
+            <a:alphaModFix/>
+          </a:blip>
+          <a:stretch>
+            <a:fillRect/>
+          </a:stretch>
+        </a:blipFill>
+      </p:bgPr>
+    </p:bg>
+    <p:spTree>
+      <p:nvGrpSpPr>
+        <p:cNvPr id="397" name="Shape 397"/>
+        <p:cNvGrpSpPr/>
+        <p:nvPr/>
+      </p:nvGrpSpPr>
+      <p:grpSpPr>
+        <a:xfrm>
+          <a:off x="0" y="0"/>
+          <a:ext cx="0" cy="0"/>
+          <a:chOff x="0" y="0"/>
+          <a:chExt cx="0" cy="0"/>
+        </a:xfrm>
+      </p:grpSpPr>
+      <p:sp>
+        <p:nvSpPr>
+          <p:cNvPr id="398" name="Google Shape;398;p67"/>
+          <p:cNvSpPr txBox="1"/>
+          <p:nvPr/>
+        </p:nvSpPr>
+        <p:spPr>
+          <a:xfrm>
+            <a:off x="0" y="0"/>
+            <a:ext cx="9144000" cy="892800"/>
+          </a:xfrm>
+          <a:prstGeom prst="rect">
+            <a:avLst/>
+          </a:prstGeom>
+          <a:noFill/>
+          <a:ln>
+            <a:noFill/>
+          </a:ln>
+        </p:spPr>
+        <p:txBody>
+          <a:bodyPr anchorCtr="0" anchor="t" bIns="91425" lIns="91425" spcFirstLastPara="1" rIns="91425" wrap="square" tIns="91425">
+            <a:spAutoFit/>
+          </a:bodyPr>
+          <a:lstStyle/>
+          <a:p>
+            <a:pPr indent="0" lvl="0" marL="0" rtl="0" algn="ctr">
+              <a:spcBef>
+                <a:spcPts val="0"/>
+              </a:spcBef>
+              <a:spcAft>
+                <a:spcPts val="0"/>
+              </a:spcAft>
+              <a:buNone/>
+            </a:pPr>
+            <a:r>
+              <a:rPr lang="en" sz="4600"/>
+              <a:t>  </a:t>
+            </a:r>
+            <a:r>
+              <a:rPr lang="en" sz="4600">
+                <a:solidFill>
+                  <a:srgbClr val="FF0000"/>
+                </a:solidFill>
+                <a:highlight>
+                  <a:srgbClr val="FFFF00"/>
+                </a:highlight>
+              </a:rPr>
+              <a:t>❤️</a:t>
+            </a:r>
+            <a:r>
+              <a:rPr b="1" lang="en" sz="3300">
+                <a:highlight>
+                  <a:srgbClr val="FFFF00"/>
+                </a:highlight>
+                <a:latin typeface="Lexend Deca"/>
+                <a:ea typeface="Lexend Deca"/>
+                <a:cs typeface="Lexend Deca"/>
+                <a:sym typeface="Lexend Deca"/>
+              </a:rPr>
+              <a:t>10月份生日的家人們</a:t>
+            </a:r>
+            <a:r>
+              <a:rPr lang="en" sz="4600">
+                <a:solidFill>
+                  <a:srgbClr val="FF0000"/>
+                </a:solidFill>
+                <a:highlight>
+                  <a:srgbClr val="FFFF00"/>
+                </a:highlight>
+              </a:rPr>
+              <a:t>❤️</a:t>
+            </a:r>
+            <a:r>
+              <a:rPr lang="en" sz="4600"/>
+              <a:t> </a:t>
+            </a:r>
+            <a:endParaRPr sz="4600">
+              <a:solidFill>
+                <a:srgbClr val="FF0000"/>
+              </a:solidFill>
+            </a:endParaRPr>
+          </a:p>
+        </p:txBody>
+      </p:sp>
+      <p:sp>
+        <p:nvSpPr>
+          <p:cNvPr id="399" name="Birthday Name 0"/>
+          <p:cNvSpPr txBox="1"/>
+          <p:nvPr/>
+        </p:nvSpPr>
+        <p:spPr>
+          <a:xfrm>
+            <a:off x="298800" y="920000"/>
+            <a:ext cx="8500000" cy="2800000"/>
+          </a:xfrm>
+          <a:prstGeom prst="rect">
+            <a:avLst/>
+          </a:prstGeom>
+          <a:noFill/>
+        </p:spPr>
+        <p:txBody>
+          <a:bodyPr wrap="none" anchor="ctr" lIns="45720" rIns="45720" tIns="0" bIns="0">
+            <a:noAutofit/>
+          </a:bodyPr>
+          <a:lstStyle/>
+          <a:p>
+            <a:pPr algn="ctr" fontAlgn="ctr">
+              <a:buNone/>
+            </a:pPr>
+            <a:r>
+              <a:rPr b="1" lang="en" sz="3600">
+                <a:solidFill>
+                  <a:srgbClr val="4C1130"/>
+                </a:solidFill>
+                <a:highlight>
+                  <a:schemeClr val="dk1"/>
+                </a:highlight>
+                <a:latin typeface="DFKai-SB"/>
+                <a:ea typeface="DFKai-SB"/>
+                <a:cs typeface="DFKai-SB"/>
+                <a:sym typeface="DFKai-SB"/>
+              </a:rPr>
+              <a:t xml:space="preserve"> </a:t>
+            </a:r>
+            <a:endParaRPr b="1" sz="3600"/>
+          </a:p>
+        </p:txBody>
+      </p:sp>
+      <p:sp>
+        <p:nvSpPr>
+          <p:cNvPr id="400" name="Google Shape;400;p67"/>
+          <p:cNvSpPr txBox="1"/>
+          <p:nvPr/>
+        </p:nvSpPr>
+        <p:spPr>
+          <a:xfrm>
+            <a:off x="0" y="2037522"/>
+            <a:ext cx="9144000" cy="400200"/>
+          </a:xfrm>
+          <a:prstGeom prst="rect">
+            <a:avLst/>
+          </a:prstGeom>
+          <a:noFill/>
+          <a:ln>
+            <a:noFill/>
+          </a:ln>
+        </p:spPr>
+        <p:txBody>
+          <a:bodyPr anchorCtr="0" anchor="t" bIns="91425" lIns="91425" spcFirstLastPara="1" rIns="91425" wrap="square" tIns="91425">
+            <a:spAutoFit/>
+          </a:bodyPr>
+          <a:lstStyle/>
+          <a:p>
+            <a:pPr indent="0" lvl="0" marL="0" rtl="0" algn="l">
+              <a:spcBef>
+                <a:spcPts val="0"/>
+              </a:spcBef>
+              <a:spcAft>
+                <a:spcPts val="0"/>
+              </a:spcAft>
+              <a:buNone/>
+            </a:pPr>
+            <a:r>
+              <a:t/>
+            </a:r>
+            <a:endParaRPr>
+              <a:latin typeface="Lato"/>
+              <a:ea typeface="Lato"/>
+              <a:cs typeface="Lato"/>
+              <a:sym typeface="Lato"/>
+            </a:endParaRPr>
+          </a:p>
+        </p:txBody>
+      </p:sp>
+      <p:sp>
+        <p:nvSpPr>
+          <p:cNvPr id="401" name="Google Shape;401;p67"/>
+          <p:cNvSpPr txBox="1"/>
+          <p:nvPr/>
+        </p:nvSpPr>
+        <p:spPr>
+          <a:xfrm>
+            <a:off x="228325" y="3894775"/>
+            <a:ext cx="4893900" cy="960600"/>
+          </a:xfrm>
+          <a:prstGeom prst="rect">
+            <a:avLst/>
+          </a:prstGeom>
+          <a:noFill/>
+          <a:ln>
+            <a:noFill/>
+          </a:ln>
+        </p:spPr>
+        <p:txBody>
+          <a:bodyPr anchorCtr="0" anchor="t" bIns="91425" lIns="91425" spcFirstLastPara="1" rIns="91425" wrap="square" tIns="91425">
+            <a:spAutoFit/>
+          </a:bodyPr>
+          <a:lstStyle/>
+          <a:p>
+            <a:pPr indent="0" lvl="0" marL="0" rtl="0" algn="ctr">
+              <a:lnSpc>
+                <a:spcPct val="90000"/>
+              </a:lnSpc>
+              <a:spcBef>
+                <a:spcPts val="0"/>
+              </a:spcBef>
+              <a:spcAft>
+                <a:spcPts val="0"/>
+              </a:spcAft>
+              <a:buNone/>
+            </a:pPr>
+            <a:r>
+              <a:rPr b="1" lang="en" sz="2800">
+                <a:solidFill>
+                  <a:srgbClr val="FF0000"/>
+                </a:solidFill>
+                <a:highlight>
+                  <a:schemeClr val="dk1"/>
+                </a:highlight>
+                <a:latin typeface="Lexend Deca"/>
+                <a:ea typeface="Lexend Deca"/>
+                <a:cs typeface="Lexend Deca"/>
+                <a:sym typeface="Lexend Deca"/>
+              </a:rPr>
+              <a:t>我們將在午餐聚會時禱告祝福</a:t>
+            </a:r>
+            <a:endParaRPr b="1" sz="2800">
+              <a:solidFill>
+                <a:srgbClr val="FF0000"/>
+              </a:solidFill>
+              <a:highlight>
+                <a:schemeClr val="dk1"/>
+              </a:highlight>
+              <a:latin typeface="Lexend Deca"/>
+              <a:ea typeface="Lexend Deca"/>
+              <a:cs typeface="Lexend Deca"/>
+              <a:sym typeface="Lexend Deca"/>
+            </a:endParaRPr>
+          </a:p>
+          <a:p>
+            <a:pPr indent="0" lvl="0" marL="0" rtl="0" algn="ctr">
+              <a:lnSpc>
+                <a:spcPct val="90000"/>
+              </a:lnSpc>
+              <a:spcBef>
+                <a:spcPts val="0"/>
+              </a:spcBef>
+              <a:spcAft>
+                <a:spcPts val="0"/>
+              </a:spcAft>
+              <a:buNone/>
+            </a:pPr>
+            <a:r>
+              <a:rPr b="1" lang="en" sz="2800">
+                <a:solidFill>
+                  <a:srgbClr val="FF0000"/>
+                </a:solidFill>
+                <a:highlight>
+                  <a:schemeClr val="dk1"/>
+                </a:highlight>
+                <a:latin typeface="Lexend Deca"/>
+                <a:ea typeface="Lexend Deca"/>
+                <a:cs typeface="Lexend Deca"/>
+                <a:sym typeface="Lexend Deca"/>
+              </a:rPr>
+              <a:t> 唱生日歌與享用生日蛋糕</a:t>
+            </a:r>
+            <a:endParaRPr/>
+          </a:p>
+        </p:txBody>
+      </p:sp>
+    </p:spTree>
+  </p:cSld>
+  <p:clrMapOvr>
+    <a:masterClrMapping/>
+  </p:clrMapOvr>
+</p:sld>
+</file>
+
+<file path=ppt/slides/slide49.xml><?xml version="1.0" encoding="utf-8"?>
+<p:sld xmlns:a="http://schemas.openxmlformats.org/drawingml/2006/main" xmlns:r="http://schemas.openxmlformats.org/officeDocument/2006/relationships" xmlns:mc="http://schemas.openxmlformats.org/markup-compatibility/2006" xmlns:mv="urn:schemas-microsoft-com:mac:vml" xmlns:p="http://schemas.openxmlformats.org/presentationml/2006/main" xmlns:c="http://schemas.openxmlformats.org/drawingml/2006/chart" xmlns:dgm="http://schemas.openxmlformats.org/drawingml/2006/diagram" xmlns:o="urn:schemas-microsoft-com:office:office" xmlns:v="urn:schemas-microsoft-com:vml" xmlns:pvml="urn:schemas-microsoft-com:office:powerpoint" xmlns:com="http://schemas.openxmlformats.org/drawingml/2006/compatibility" xmlns:p14="http://schemas.microsoft.com/office/powerpoint/2010/main" xmlns:p15="http://schemas.microsoft.com/office/powerpoint/2012/main" xmlns:ahyp="http://schemas.microsoft.com/office/drawing/2018/hyperlinkcolor" show="0">
+  <p:cSld>
+    <p:bg>
+      <p:bgPr>
+        <a:blipFill>
+          <a:blip r:embed="rId9003">
+            <a:alphaModFix/>
+          </a:blip>
+          <a:stretch>
+            <a:fillRect/>
+          </a:stretch>
+        </a:blipFill>
+      </p:bgPr>
+    </p:bg>
+    <p:spTree>
+      <p:nvGrpSpPr>
+        <p:cNvPr id="397" name="Shape 397"/>
+        <p:cNvGrpSpPr/>
+        <p:nvPr/>
+      </p:nvGrpSpPr>
+      <p:grpSpPr>
+        <a:xfrm>
+          <a:off x="0" y="0"/>
+          <a:ext cx="0" cy="0"/>
+          <a:chOff x="0" y="0"/>
+          <a:chExt cx="0" cy="0"/>
+        </a:xfrm>
+      </p:grpSpPr>
+      <p:sp>
+        <p:nvSpPr>
+          <p:cNvPr id="398" name="Google Shape;398;p67"/>
+          <p:cNvSpPr txBox="1"/>
+          <p:nvPr/>
+        </p:nvSpPr>
+        <p:spPr>
+          <a:xfrm>
+            <a:off x="0" y="0"/>
+            <a:ext cx="9144000" cy="892800"/>
+          </a:xfrm>
+          <a:prstGeom prst="rect">
+            <a:avLst/>
+          </a:prstGeom>
+          <a:noFill/>
+          <a:ln>
+            <a:noFill/>
+          </a:ln>
+        </p:spPr>
+        <p:txBody>
+          <a:bodyPr anchorCtr="0" anchor="t" bIns="91425" lIns="91425" spcFirstLastPara="1" rIns="91425" wrap="square" tIns="91425">
+            <a:spAutoFit/>
+          </a:bodyPr>
+          <a:lstStyle/>
+          <a:p>
+            <a:pPr indent="0" lvl="0" marL="0" rtl="0" algn="ctr">
+              <a:spcBef>
+                <a:spcPts val="0"/>
+              </a:spcBef>
+              <a:spcAft>
+                <a:spcPts val="0"/>
+              </a:spcAft>
+              <a:buNone/>
+            </a:pPr>
+            <a:r>
+              <a:rPr lang="en" sz="4600"/>
+              <a:t>  </a:t>
+            </a:r>
+            <a:r>
+              <a:rPr lang="en" sz="4600">
+                <a:solidFill>
+                  <a:srgbClr val="FF0000"/>
+                </a:solidFill>
+                <a:highlight>
+                  <a:srgbClr val="FFFF00"/>
+                </a:highlight>
+              </a:rPr>
+              <a:t>❤️</a:t>
+            </a:r>
+            <a:r>
+              <a:rPr b="1" lang="en" sz="3300">
+                <a:highlight>
+                  <a:srgbClr val="FFFF00"/>
+                </a:highlight>
+                <a:latin typeface="Lexend Deca"/>
+                <a:ea typeface="Lexend Deca"/>
+                <a:cs typeface="Lexend Deca"/>
+                <a:sym typeface="Lexend Deca"/>
+              </a:rPr>
+              <a:t>11月份生日的家人們</a:t>
+            </a:r>
+            <a:r>
+              <a:rPr lang="en" sz="4600">
+                <a:solidFill>
+                  <a:srgbClr val="FF0000"/>
+                </a:solidFill>
+                <a:highlight>
+                  <a:srgbClr val="FFFF00"/>
+                </a:highlight>
+              </a:rPr>
+              <a:t>❤️</a:t>
+            </a:r>
+            <a:r>
+              <a:rPr lang="en" sz="4600"/>
+              <a:t> </a:t>
+            </a:r>
+            <a:endParaRPr sz="4600">
+              <a:solidFill>
+                <a:srgbClr val="FF0000"/>
+              </a:solidFill>
+            </a:endParaRPr>
+          </a:p>
+        </p:txBody>
+      </p:sp>
+      <p:sp>
+        <p:nvSpPr>
+          <p:cNvPr id="399" name="Birthday Name 0"/>
+          <p:cNvSpPr txBox="1"/>
+          <p:nvPr/>
+        </p:nvSpPr>
+        <p:spPr>
+          <a:xfrm>
+            <a:off x="298800" y="920000"/>
+            <a:ext cx="8500000" cy="2800000"/>
+          </a:xfrm>
+          <a:prstGeom prst="rect">
+            <a:avLst/>
+          </a:prstGeom>
+          <a:noFill/>
+        </p:spPr>
+        <p:txBody>
+          <a:bodyPr wrap="none" anchor="ctr" lIns="45720" rIns="45720" tIns="0" bIns="0">
+            <a:noAutofit/>
+          </a:bodyPr>
+          <a:lstStyle/>
+          <a:p>
+            <a:pPr algn="ctr" fontAlgn="ctr">
+              <a:buNone/>
+            </a:pPr>
+            <a:r>
+              <a:rPr b="1" lang="en" sz="3600">
+                <a:solidFill>
+                  <a:srgbClr val="4C1130"/>
+                </a:solidFill>
+                <a:highlight>
+                  <a:schemeClr val="dk1"/>
+                </a:highlight>
+                <a:latin typeface="DFKai-SB"/>
+                <a:ea typeface="DFKai-SB"/>
+                <a:cs typeface="DFKai-SB"/>
+                <a:sym typeface="DFKai-SB"/>
+              </a:rPr>
+              <a:t xml:space="preserve"> </a:t>
+            </a:r>
+            <a:endParaRPr b="1" sz="3600"/>
+          </a:p>
+        </p:txBody>
+      </p:sp>
+      <p:sp>
+        <p:nvSpPr>
+          <p:cNvPr id="400" name="Google Shape;400;p67"/>
+          <p:cNvSpPr txBox="1"/>
+          <p:nvPr/>
+        </p:nvSpPr>
+        <p:spPr>
+          <a:xfrm>
+            <a:off x="0" y="2037522"/>
+            <a:ext cx="9144000" cy="400200"/>
+          </a:xfrm>
+          <a:prstGeom prst="rect">
+            <a:avLst/>
+          </a:prstGeom>
+          <a:noFill/>
+          <a:ln>
+            <a:noFill/>
+          </a:ln>
+        </p:spPr>
+        <p:txBody>
+          <a:bodyPr anchorCtr="0" anchor="t" bIns="91425" lIns="91425" spcFirstLastPara="1" rIns="91425" wrap="square" tIns="91425">
+            <a:spAutoFit/>
+          </a:bodyPr>
+          <a:lstStyle/>
+          <a:p>
+            <a:pPr indent="0" lvl="0" marL="0" rtl="0" algn="l">
+              <a:spcBef>
+                <a:spcPts val="0"/>
+              </a:spcBef>
+              <a:spcAft>
+                <a:spcPts val="0"/>
+              </a:spcAft>
+              <a:buNone/>
+            </a:pPr>
+            <a:r>
+              <a:t/>
+            </a:r>
+            <a:endParaRPr>
+              <a:latin typeface="Lato"/>
+              <a:ea typeface="Lato"/>
+              <a:cs typeface="Lato"/>
+              <a:sym typeface="Lato"/>
+            </a:endParaRPr>
+          </a:p>
+        </p:txBody>
+      </p:sp>
+      <p:sp>
+        <p:nvSpPr>
+          <p:cNvPr id="401" name="Google Shape;401;p67"/>
+          <p:cNvSpPr txBox="1"/>
+          <p:nvPr/>
+        </p:nvSpPr>
+        <p:spPr>
+          <a:xfrm>
+            <a:off x="228325" y="3894775"/>
+            <a:ext cx="4893900" cy="960600"/>
+          </a:xfrm>
+          <a:prstGeom prst="rect">
+            <a:avLst/>
+          </a:prstGeom>
+          <a:noFill/>
+          <a:ln>
+            <a:noFill/>
+          </a:ln>
+        </p:spPr>
+        <p:txBody>
+          <a:bodyPr anchorCtr="0" anchor="t" bIns="91425" lIns="91425" spcFirstLastPara="1" rIns="91425" wrap="square" tIns="91425">
+            <a:spAutoFit/>
+          </a:bodyPr>
+          <a:lstStyle/>
+          <a:p>
+            <a:pPr indent="0" lvl="0" marL="0" rtl="0" algn="ctr">
+              <a:lnSpc>
+                <a:spcPct val="90000"/>
+              </a:lnSpc>
+              <a:spcBef>
+                <a:spcPts val="0"/>
+              </a:spcBef>
+              <a:spcAft>
+                <a:spcPts val="0"/>
+              </a:spcAft>
+              <a:buNone/>
+            </a:pPr>
+            <a:r>
+              <a:rPr b="1" lang="en" sz="2800">
+                <a:solidFill>
+                  <a:srgbClr val="FF0000"/>
+                </a:solidFill>
+                <a:highlight>
+                  <a:schemeClr val="dk1"/>
+                </a:highlight>
+                <a:latin typeface="Lexend Deca"/>
+                <a:ea typeface="Lexend Deca"/>
+                <a:cs typeface="Lexend Deca"/>
+                <a:sym typeface="Lexend Deca"/>
+              </a:rPr>
+              <a:t>我們將在午餐聚會時禱告祝福</a:t>
+            </a:r>
+            <a:endParaRPr b="1" sz="2800">
+              <a:solidFill>
+                <a:srgbClr val="FF0000"/>
+              </a:solidFill>
+              <a:highlight>
+                <a:schemeClr val="dk1"/>
+              </a:highlight>
+              <a:latin typeface="Lexend Deca"/>
+              <a:ea typeface="Lexend Deca"/>
+              <a:cs typeface="Lexend Deca"/>
+              <a:sym typeface="Lexend Deca"/>
+            </a:endParaRPr>
+          </a:p>
+          <a:p>
+            <a:pPr indent="0" lvl="0" marL="0" rtl="0" algn="ctr">
+              <a:lnSpc>
+                <a:spcPct val="90000"/>
+              </a:lnSpc>
+              <a:spcBef>
+                <a:spcPts val="0"/>
+              </a:spcBef>
+              <a:spcAft>
+                <a:spcPts val="0"/>
+              </a:spcAft>
+              <a:buNone/>
+            </a:pPr>
+            <a:r>
+              <a:rPr b="1" lang="en" sz="2800">
+                <a:solidFill>
+                  <a:srgbClr val="FF0000"/>
+                </a:solidFill>
+                <a:highlight>
+                  <a:schemeClr val="dk1"/>
+                </a:highlight>
+                <a:latin typeface="Lexend Deca"/>
+                <a:ea typeface="Lexend Deca"/>
+                <a:cs typeface="Lexend Deca"/>
+                <a:sym typeface="Lexend Deca"/>
+              </a:rPr>
+              <a:t> 唱生日歌與享用生日蛋糕</a:t>
+            </a:r>
+            <a:endParaRPr/>
           </a:p>
         </p:txBody>
       </p:sp>
@@ -40729,6 +44129,314 @@
                 <a:schemeClr val="dk2"/>
               </a:solidFill>
             </a:endParaRPr>
+          </a:p>
+        </p:txBody>
+      </p:sp>
+    </p:spTree>
+  </p:cSld>
+  <p:clrMapOvr>
+    <a:masterClrMapping/>
+  </p:clrMapOvr>
+</p:sld>
+</file>
+
+<file path=ppt/slides/slide50.xml><?xml version="1.0" encoding="utf-8"?>
+<p:sld xmlns:a="http://schemas.openxmlformats.org/drawingml/2006/main" xmlns:r="http://schemas.openxmlformats.org/officeDocument/2006/relationships" xmlns:mc="http://schemas.openxmlformats.org/markup-compatibility/2006" xmlns:mv="urn:schemas-microsoft-com:mac:vml" xmlns:p="http://schemas.openxmlformats.org/presentationml/2006/main" xmlns:c="http://schemas.openxmlformats.org/drawingml/2006/chart" xmlns:dgm="http://schemas.openxmlformats.org/drawingml/2006/diagram" xmlns:o="urn:schemas-microsoft-com:office:office" xmlns:v="urn:schemas-microsoft-com:vml" xmlns:pvml="urn:schemas-microsoft-com:office:powerpoint" xmlns:com="http://schemas.openxmlformats.org/drawingml/2006/compatibility" xmlns:p14="http://schemas.microsoft.com/office/powerpoint/2010/main" xmlns:p15="http://schemas.microsoft.com/office/powerpoint/2012/main" xmlns:ahyp="http://schemas.microsoft.com/office/drawing/2018/hyperlinkcolor" show="0">
+  <p:cSld>
+    <p:bg>
+      <p:bgPr>
+        <a:blipFill>
+          <a:blip r:embed="rId9003">
+            <a:alphaModFix/>
+          </a:blip>
+          <a:stretch>
+            <a:fillRect/>
+          </a:stretch>
+        </a:blipFill>
+      </p:bgPr>
+    </p:bg>
+    <p:spTree>
+      <p:nvGrpSpPr>
+        <p:cNvPr id="397" name="Shape 397"/>
+        <p:cNvGrpSpPr/>
+        <p:nvPr/>
+      </p:nvGrpSpPr>
+      <p:grpSpPr>
+        <a:xfrm>
+          <a:off x="0" y="0"/>
+          <a:ext cx="0" cy="0"/>
+          <a:chOff x="0" y="0"/>
+          <a:chExt cx="0" cy="0"/>
+        </a:xfrm>
+      </p:grpSpPr>
+      <p:sp>
+        <p:nvSpPr>
+          <p:cNvPr id="398" name="Google Shape;398;p67"/>
+          <p:cNvSpPr txBox="1"/>
+          <p:nvPr/>
+        </p:nvSpPr>
+        <p:spPr>
+          <a:xfrm>
+            <a:off x="0" y="0"/>
+            <a:ext cx="9144000" cy="892800"/>
+          </a:xfrm>
+          <a:prstGeom prst="rect">
+            <a:avLst/>
+          </a:prstGeom>
+          <a:noFill/>
+          <a:ln>
+            <a:noFill/>
+          </a:ln>
+        </p:spPr>
+        <p:txBody>
+          <a:bodyPr anchorCtr="0" anchor="t" bIns="91425" lIns="91425" spcFirstLastPara="1" rIns="91425" wrap="square" tIns="91425">
+            <a:spAutoFit/>
+          </a:bodyPr>
+          <a:lstStyle/>
+          <a:p>
+            <a:pPr indent="0" lvl="0" marL="0" rtl="0" algn="ctr">
+              <a:spcBef>
+                <a:spcPts val="0"/>
+              </a:spcBef>
+              <a:spcAft>
+                <a:spcPts val="0"/>
+              </a:spcAft>
+              <a:buNone/>
+            </a:pPr>
+            <a:r>
+              <a:rPr lang="en" sz="4600"/>
+              <a:t>  </a:t>
+            </a:r>
+            <a:r>
+              <a:rPr lang="en" sz="4600">
+                <a:solidFill>
+                  <a:srgbClr val="FF0000"/>
+                </a:solidFill>
+                <a:highlight>
+                  <a:srgbClr val="FFFF00"/>
+                </a:highlight>
+              </a:rPr>
+              <a:t>❤️</a:t>
+            </a:r>
+            <a:r>
+              <a:rPr b="1" lang="en" sz="3300">
+                <a:highlight>
+                  <a:srgbClr val="FFFF00"/>
+                </a:highlight>
+                <a:latin typeface="Lexend Deca"/>
+                <a:ea typeface="Lexend Deca"/>
+                <a:cs typeface="Lexend Deca"/>
+                <a:sym typeface="Lexend Deca"/>
+              </a:rPr>
+              <a:t>12月份生日的家人們</a:t>
+            </a:r>
+            <a:r>
+              <a:rPr lang="en" sz="4600">
+                <a:solidFill>
+                  <a:srgbClr val="FF0000"/>
+                </a:solidFill>
+                <a:highlight>
+                  <a:srgbClr val="FFFF00"/>
+                </a:highlight>
+              </a:rPr>
+              <a:t>❤️</a:t>
+            </a:r>
+            <a:r>
+              <a:rPr lang="en" sz="4600"/>
+              <a:t> </a:t>
+            </a:r>
+            <a:endParaRPr sz="4600">
+              <a:solidFill>
+                <a:srgbClr val="FF0000"/>
+              </a:solidFill>
+            </a:endParaRPr>
+          </a:p>
+        </p:txBody>
+      </p:sp>
+      <p:sp>
+        <p:nvSpPr>
+          <p:cNvPr id="399" name="Birthday Name 0"/>
+          <p:cNvSpPr txBox="1"/>
+          <p:nvPr/>
+        </p:nvSpPr>
+        <p:spPr>
+          <a:xfrm>
+            <a:off x="298800" y="920000"/>
+            <a:ext cx="8500000" cy="2800000"/>
+          </a:xfrm>
+          <a:prstGeom prst="rect">
+            <a:avLst/>
+          </a:prstGeom>
+          <a:noFill/>
+        </p:spPr>
+        <p:txBody>
+          <a:bodyPr wrap="none" anchor="ctr" lIns="45720" rIns="45720" tIns="0" bIns="0">
+            <a:noAutofit/>
+          </a:bodyPr>
+          <a:lstStyle/>
+          <a:p>
+            <a:pPr algn="ctr" fontAlgn="ctr">
+              <a:buNone/>
+            </a:pPr>
+            <a:r>
+              <a:rPr b="1" lang="en" sz="3600">
+                <a:solidFill>
+                  <a:srgbClr val="4C1130"/>
+                </a:solidFill>
+                <a:highlight>
+                  <a:schemeClr val="dk1"/>
+                </a:highlight>
+                <a:latin typeface="DFKai-SB"/>
+                <a:ea typeface="DFKai-SB"/>
+                <a:cs typeface="DFKai-SB"/>
+                <a:sym typeface="DFKai-SB"/>
+              </a:rPr>
+              <a:t xml:space="preserve"> </a:t>
+            </a:r>
+            <a:endParaRPr b="1" sz="3600"/>
+          </a:p>
+        </p:txBody>
+      </p:sp>
+      <p:sp>
+        <p:nvSpPr>
+          <p:cNvPr id="400" name="Google Shape;400;p67"/>
+          <p:cNvSpPr txBox="1"/>
+          <p:nvPr/>
+        </p:nvSpPr>
+        <p:spPr>
+          <a:xfrm>
+            <a:off x="0" y="2037522"/>
+            <a:ext cx="9144000" cy="400200"/>
+          </a:xfrm>
+          <a:prstGeom prst="rect">
+            <a:avLst/>
+          </a:prstGeom>
+          <a:noFill/>
+          <a:ln>
+            <a:noFill/>
+          </a:ln>
+        </p:spPr>
+        <p:txBody>
+          <a:bodyPr anchorCtr="0" anchor="t" bIns="91425" lIns="91425" spcFirstLastPara="1" rIns="91425" wrap="square" tIns="91425">
+            <a:spAutoFit/>
+          </a:bodyPr>
+          <a:lstStyle/>
+          <a:p>
+            <a:pPr indent="0" lvl="0" marL="0" rtl="0" algn="l">
+              <a:spcBef>
+                <a:spcPts val="0"/>
+              </a:spcBef>
+              <a:spcAft>
+                <a:spcPts val="0"/>
+              </a:spcAft>
+              <a:buNone/>
+            </a:pPr>
+            <a:r>
+              <a:t/>
+            </a:r>
+            <a:endParaRPr>
+              <a:latin typeface="Lato"/>
+              <a:ea typeface="Lato"/>
+              <a:cs typeface="Lato"/>
+              <a:sym typeface="Lato"/>
+            </a:endParaRPr>
+          </a:p>
+        </p:txBody>
+      </p:sp>
+      <p:sp>
+        <p:nvSpPr>
+          <p:cNvPr id="401" name="Google Shape;401;p67"/>
+          <p:cNvSpPr txBox="1"/>
+          <p:nvPr/>
+        </p:nvSpPr>
+        <p:spPr>
+          <a:xfrm>
+            <a:off x="228325" y="3894775"/>
+            <a:ext cx="4893900" cy="960600"/>
+          </a:xfrm>
+          <a:prstGeom prst="rect">
+            <a:avLst/>
+          </a:prstGeom>
+          <a:noFill/>
+          <a:ln>
+            <a:noFill/>
+          </a:ln>
+        </p:spPr>
+        <p:txBody>
+          <a:bodyPr anchorCtr="0" anchor="t" bIns="91425" lIns="91425" spcFirstLastPara="1" rIns="91425" wrap="square" tIns="91425">
+            <a:spAutoFit/>
+          </a:bodyPr>
+          <a:lstStyle/>
+          <a:p>
+            <a:pPr indent="0" lvl="0" marL="0" rtl="0" algn="ctr">
+              <a:lnSpc>
+                <a:spcPct val="90000"/>
+              </a:lnSpc>
+              <a:spcBef>
+                <a:spcPts val="0"/>
+              </a:spcBef>
+              <a:spcAft>
+                <a:spcPts val="0"/>
+              </a:spcAft>
+              <a:buNone/>
+            </a:pPr>
+            <a:r>
+              <a:rPr b="1" lang="en" sz="2800">
+                <a:solidFill>
+                  <a:srgbClr val="FF0000"/>
+                </a:solidFill>
+                <a:highlight>
+                  <a:schemeClr val="dk1"/>
+                </a:highlight>
+                <a:latin typeface="Lexend Deca"/>
+                <a:ea typeface="Lexend Deca"/>
+                <a:cs typeface="Lexend Deca"/>
+                <a:sym typeface="Lexend Deca"/>
+              </a:rPr>
+              <a:t>我們將在午餐聚會時禱告祝福</a:t>
+            </a:r>
+            <a:endParaRPr b="1" sz="2800">
+              <a:solidFill>
+                <a:srgbClr val="FF0000"/>
+              </a:solidFill>
+              <a:highlight>
+                <a:schemeClr val="dk1"/>
+              </a:highlight>
+              <a:latin typeface="Lexend Deca"/>
+              <a:ea typeface="Lexend Deca"/>
+              <a:cs typeface="Lexend Deca"/>
+              <a:sym typeface="Lexend Deca"/>
+            </a:endParaRPr>
+          </a:p>
+          <a:p>
+            <a:pPr indent="0" lvl="0" marL="0" rtl="0" algn="ctr">
+              <a:lnSpc>
+                <a:spcPct val="90000"/>
+              </a:lnSpc>
+              <a:spcBef>
+                <a:spcPts val="0"/>
+              </a:spcBef>
+              <a:spcAft>
+                <a:spcPts val="0"/>
+              </a:spcAft>
+              <a:buNone/>
+            </a:pPr>
+            <a:r>
+              <a:rPr b="1" lang="en" sz="2800">
+                <a:solidFill>
+                  <a:srgbClr val="FF0000"/>
+                </a:solidFill>
+                <a:highlight>
+                  <a:schemeClr val="dk1"/>
+                </a:highlight>
+                <a:latin typeface="Lexend Deca"/>
+                <a:ea typeface="Lexend Deca"/>
+                <a:cs typeface="Lexend Deca"/>
+                <a:sym typeface="Lexend Deca"/>
+              </a:rPr>
+              <a:t> 唱生日歌與享用生日蛋糕</a:t>
+            </a:r>
+            <a:endParaRPr/>
           </a:p>
         </p:txBody>
       </p:sp>

--- a/shared/templates/bulletin/06_14_2026.pptx
+++ b/shared/templates/bulletin/06_14_2026.pptx
@@ -48,18 +48,6 @@
     <p:sldId id="291" r:id="rId44"/>
     <p:sldId id="292" r:id="rId45"/>
     <p:sldId id="293" r:id="rId46"/>
-    <p:sldId id="294" r:id="rId69"/>
-    <p:sldId id="295" r:id="rId70"/>
-    <p:sldId id="296" r:id="rId71"/>
-    <p:sldId id="297" r:id="rId72"/>
-    <p:sldId id="298" r:id="rId73"/>
-    <p:sldId id="299" r:id="rId74"/>
-    <p:sldId id="300" r:id="rId75"/>
-    <p:sldId id="301" r:id="rId76"/>
-    <p:sldId id="302" r:id="rId77"/>
-    <p:sldId id="303" r:id="rId78"/>
-    <p:sldId id="304" r:id="rId79"/>
-    <p:sldId id="305" r:id="rId80"/>
   </p:sldIdLst>
   <p:sldSz cy="5143500" cx="9144000"/>
   <p:notesSz cx="6858000" cy="9144000"/>
@@ -40454,314 +40442,6 @@
 </p:sld>
 </file>
 
-<file path=ppt/slides/slide39.xml><?xml version="1.0" encoding="utf-8"?>
-<p:sld xmlns:a="http://schemas.openxmlformats.org/drawingml/2006/main" xmlns:r="http://schemas.openxmlformats.org/officeDocument/2006/relationships" xmlns:mc="http://schemas.openxmlformats.org/markup-compatibility/2006" xmlns:mv="urn:schemas-microsoft-com:mac:vml" xmlns:p="http://schemas.openxmlformats.org/presentationml/2006/main" xmlns:c="http://schemas.openxmlformats.org/drawingml/2006/chart" xmlns:dgm="http://schemas.openxmlformats.org/drawingml/2006/diagram" xmlns:o="urn:schemas-microsoft-com:office:office" xmlns:v="urn:schemas-microsoft-com:vml" xmlns:pvml="urn:schemas-microsoft-com:office:powerpoint" xmlns:com="http://schemas.openxmlformats.org/drawingml/2006/compatibility" xmlns:p14="http://schemas.microsoft.com/office/powerpoint/2010/main" xmlns:p15="http://schemas.microsoft.com/office/powerpoint/2012/main" xmlns:ahyp="http://schemas.microsoft.com/office/drawing/2018/hyperlinkcolor" show="0">
-  <p:cSld>
-    <p:bg>
-      <p:bgPr>
-        <a:blipFill>
-          <a:blip r:embed="rId9003">
-            <a:alphaModFix/>
-          </a:blip>
-          <a:stretch>
-            <a:fillRect/>
-          </a:stretch>
-        </a:blipFill>
-      </p:bgPr>
-    </p:bg>
-    <p:spTree>
-      <p:nvGrpSpPr>
-        <p:cNvPr id="397" name="Shape 397"/>
-        <p:cNvGrpSpPr/>
-        <p:nvPr/>
-      </p:nvGrpSpPr>
-      <p:grpSpPr>
-        <a:xfrm>
-          <a:off x="0" y="0"/>
-          <a:ext cx="0" cy="0"/>
-          <a:chOff x="0" y="0"/>
-          <a:chExt cx="0" cy="0"/>
-        </a:xfrm>
-      </p:grpSpPr>
-      <p:sp>
-        <p:nvSpPr>
-          <p:cNvPr id="398" name="Google Shape;398;p67"/>
-          <p:cNvSpPr txBox="1"/>
-          <p:nvPr/>
-        </p:nvSpPr>
-        <p:spPr>
-          <a:xfrm>
-            <a:off x="0" y="0"/>
-            <a:ext cx="9144000" cy="892800"/>
-          </a:xfrm>
-          <a:prstGeom prst="rect">
-            <a:avLst/>
-          </a:prstGeom>
-          <a:noFill/>
-          <a:ln>
-            <a:noFill/>
-          </a:ln>
-        </p:spPr>
-        <p:txBody>
-          <a:bodyPr anchorCtr="0" anchor="t" bIns="91425" lIns="91425" spcFirstLastPara="1" rIns="91425" wrap="square" tIns="91425">
-            <a:spAutoFit/>
-          </a:bodyPr>
-          <a:lstStyle/>
-          <a:p>
-            <a:pPr indent="0" lvl="0" marL="0" rtl="0" algn="ctr">
-              <a:spcBef>
-                <a:spcPts val="0"/>
-              </a:spcBef>
-              <a:spcAft>
-                <a:spcPts val="0"/>
-              </a:spcAft>
-              <a:buNone/>
-            </a:pPr>
-            <a:r>
-              <a:rPr lang="en" sz="4600"/>
-              <a:t>  </a:t>
-            </a:r>
-            <a:r>
-              <a:rPr lang="en" sz="4600">
-                <a:solidFill>
-                  <a:srgbClr val="FF0000"/>
-                </a:solidFill>
-                <a:highlight>
-                  <a:srgbClr val="FFFF00"/>
-                </a:highlight>
-              </a:rPr>
-              <a:t>❤️</a:t>
-            </a:r>
-            <a:r>
-              <a:rPr b="1" lang="en" sz="3300">
-                <a:highlight>
-                  <a:srgbClr val="FFFF00"/>
-                </a:highlight>
-                <a:latin typeface="Lexend Deca"/>
-                <a:ea typeface="Lexend Deca"/>
-                <a:cs typeface="Lexend Deca"/>
-                <a:sym typeface="Lexend Deca"/>
-              </a:rPr>
-              <a:t>1月份生日的家人們</a:t>
-            </a:r>
-            <a:r>
-              <a:rPr lang="en" sz="4600">
-                <a:solidFill>
-                  <a:srgbClr val="FF0000"/>
-                </a:solidFill>
-                <a:highlight>
-                  <a:srgbClr val="FFFF00"/>
-                </a:highlight>
-              </a:rPr>
-              <a:t>❤️</a:t>
-            </a:r>
-            <a:r>
-              <a:rPr lang="en" sz="4600"/>
-              <a:t> </a:t>
-            </a:r>
-            <a:endParaRPr sz="4600">
-              <a:solidFill>
-                <a:srgbClr val="FF0000"/>
-              </a:solidFill>
-            </a:endParaRPr>
-          </a:p>
-        </p:txBody>
-      </p:sp>
-      <p:sp>
-        <p:nvSpPr>
-          <p:cNvPr id="399" name="Birthday Name 0"/>
-          <p:cNvSpPr txBox="1"/>
-          <p:nvPr/>
-        </p:nvSpPr>
-        <p:spPr>
-          <a:xfrm>
-            <a:off x="298800" y="920000"/>
-            <a:ext cx="8500000" cy="2800000"/>
-          </a:xfrm>
-          <a:prstGeom prst="rect">
-            <a:avLst/>
-          </a:prstGeom>
-          <a:noFill/>
-        </p:spPr>
-        <p:txBody>
-          <a:bodyPr wrap="none" anchor="ctr" lIns="45720" rIns="45720" tIns="0" bIns="0">
-            <a:noAutofit/>
-          </a:bodyPr>
-          <a:lstStyle/>
-          <a:p>
-            <a:pPr algn="ctr" fontAlgn="ctr">
-              <a:buNone/>
-            </a:pPr>
-            <a:r>
-              <a:rPr b="1" lang="en" sz="3600">
-                <a:solidFill>
-                  <a:srgbClr val="4C1130"/>
-                </a:solidFill>
-                <a:highlight>
-                  <a:schemeClr val="dk1"/>
-                </a:highlight>
-                <a:latin typeface="DFKai-SB"/>
-                <a:ea typeface="DFKai-SB"/>
-                <a:cs typeface="DFKai-SB"/>
-                <a:sym typeface="DFKai-SB"/>
-              </a:rPr>
-              <a:t xml:space="preserve"> </a:t>
-            </a:r>
-            <a:endParaRPr b="1" sz="3600"/>
-          </a:p>
-        </p:txBody>
-      </p:sp>
-      <p:sp>
-        <p:nvSpPr>
-          <p:cNvPr id="400" name="Google Shape;400;p67"/>
-          <p:cNvSpPr txBox="1"/>
-          <p:nvPr/>
-        </p:nvSpPr>
-        <p:spPr>
-          <a:xfrm>
-            <a:off x="0" y="2037522"/>
-            <a:ext cx="9144000" cy="400200"/>
-          </a:xfrm>
-          <a:prstGeom prst="rect">
-            <a:avLst/>
-          </a:prstGeom>
-          <a:noFill/>
-          <a:ln>
-            <a:noFill/>
-          </a:ln>
-        </p:spPr>
-        <p:txBody>
-          <a:bodyPr anchorCtr="0" anchor="t" bIns="91425" lIns="91425" spcFirstLastPara="1" rIns="91425" wrap="square" tIns="91425">
-            <a:spAutoFit/>
-          </a:bodyPr>
-          <a:lstStyle/>
-          <a:p>
-            <a:pPr indent="0" lvl="0" marL="0" rtl="0" algn="l">
-              <a:spcBef>
-                <a:spcPts val="0"/>
-              </a:spcBef>
-              <a:spcAft>
-                <a:spcPts val="0"/>
-              </a:spcAft>
-              <a:buNone/>
-            </a:pPr>
-            <a:r>
-              <a:t/>
-            </a:r>
-            <a:endParaRPr>
-              <a:latin typeface="Lato"/>
-              <a:ea typeface="Lato"/>
-              <a:cs typeface="Lato"/>
-              <a:sym typeface="Lato"/>
-            </a:endParaRPr>
-          </a:p>
-        </p:txBody>
-      </p:sp>
-      <p:sp>
-        <p:nvSpPr>
-          <p:cNvPr id="401" name="Google Shape;401;p67"/>
-          <p:cNvSpPr txBox="1"/>
-          <p:nvPr/>
-        </p:nvSpPr>
-        <p:spPr>
-          <a:xfrm>
-            <a:off x="228325" y="3894775"/>
-            <a:ext cx="4893900" cy="960600"/>
-          </a:xfrm>
-          <a:prstGeom prst="rect">
-            <a:avLst/>
-          </a:prstGeom>
-          <a:noFill/>
-          <a:ln>
-            <a:noFill/>
-          </a:ln>
-        </p:spPr>
-        <p:txBody>
-          <a:bodyPr anchorCtr="0" anchor="t" bIns="91425" lIns="91425" spcFirstLastPara="1" rIns="91425" wrap="square" tIns="91425">
-            <a:spAutoFit/>
-          </a:bodyPr>
-          <a:lstStyle/>
-          <a:p>
-            <a:pPr indent="0" lvl="0" marL="0" rtl="0" algn="ctr">
-              <a:lnSpc>
-                <a:spcPct val="90000"/>
-              </a:lnSpc>
-              <a:spcBef>
-                <a:spcPts val="0"/>
-              </a:spcBef>
-              <a:spcAft>
-                <a:spcPts val="0"/>
-              </a:spcAft>
-              <a:buNone/>
-            </a:pPr>
-            <a:r>
-              <a:rPr b="1" lang="en" sz="2800">
-                <a:solidFill>
-                  <a:srgbClr val="FF0000"/>
-                </a:solidFill>
-                <a:highlight>
-                  <a:schemeClr val="dk1"/>
-                </a:highlight>
-                <a:latin typeface="Lexend Deca"/>
-                <a:ea typeface="Lexend Deca"/>
-                <a:cs typeface="Lexend Deca"/>
-                <a:sym typeface="Lexend Deca"/>
-              </a:rPr>
-              <a:t>我們將在午餐聚會時禱告祝福</a:t>
-            </a:r>
-            <a:endParaRPr b="1" sz="2800">
-              <a:solidFill>
-                <a:srgbClr val="FF0000"/>
-              </a:solidFill>
-              <a:highlight>
-                <a:schemeClr val="dk1"/>
-              </a:highlight>
-              <a:latin typeface="Lexend Deca"/>
-              <a:ea typeface="Lexend Deca"/>
-              <a:cs typeface="Lexend Deca"/>
-              <a:sym typeface="Lexend Deca"/>
-            </a:endParaRPr>
-          </a:p>
-          <a:p>
-            <a:pPr indent="0" lvl="0" marL="0" rtl="0" algn="ctr">
-              <a:lnSpc>
-                <a:spcPct val="90000"/>
-              </a:lnSpc>
-              <a:spcBef>
-                <a:spcPts val="0"/>
-              </a:spcBef>
-              <a:spcAft>
-                <a:spcPts val="0"/>
-              </a:spcAft>
-              <a:buNone/>
-            </a:pPr>
-            <a:r>
-              <a:rPr b="1" lang="en" sz="2800">
-                <a:solidFill>
-                  <a:srgbClr val="FF0000"/>
-                </a:solidFill>
-                <a:highlight>
-                  <a:schemeClr val="dk1"/>
-                </a:highlight>
-                <a:latin typeface="Lexend Deca"/>
-                <a:ea typeface="Lexend Deca"/>
-                <a:cs typeface="Lexend Deca"/>
-                <a:sym typeface="Lexend Deca"/>
-              </a:rPr>
-              <a:t> 唱生日歌與享用生日蛋糕</a:t>
-            </a:r>
-            <a:endParaRPr/>
-          </a:p>
-        </p:txBody>
-      </p:sp>
-    </p:spTree>
-  </p:cSld>
-  <p:clrMapOvr>
-    <a:masterClrMapping/>
-  </p:clrMapOvr>
-</p:sld>
-</file>
-
 <file path=ppt/slides/slide4.xml><?xml version="1.0" encoding="utf-8"?>
 <p:sld xmlns:a="http://schemas.openxmlformats.org/drawingml/2006/main" xmlns:r="http://schemas.openxmlformats.org/officeDocument/2006/relationships" xmlns:mc="http://schemas.openxmlformats.org/markup-compatibility/2006" xmlns:mv="urn:schemas-microsoft-com:mac:vml" xmlns:p="http://schemas.openxmlformats.org/presentationml/2006/main" xmlns:c="http://schemas.openxmlformats.org/drawingml/2006/chart" xmlns:dgm="http://schemas.openxmlformats.org/drawingml/2006/diagram" xmlns:o="urn:schemas-microsoft-com:office:office" xmlns:v="urn:schemas-microsoft-com:vml" xmlns:pvml="urn:schemas-microsoft-com:office:powerpoint" xmlns:com="http://schemas.openxmlformats.org/drawingml/2006/compatibility" xmlns:p14="http://schemas.microsoft.com/office/powerpoint/2010/main" xmlns:p15="http://schemas.microsoft.com/office/powerpoint/2012/main" xmlns:ahyp="http://schemas.microsoft.com/office/drawing/2018/hyperlinkcolor">
   <p:cSld>
@@ -40948,3086 +40628,6 @@
               <a:cs typeface="Corbel"/>
               <a:sym typeface="Corbel"/>
             </a:endParaRPr>
-          </a:p>
-        </p:txBody>
-      </p:sp>
-    </p:spTree>
-  </p:cSld>
-  <p:clrMapOvr>
-    <a:masterClrMapping/>
-  </p:clrMapOvr>
-</p:sld>
-</file>
-
-<file path=ppt/slides/slide40.xml><?xml version="1.0" encoding="utf-8"?>
-<p:sld xmlns:a="http://schemas.openxmlformats.org/drawingml/2006/main" xmlns:r="http://schemas.openxmlformats.org/officeDocument/2006/relationships" xmlns:mc="http://schemas.openxmlformats.org/markup-compatibility/2006" xmlns:mv="urn:schemas-microsoft-com:mac:vml" xmlns:p="http://schemas.openxmlformats.org/presentationml/2006/main" xmlns:c="http://schemas.openxmlformats.org/drawingml/2006/chart" xmlns:dgm="http://schemas.openxmlformats.org/drawingml/2006/diagram" xmlns:o="urn:schemas-microsoft-com:office:office" xmlns:v="urn:schemas-microsoft-com:vml" xmlns:pvml="urn:schemas-microsoft-com:office:powerpoint" xmlns:com="http://schemas.openxmlformats.org/drawingml/2006/compatibility" xmlns:p14="http://schemas.microsoft.com/office/powerpoint/2010/main" xmlns:p15="http://schemas.microsoft.com/office/powerpoint/2012/main" xmlns:ahyp="http://schemas.microsoft.com/office/drawing/2018/hyperlinkcolor" show="0">
-  <p:cSld>
-    <p:bg>
-      <p:bgPr>
-        <a:blipFill>
-          <a:blip r:embed="rId9003">
-            <a:alphaModFix/>
-          </a:blip>
-          <a:stretch>
-            <a:fillRect/>
-          </a:stretch>
-        </a:blipFill>
-      </p:bgPr>
-    </p:bg>
-    <p:spTree>
-      <p:nvGrpSpPr>
-        <p:cNvPr id="397" name="Shape 397"/>
-        <p:cNvGrpSpPr/>
-        <p:nvPr/>
-      </p:nvGrpSpPr>
-      <p:grpSpPr>
-        <a:xfrm>
-          <a:off x="0" y="0"/>
-          <a:ext cx="0" cy="0"/>
-          <a:chOff x="0" y="0"/>
-          <a:chExt cx="0" cy="0"/>
-        </a:xfrm>
-      </p:grpSpPr>
-      <p:sp>
-        <p:nvSpPr>
-          <p:cNvPr id="398" name="Google Shape;398;p67"/>
-          <p:cNvSpPr txBox="1"/>
-          <p:nvPr/>
-        </p:nvSpPr>
-        <p:spPr>
-          <a:xfrm>
-            <a:off x="0" y="0"/>
-            <a:ext cx="9144000" cy="892800"/>
-          </a:xfrm>
-          <a:prstGeom prst="rect">
-            <a:avLst/>
-          </a:prstGeom>
-          <a:noFill/>
-          <a:ln>
-            <a:noFill/>
-          </a:ln>
-        </p:spPr>
-        <p:txBody>
-          <a:bodyPr anchorCtr="0" anchor="t" bIns="91425" lIns="91425" spcFirstLastPara="1" rIns="91425" wrap="square" tIns="91425">
-            <a:spAutoFit/>
-          </a:bodyPr>
-          <a:lstStyle/>
-          <a:p>
-            <a:pPr indent="0" lvl="0" marL="0" rtl="0" algn="ctr">
-              <a:spcBef>
-                <a:spcPts val="0"/>
-              </a:spcBef>
-              <a:spcAft>
-                <a:spcPts val="0"/>
-              </a:spcAft>
-              <a:buNone/>
-            </a:pPr>
-            <a:r>
-              <a:rPr lang="en" sz="4600"/>
-              <a:t>  </a:t>
-            </a:r>
-            <a:r>
-              <a:rPr lang="en" sz="4600">
-                <a:solidFill>
-                  <a:srgbClr val="FF0000"/>
-                </a:solidFill>
-                <a:highlight>
-                  <a:srgbClr val="FFFF00"/>
-                </a:highlight>
-              </a:rPr>
-              <a:t>❤️</a:t>
-            </a:r>
-            <a:r>
-              <a:rPr b="1" lang="en" sz="3300">
-                <a:highlight>
-                  <a:srgbClr val="FFFF00"/>
-                </a:highlight>
-                <a:latin typeface="Lexend Deca"/>
-                <a:ea typeface="Lexend Deca"/>
-                <a:cs typeface="Lexend Deca"/>
-                <a:sym typeface="Lexend Deca"/>
-              </a:rPr>
-              <a:t>2月份生日的家人們</a:t>
-            </a:r>
-            <a:r>
-              <a:rPr lang="en" sz="4600">
-                <a:solidFill>
-                  <a:srgbClr val="FF0000"/>
-                </a:solidFill>
-                <a:highlight>
-                  <a:srgbClr val="FFFF00"/>
-                </a:highlight>
-              </a:rPr>
-              <a:t>❤️</a:t>
-            </a:r>
-            <a:r>
-              <a:rPr lang="en" sz="4600"/>
-              <a:t> </a:t>
-            </a:r>
-            <a:endParaRPr sz="4600">
-              <a:solidFill>
-                <a:srgbClr val="FF0000"/>
-              </a:solidFill>
-            </a:endParaRPr>
-          </a:p>
-        </p:txBody>
-      </p:sp>
-      <p:sp>
-        <p:nvSpPr>
-          <p:cNvPr id="399" name="Birthday Name 0"/>
-          <p:cNvSpPr txBox="1"/>
-          <p:nvPr/>
-        </p:nvSpPr>
-        <p:spPr>
-          <a:xfrm>
-            <a:off x="298800" y="920000"/>
-            <a:ext cx="8500000" cy="2800000"/>
-          </a:xfrm>
-          <a:prstGeom prst="rect">
-            <a:avLst/>
-          </a:prstGeom>
-          <a:noFill/>
-        </p:spPr>
-        <p:txBody>
-          <a:bodyPr wrap="none" anchor="ctr" lIns="45720" rIns="45720" tIns="0" bIns="0">
-            <a:noAutofit/>
-          </a:bodyPr>
-          <a:lstStyle/>
-          <a:p>
-            <a:pPr algn="ctr" fontAlgn="ctr">
-              <a:buNone/>
-            </a:pPr>
-            <a:r>
-              <a:rPr b="1" lang="en" sz="3600">
-                <a:solidFill>
-                  <a:srgbClr val="4C1130"/>
-                </a:solidFill>
-                <a:highlight>
-                  <a:schemeClr val="dk1"/>
-                </a:highlight>
-                <a:latin typeface="DFKai-SB"/>
-                <a:ea typeface="DFKai-SB"/>
-                <a:cs typeface="DFKai-SB"/>
-                <a:sym typeface="DFKai-SB"/>
-              </a:rPr>
-              <a:t xml:space="preserve"> </a:t>
-            </a:r>
-            <a:endParaRPr b="1" sz="3600"/>
-          </a:p>
-        </p:txBody>
-      </p:sp>
-      <p:sp>
-        <p:nvSpPr>
-          <p:cNvPr id="400" name="Google Shape;400;p67"/>
-          <p:cNvSpPr txBox="1"/>
-          <p:nvPr/>
-        </p:nvSpPr>
-        <p:spPr>
-          <a:xfrm>
-            <a:off x="0" y="2037522"/>
-            <a:ext cx="9144000" cy="400200"/>
-          </a:xfrm>
-          <a:prstGeom prst="rect">
-            <a:avLst/>
-          </a:prstGeom>
-          <a:noFill/>
-          <a:ln>
-            <a:noFill/>
-          </a:ln>
-        </p:spPr>
-        <p:txBody>
-          <a:bodyPr anchorCtr="0" anchor="t" bIns="91425" lIns="91425" spcFirstLastPara="1" rIns="91425" wrap="square" tIns="91425">
-            <a:spAutoFit/>
-          </a:bodyPr>
-          <a:lstStyle/>
-          <a:p>
-            <a:pPr indent="0" lvl="0" marL="0" rtl="0" algn="l">
-              <a:spcBef>
-                <a:spcPts val="0"/>
-              </a:spcBef>
-              <a:spcAft>
-                <a:spcPts val="0"/>
-              </a:spcAft>
-              <a:buNone/>
-            </a:pPr>
-            <a:r>
-              <a:t/>
-            </a:r>
-            <a:endParaRPr>
-              <a:latin typeface="Lato"/>
-              <a:ea typeface="Lato"/>
-              <a:cs typeface="Lato"/>
-              <a:sym typeface="Lato"/>
-            </a:endParaRPr>
-          </a:p>
-        </p:txBody>
-      </p:sp>
-      <p:sp>
-        <p:nvSpPr>
-          <p:cNvPr id="401" name="Google Shape;401;p67"/>
-          <p:cNvSpPr txBox="1"/>
-          <p:nvPr/>
-        </p:nvSpPr>
-        <p:spPr>
-          <a:xfrm>
-            <a:off x="228325" y="3894775"/>
-            <a:ext cx="4893900" cy="960600"/>
-          </a:xfrm>
-          <a:prstGeom prst="rect">
-            <a:avLst/>
-          </a:prstGeom>
-          <a:noFill/>
-          <a:ln>
-            <a:noFill/>
-          </a:ln>
-        </p:spPr>
-        <p:txBody>
-          <a:bodyPr anchorCtr="0" anchor="t" bIns="91425" lIns="91425" spcFirstLastPara="1" rIns="91425" wrap="square" tIns="91425">
-            <a:spAutoFit/>
-          </a:bodyPr>
-          <a:lstStyle/>
-          <a:p>
-            <a:pPr indent="0" lvl="0" marL="0" rtl="0" algn="ctr">
-              <a:lnSpc>
-                <a:spcPct val="90000"/>
-              </a:lnSpc>
-              <a:spcBef>
-                <a:spcPts val="0"/>
-              </a:spcBef>
-              <a:spcAft>
-                <a:spcPts val="0"/>
-              </a:spcAft>
-              <a:buNone/>
-            </a:pPr>
-            <a:r>
-              <a:rPr b="1" lang="en" sz="2800">
-                <a:solidFill>
-                  <a:srgbClr val="FF0000"/>
-                </a:solidFill>
-                <a:highlight>
-                  <a:schemeClr val="dk1"/>
-                </a:highlight>
-                <a:latin typeface="Lexend Deca"/>
-                <a:ea typeface="Lexend Deca"/>
-                <a:cs typeface="Lexend Deca"/>
-                <a:sym typeface="Lexend Deca"/>
-              </a:rPr>
-              <a:t>我們將在午餐聚會時禱告祝福</a:t>
-            </a:r>
-            <a:endParaRPr b="1" sz="2800">
-              <a:solidFill>
-                <a:srgbClr val="FF0000"/>
-              </a:solidFill>
-              <a:highlight>
-                <a:schemeClr val="dk1"/>
-              </a:highlight>
-              <a:latin typeface="Lexend Deca"/>
-              <a:ea typeface="Lexend Deca"/>
-              <a:cs typeface="Lexend Deca"/>
-              <a:sym typeface="Lexend Deca"/>
-            </a:endParaRPr>
-          </a:p>
-          <a:p>
-            <a:pPr indent="0" lvl="0" marL="0" rtl="0" algn="ctr">
-              <a:lnSpc>
-                <a:spcPct val="90000"/>
-              </a:lnSpc>
-              <a:spcBef>
-                <a:spcPts val="0"/>
-              </a:spcBef>
-              <a:spcAft>
-                <a:spcPts val="0"/>
-              </a:spcAft>
-              <a:buNone/>
-            </a:pPr>
-            <a:r>
-              <a:rPr b="1" lang="en" sz="2800">
-                <a:solidFill>
-                  <a:srgbClr val="FF0000"/>
-                </a:solidFill>
-                <a:highlight>
-                  <a:schemeClr val="dk1"/>
-                </a:highlight>
-                <a:latin typeface="Lexend Deca"/>
-                <a:ea typeface="Lexend Deca"/>
-                <a:cs typeface="Lexend Deca"/>
-                <a:sym typeface="Lexend Deca"/>
-              </a:rPr>
-              <a:t> 唱生日歌與享用生日蛋糕</a:t>
-            </a:r>
-            <a:endParaRPr/>
-          </a:p>
-        </p:txBody>
-      </p:sp>
-    </p:spTree>
-  </p:cSld>
-  <p:clrMapOvr>
-    <a:masterClrMapping/>
-  </p:clrMapOvr>
-</p:sld>
-</file>
-
-<file path=ppt/slides/slide41.xml><?xml version="1.0" encoding="utf-8"?>
-<p:sld xmlns:a="http://schemas.openxmlformats.org/drawingml/2006/main" xmlns:r="http://schemas.openxmlformats.org/officeDocument/2006/relationships" xmlns:mc="http://schemas.openxmlformats.org/markup-compatibility/2006" xmlns:mv="urn:schemas-microsoft-com:mac:vml" xmlns:p="http://schemas.openxmlformats.org/presentationml/2006/main" xmlns:c="http://schemas.openxmlformats.org/drawingml/2006/chart" xmlns:dgm="http://schemas.openxmlformats.org/drawingml/2006/diagram" xmlns:o="urn:schemas-microsoft-com:office:office" xmlns:v="urn:schemas-microsoft-com:vml" xmlns:pvml="urn:schemas-microsoft-com:office:powerpoint" xmlns:com="http://schemas.openxmlformats.org/drawingml/2006/compatibility" xmlns:p14="http://schemas.microsoft.com/office/powerpoint/2010/main" xmlns:p15="http://schemas.microsoft.com/office/powerpoint/2012/main" xmlns:ahyp="http://schemas.microsoft.com/office/drawing/2018/hyperlinkcolor" show="0">
-  <p:cSld>
-    <p:bg>
-      <p:bgPr>
-        <a:blipFill>
-          <a:blip r:embed="rId9003">
-            <a:alphaModFix/>
-          </a:blip>
-          <a:stretch>
-            <a:fillRect/>
-          </a:stretch>
-        </a:blipFill>
-      </p:bgPr>
-    </p:bg>
-    <p:spTree>
-      <p:nvGrpSpPr>
-        <p:cNvPr id="397" name="Shape 397"/>
-        <p:cNvGrpSpPr/>
-        <p:nvPr/>
-      </p:nvGrpSpPr>
-      <p:grpSpPr>
-        <a:xfrm>
-          <a:off x="0" y="0"/>
-          <a:ext cx="0" cy="0"/>
-          <a:chOff x="0" y="0"/>
-          <a:chExt cx="0" cy="0"/>
-        </a:xfrm>
-      </p:grpSpPr>
-      <p:sp>
-        <p:nvSpPr>
-          <p:cNvPr id="398" name="Google Shape;398;p67"/>
-          <p:cNvSpPr txBox="1"/>
-          <p:nvPr/>
-        </p:nvSpPr>
-        <p:spPr>
-          <a:xfrm>
-            <a:off x="0" y="0"/>
-            <a:ext cx="9144000" cy="892800"/>
-          </a:xfrm>
-          <a:prstGeom prst="rect">
-            <a:avLst/>
-          </a:prstGeom>
-          <a:noFill/>
-          <a:ln>
-            <a:noFill/>
-          </a:ln>
-        </p:spPr>
-        <p:txBody>
-          <a:bodyPr anchorCtr="0" anchor="t" bIns="91425" lIns="91425" spcFirstLastPara="1" rIns="91425" wrap="square" tIns="91425">
-            <a:spAutoFit/>
-          </a:bodyPr>
-          <a:lstStyle/>
-          <a:p>
-            <a:pPr indent="0" lvl="0" marL="0" rtl="0" algn="ctr">
-              <a:spcBef>
-                <a:spcPts val="0"/>
-              </a:spcBef>
-              <a:spcAft>
-                <a:spcPts val="0"/>
-              </a:spcAft>
-              <a:buNone/>
-            </a:pPr>
-            <a:r>
-              <a:rPr lang="en" sz="4600"/>
-              <a:t>  </a:t>
-            </a:r>
-            <a:r>
-              <a:rPr lang="en" sz="4600">
-                <a:solidFill>
-                  <a:srgbClr val="FF0000"/>
-                </a:solidFill>
-                <a:highlight>
-                  <a:srgbClr val="FFFF00"/>
-                </a:highlight>
-              </a:rPr>
-              <a:t>❤️</a:t>
-            </a:r>
-            <a:r>
-              <a:rPr b="1" lang="en" sz="3300">
-                <a:highlight>
-                  <a:srgbClr val="FFFF00"/>
-                </a:highlight>
-                <a:latin typeface="Lexend Deca"/>
-                <a:ea typeface="Lexend Deca"/>
-                <a:cs typeface="Lexend Deca"/>
-                <a:sym typeface="Lexend Deca"/>
-              </a:rPr>
-              <a:t>3月份生日的家人們</a:t>
-            </a:r>
-            <a:r>
-              <a:rPr lang="en" sz="4600">
-                <a:solidFill>
-                  <a:srgbClr val="FF0000"/>
-                </a:solidFill>
-                <a:highlight>
-                  <a:srgbClr val="FFFF00"/>
-                </a:highlight>
-              </a:rPr>
-              <a:t>❤️</a:t>
-            </a:r>
-            <a:r>
-              <a:rPr lang="en" sz="4600"/>
-              <a:t> </a:t>
-            </a:r>
-            <a:endParaRPr sz="4600">
-              <a:solidFill>
-                <a:srgbClr val="FF0000"/>
-              </a:solidFill>
-            </a:endParaRPr>
-          </a:p>
-        </p:txBody>
-      </p:sp>
-      <p:sp>
-        <p:nvSpPr>
-          <p:cNvPr id="399" name="Birthday Name 0"/>
-          <p:cNvSpPr txBox="1"/>
-          <p:nvPr/>
-        </p:nvSpPr>
-        <p:spPr>
-          <a:xfrm>
-            <a:off x="298800" y="920000"/>
-            <a:ext cx="8500000" cy="2800000"/>
-          </a:xfrm>
-          <a:prstGeom prst="rect">
-            <a:avLst/>
-          </a:prstGeom>
-          <a:noFill/>
-        </p:spPr>
-        <p:txBody>
-          <a:bodyPr wrap="none" anchor="ctr" lIns="45720" rIns="45720" tIns="0" bIns="0">
-            <a:noAutofit/>
-          </a:bodyPr>
-          <a:lstStyle/>
-          <a:p>
-            <a:pPr algn="ctr" fontAlgn="ctr">
-              <a:buNone/>
-            </a:pPr>
-            <a:r>
-              <a:rPr b="1" lang="en" sz="3600">
-                <a:solidFill>
-                  <a:srgbClr val="4C1130"/>
-                </a:solidFill>
-                <a:highlight>
-                  <a:schemeClr val="dk1"/>
-                </a:highlight>
-                <a:latin typeface="DFKai-SB"/>
-                <a:ea typeface="DFKai-SB"/>
-                <a:cs typeface="DFKai-SB"/>
-                <a:sym typeface="DFKai-SB"/>
-              </a:rPr>
-              <a:t xml:space="preserve"> </a:t>
-            </a:r>
-            <a:endParaRPr b="1" sz="3600"/>
-          </a:p>
-        </p:txBody>
-      </p:sp>
-      <p:sp>
-        <p:nvSpPr>
-          <p:cNvPr id="400" name="Google Shape;400;p67"/>
-          <p:cNvSpPr txBox="1"/>
-          <p:nvPr/>
-        </p:nvSpPr>
-        <p:spPr>
-          <a:xfrm>
-            <a:off x="0" y="2037522"/>
-            <a:ext cx="9144000" cy="400200"/>
-          </a:xfrm>
-          <a:prstGeom prst="rect">
-            <a:avLst/>
-          </a:prstGeom>
-          <a:noFill/>
-          <a:ln>
-            <a:noFill/>
-          </a:ln>
-        </p:spPr>
-        <p:txBody>
-          <a:bodyPr anchorCtr="0" anchor="t" bIns="91425" lIns="91425" spcFirstLastPara="1" rIns="91425" wrap="square" tIns="91425">
-            <a:spAutoFit/>
-          </a:bodyPr>
-          <a:lstStyle/>
-          <a:p>
-            <a:pPr indent="0" lvl="0" marL="0" rtl="0" algn="l">
-              <a:spcBef>
-                <a:spcPts val="0"/>
-              </a:spcBef>
-              <a:spcAft>
-                <a:spcPts val="0"/>
-              </a:spcAft>
-              <a:buNone/>
-            </a:pPr>
-            <a:r>
-              <a:t/>
-            </a:r>
-            <a:endParaRPr>
-              <a:latin typeface="Lato"/>
-              <a:ea typeface="Lato"/>
-              <a:cs typeface="Lato"/>
-              <a:sym typeface="Lato"/>
-            </a:endParaRPr>
-          </a:p>
-        </p:txBody>
-      </p:sp>
-      <p:sp>
-        <p:nvSpPr>
-          <p:cNvPr id="401" name="Google Shape;401;p67"/>
-          <p:cNvSpPr txBox="1"/>
-          <p:nvPr/>
-        </p:nvSpPr>
-        <p:spPr>
-          <a:xfrm>
-            <a:off x="228325" y="3894775"/>
-            <a:ext cx="4893900" cy="960600"/>
-          </a:xfrm>
-          <a:prstGeom prst="rect">
-            <a:avLst/>
-          </a:prstGeom>
-          <a:noFill/>
-          <a:ln>
-            <a:noFill/>
-          </a:ln>
-        </p:spPr>
-        <p:txBody>
-          <a:bodyPr anchorCtr="0" anchor="t" bIns="91425" lIns="91425" spcFirstLastPara="1" rIns="91425" wrap="square" tIns="91425">
-            <a:spAutoFit/>
-          </a:bodyPr>
-          <a:lstStyle/>
-          <a:p>
-            <a:pPr indent="0" lvl="0" marL="0" rtl="0" algn="ctr">
-              <a:lnSpc>
-                <a:spcPct val="90000"/>
-              </a:lnSpc>
-              <a:spcBef>
-                <a:spcPts val="0"/>
-              </a:spcBef>
-              <a:spcAft>
-                <a:spcPts val="0"/>
-              </a:spcAft>
-              <a:buNone/>
-            </a:pPr>
-            <a:r>
-              <a:rPr b="1" lang="en" sz="2800">
-                <a:solidFill>
-                  <a:srgbClr val="FF0000"/>
-                </a:solidFill>
-                <a:highlight>
-                  <a:schemeClr val="dk1"/>
-                </a:highlight>
-                <a:latin typeface="Lexend Deca"/>
-                <a:ea typeface="Lexend Deca"/>
-                <a:cs typeface="Lexend Deca"/>
-                <a:sym typeface="Lexend Deca"/>
-              </a:rPr>
-              <a:t>我們將在午餐聚會時禱告祝福</a:t>
-            </a:r>
-            <a:endParaRPr b="1" sz="2800">
-              <a:solidFill>
-                <a:srgbClr val="FF0000"/>
-              </a:solidFill>
-              <a:highlight>
-                <a:schemeClr val="dk1"/>
-              </a:highlight>
-              <a:latin typeface="Lexend Deca"/>
-              <a:ea typeface="Lexend Deca"/>
-              <a:cs typeface="Lexend Deca"/>
-              <a:sym typeface="Lexend Deca"/>
-            </a:endParaRPr>
-          </a:p>
-          <a:p>
-            <a:pPr indent="0" lvl="0" marL="0" rtl="0" algn="ctr">
-              <a:lnSpc>
-                <a:spcPct val="90000"/>
-              </a:lnSpc>
-              <a:spcBef>
-                <a:spcPts val="0"/>
-              </a:spcBef>
-              <a:spcAft>
-                <a:spcPts val="0"/>
-              </a:spcAft>
-              <a:buNone/>
-            </a:pPr>
-            <a:r>
-              <a:rPr b="1" lang="en" sz="2800">
-                <a:solidFill>
-                  <a:srgbClr val="FF0000"/>
-                </a:solidFill>
-                <a:highlight>
-                  <a:schemeClr val="dk1"/>
-                </a:highlight>
-                <a:latin typeface="Lexend Deca"/>
-                <a:ea typeface="Lexend Deca"/>
-                <a:cs typeface="Lexend Deca"/>
-                <a:sym typeface="Lexend Deca"/>
-              </a:rPr>
-              <a:t> 唱生日歌與享用生日蛋糕</a:t>
-            </a:r>
-            <a:endParaRPr/>
-          </a:p>
-        </p:txBody>
-      </p:sp>
-    </p:spTree>
-  </p:cSld>
-  <p:clrMapOvr>
-    <a:masterClrMapping/>
-  </p:clrMapOvr>
-</p:sld>
-</file>
-
-<file path=ppt/slides/slide42.xml><?xml version="1.0" encoding="utf-8"?>
-<p:sld xmlns:a="http://schemas.openxmlformats.org/drawingml/2006/main" xmlns:r="http://schemas.openxmlformats.org/officeDocument/2006/relationships" xmlns:mc="http://schemas.openxmlformats.org/markup-compatibility/2006" xmlns:mv="urn:schemas-microsoft-com:mac:vml" xmlns:p="http://schemas.openxmlformats.org/presentationml/2006/main" xmlns:c="http://schemas.openxmlformats.org/drawingml/2006/chart" xmlns:dgm="http://schemas.openxmlformats.org/drawingml/2006/diagram" xmlns:o="urn:schemas-microsoft-com:office:office" xmlns:v="urn:schemas-microsoft-com:vml" xmlns:pvml="urn:schemas-microsoft-com:office:powerpoint" xmlns:com="http://schemas.openxmlformats.org/drawingml/2006/compatibility" xmlns:p14="http://schemas.microsoft.com/office/powerpoint/2010/main" xmlns:p15="http://schemas.microsoft.com/office/powerpoint/2012/main" xmlns:ahyp="http://schemas.microsoft.com/office/drawing/2018/hyperlinkcolor" show="0">
-  <p:cSld>
-    <p:bg>
-      <p:bgPr>
-        <a:blipFill>
-          <a:blip r:embed="rId9003">
-            <a:alphaModFix/>
-          </a:blip>
-          <a:stretch>
-            <a:fillRect/>
-          </a:stretch>
-        </a:blipFill>
-      </p:bgPr>
-    </p:bg>
-    <p:spTree>
-      <p:nvGrpSpPr>
-        <p:cNvPr id="397" name="Shape 397"/>
-        <p:cNvGrpSpPr/>
-        <p:nvPr/>
-      </p:nvGrpSpPr>
-      <p:grpSpPr>
-        <a:xfrm>
-          <a:off x="0" y="0"/>
-          <a:ext cx="0" cy="0"/>
-          <a:chOff x="0" y="0"/>
-          <a:chExt cx="0" cy="0"/>
-        </a:xfrm>
-      </p:grpSpPr>
-      <p:sp>
-        <p:nvSpPr>
-          <p:cNvPr id="398" name="Google Shape;398;p67"/>
-          <p:cNvSpPr txBox="1"/>
-          <p:nvPr/>
-        </p:nvSpPr>
-        <p:spPr>
-          <a:xfrm>
-            <a:off x="0" y="0"/>
-            <a:ext cx="9144000" cy="892800"/>
-          </a:xfrm>
-          <a:prstGeom prst="rect">
-            <a:avLst/>
-          </a:prstGeom>
-          <a:noFill/>
-          <a:ln>
-            <a:noFill/>
-          </a:ln>
-        </p:spPr>
-        <p:txBody>
-          <a:bodyPr anchorCtr="0" anchor="t" bIns="91425" lIns="91425" spcFirstLastPara="1" rIns="91425" wrap="square" tIns="91425">
-            <a:spAutoFit/>
-          </a:bodyPr>
-          <a:lstStyle/>
-          <a:p>
-            <a:pPr indent="0" lvl="0" marL="0" rtl="0" algn="ctr">
-              <a:spcBef>
-                <a:spcPts val="0"/>
-              </a:spcBef>
-              <a:spcAft>
-                <a:spcPts val="0"/>
-              </a:spcAft>
-              <a:buNone/>
-            </a:pPr>
-            <a:r>
-              <a:rPr lang="en" sz="4600"/>
-              <a:t>  </a:t>
-            </a:r>
-            <a:r>
-              <a:rPr lang="en" sz="4600">
-                <a:solidFill>
-                  <a:srgbClr val="FF0000"/>
-                </a:solidFill>
-                <a:highlight>
-                  <a:srgbClr val="FFFF00"/>
-                </a:highlight>
-              </a:rPr>
-              <a:t>❤️</a:t>
-            </a:r>
-            <a:r>
-              <a:rPr b="1" lang="en" sz="3300">
-                <a:highlight>
-                  <a:srgbClr val="FFFF00"/>
-                </a:highlight>
-                <a:latin typeface="Lexend Deca"/>
-                <a:ea typeface="Lexend Deca"/>
-                <a:cs typeface="Lexend Deca"/>
-                <a:sym typeface="Lexend Deca"/>
-              </a:rPr>
-              <a:t>4月份生日的家人們</a:t>
-            </a:r>
-            <a:r>
-              <a:rPr lang="en" sz="4600">
-                <a:solidFill>
-                  <a:srgbClr val="FF0000"/>
-                </a:solidFill>
-                <a:highlight>
-                  <a:srgbClr val="FFFF00"/>
-                </a:highlight>
-              </a:rPr>
-              <a:t>❤️</a:t>
-            </a:r>
-            <a:r>
-              <a:rPr lang="en" sz="4600"/>
-              <a:t> </a:t>
-            </a:r>
-            <a:endParaRPr sz="4600">
-              <a:solidFill>
-                <a:srgbClr val="FF0000"/>
-              </a:solidFill>
-            </a:endParaRPr>
-          </a:p>
-        </p:txBody>
-      </p:sp>
-      <p:sp>
-        <p:nvSpPr>
-          <p:cNvPr id="399" name="Birthday Name 0"/>
-          <p:cNvSpPr txBox="1"/>
-          <p:nvPr/>
-        </p:nvSpPr>
-        <p:spPr>
-          <a:xfrm>
-            <a:off x="298800" y="920000"/>
-            <a:ext cx="8500000" cy="2800000"/>
-          </a:xfrm>
-          <a:prstGeom prst="rect">
-            <a:avLst/>
-          </a:prstGeom>
-          <a:noFill/>
-        </p:spPr>
-        <p:txBody>
-          <a:bodyPr wrap="none" anchor="ctr" lIns="45720" rIns="45720" tIns="0" bIns="0">
-            <a:noAutofit/>
-          </a:bodyPr>
-          <a:lstStyle/>
-          <a:p>
-            <a:pPr algn="ctr" fontAlgn="ctr">
-              <a:buNone/>
-            </a:pPr>
-            <a:r>
-              <a:rPr b="1" lang="en" sz="3600">
-                <a:solidFill>
-                  <a:srgbClr val="4C1130"/>
-                </a:solidFill>
-                <a:highlight>
-                  <a:schemeClr val="dk1"/>
-                </a:highlight>
-                <a:latin typeface="DFKai-SB"/>
-                <a:ea typeface="DFKai-SB"/>
-                <a:cs typeface="DFKai-SB"/>
-                <a:sym typeface="DFKai-SB"/>
-              </a:rPr>
-              <a:t xml:space="preserve"> </a:t>
-            </a:r>
-            <a:endParaRPr b="1" sz="3600"/>
-          </a:p>
-        </p:txBody>
-      </p:sp>
-      <p:sp>
-        <p:nvSpPr>
-          <p:cNvPr id="400" name="Google Shape;400;p67"/>
-          <p:cNvSpPr txBox="1"/>
-          <p:nvPr/>
-        </p:nvSpPr>
-        <p:spPr>
-          <a:xfrm>
-            <a:off x="0" y="2037522"/>
-            <a:ext cx="9144000" cy="400200"/>
-          </a:xfrm>
-          <a:prstGeom prst="rect">
-            <a:avLst/>
-          </a:prstGeom>
-          <a:noFill/>
-          <a:ln>
-            <a:noFill/>
-          </a:ln>
-        </p:spPr>
-        <p:txBody>
-          <a:bodyPr anchorCtr="0" anchor="t" bIns="91425" lIns="91425" spcFirstLastPara="1" rIns="91425" wrap="square" tIns="91425">
-            <a:spAutoFit/>
-          </a:bodyPr>
-          <a:lstStyle/>
-          <a:p>
-            <a:pPr indent="0" lvl="0" marL="0" rtl="0" algn="l">
-              <a:spcBef>
-                <a:spcPts val="0"/>
-              </a:spcBef>
-              <a:spcAft>
-                <a:spcPts val="0"/>
-              </a:spcAft>
-              <a:buNone/>
-            </a:pPr>
-            <a:r>
-              <a:t/>
-            </a:r>
-            <a:endParaRPr>
-              <a:latin typeface="Lato"/>
-              <a:ea typeface="Lato"/>
-              <a:cs typeface="Lato"/>
-              <a:sym typeface="Lato"/>
-            </a:endParaRPr>
-          </a:p>
-        </p:txBody>
-      </p:sp>
-      <p:sp>
-        <p:nvSpPr>
-          <p:cNvPr id="401" name="Google Shape;401;p67"/>
-          <p:cNvSpPr txBox="1"/>
-          <p:nvPr/>
-        </p:nvSpPr>
-        <p:spPr>
-          <a:xfrm>
-            <a:off x="228325" y="3894775"/>
-            <a:ext cx="4893900" cy="960600"/>
-          </a:xfrm>
-          <a:prstGeom prst="rect">
-            <a:avLst/>
-          </a:prstGeom>
-          <a:noFill/>
-          <a:ln>
-            <a:noFill/>
-          </a:ln>
-        </p:spPr>
-        <p:txBody>
-          <a:bodyPr anchorCtr="0" anchor="t" bIns="91425" lIns="91425" spcFirstLastPara="1" rIns="91425" wrap="square" tIns="91425">
-            <a:spAutoFit/>
-          </a:bodyPr>
-          <a:lstStyle/>
-          <a:p>
-            <a:pPr indent="0" lvl="0" marL="0" rtl="0" algn="ctr">
-              <a:lnSpc>
-                <a:spcPct val="90000"/>
-              </a:lnSpc>
-              <a:spcBef>
-                <a:spcPts val="0"/>
-              </a:spcBef>
-              <a:spcAft>
-                <a:spcPts val="0"/>
-              </a:spcAft>
-              <a:buNone/>
-            </a:pPr>
-            <a:r>
-              <a:rPr b="1" lang="en" sz="2800">
-                <a:solidFill>
-                  <a:srgbClr val="FF0000"/>
-                </a:solidFill>
-                <a:highlight>
-                  <a:schemeClr val="dk1"/>
-                </a:highlight>
-                <a:latin typeface="Lexend Deca"/>
-                <a:ea typeface="Lexend Deca"/>
-                <a:cs typeface="Lexend Deca"/>
-                <a:sym typeface="Lexend Deca"/>
-              </a:rPr>
-              <a:t>我們將在午餐聚會時禱告祝福</a:t>
-            </a:r>
-            <a:endParaRPr b="1" sz="2800">
-              <a:solidFill>
-                <a:srgbClr val="FF0000"/>
-              </a:solidFill>
-              <a:highlight>
-                <a:schemeClr val="dk1"/>
-              </a:highlight>
-              <a:latin typeface="Lexend Deca"/>
-              <a:ea typeface="Lexend Deca"/>
-              <a:cs typeface="Lexend Deca"/>
-              <a:sym typeface="Lexend Deca"/>
-            </a:endParaRPr>
-          </a:p>
-          <a:p>
-            <a:pPr indent="0" lvl="0" marL="0" rtl="0" algn="ctr">
-              <a:lnSpc>
-                <a:spcPct val="90000"/>
-              </a:lnSpc>
-              <a:spcBef>
-                <a:spcPts val="0"/>
-              </a:spcBef>
-              <a:spcAft>
-                <a:spcPts val="0"/>
-              </a:spcAft>
-              <a:buNone/>
-            </a:pPr>
-            <a:r>
-              <a:rPr b="1" lang="en" sz="2800">
-                <a:solidFill>
-                  <a:srgbClr val="FF0000"/>
-                </a:solidFill>
-                <a:highlight>
-                  <a:schemeClr val="dk1"/>
-                </a:highlight>
-                <a:latin typeface="Lexend Deca"/>
-                <a:ea typeface="Lexend Deca"/>
-                <a:cs typeface="Lexend Deca"/>
-                <a:sym typeface="Lexend Deca"/>
-              </a:rPr>
-              <a:t> 唱生日歌與享用生日蛋糕</a:t>
-            </a:r>
-            <a:endParaRPr/>
-          </a:p>
-        </p:txBody>
-      </p:sp>
-    </p:spTree>
-  </p:cSld>
-  <p:clrMapOvr>
-    <a:masterClrMapping/>
-  </p:clrMapOvr>
-</p:sld>
-</file>
-
-<file path=ppt/slides/slide43.xml><?xml version="1.0" encoding="utf-8"?>
-<p:sld xmlns:a="http://schemas.openxmlformats.org/drawingml/2006/main" xmlns:r="http://schemas.openxmlformats.org/officeDocument/2006/relationships" xmlns:mc="http://schemas.openxmlformats.org/markup-compatibility/2006" xmlns:mv="urn:schemas-microsoft-com:mac:vml" xmlns:p="http://schemas.openxmlformats.org/presentationml/2006/main" xmlns:c="http://schemas.openxmlformats.org/drawingml/2006/chart" xmlns:dgm="http://schemas.openxmlformats.org/drawingml/2006/diagram" xmlns:o="urn:schemas-microsoft-com:office:office" xmlns:v="urn:schemas-microsoft-com:vml" xmlns:pvml="urn:schemas-microsoft-com:office:powerpoint" xmlns:com="http://schemas.openxmlformats.org/drawingml/2006/compatibility" xmlns:p14="http://schemas.microsoft.com/office/powerpoint/2010/main" xmlns:p15="http://schemas.microsoft.com/office/powerpoint/2012/main" xmlns:ahyp="http://schemas.microsoft.com/office/drawing/2018/hyperlinkcolor" show="0">
-  <p:cSld>
-    <p:bg>
-      <p:bgPr>
-        <a:blipFill>
-          <a:blip r:embed="rId9003">
-            <a:alphaModFix/>
-          </a:blip>
-          <a:stretch>
-            <a:fillRect/>
-          </a:stretch>
-        </a:blipFill>
-      </p:bgPr>
-    </p:bg>
-    <p:spTree>
-      <p:nvGrpSpPr>
-        <p:cNvPr id="397" name="Shape 397"/>
-        <p:cNvGrpSpPr/>
-        <p:nvPr/>
-      </p:nvGrpSpPr>
-      <p:grpSpPr>
-        <a:xfrm>
-          <a:off x="0" y="0"/>
-          <a:ext cx="0" cy="0"/>
-          <a:chOff x="0" y="0"/>
-          <a:chExt cx="0" cy="0"/>
-        </a:xfrm>
-      </p:grpSpPr>
-      <p:sp>
-        <p:nvSpPr>
-          <p:cNvPr id="398" name="Google Shape;398;p67"/>
-          <p:cNvSpPr txBox="1"/>
-          <p:nvPr/>
-        </p:nvSpPr>
-        <p:spPr>
-          <a:xfrm>
-            <a:off x="0" y="0"/>
-            <a:ext cx="9144000" cy="892800"/>
-          </a:xfrm>
-          <a:prstGeom prst="rect">
-            <a:avLst/>
-          </a:prstGeom>
-          <a:noFill/>
-          <a:ln>
-            <a:noFill/>
-          </a:ln>
-        </p:spPr>
-        <p:txBody>
-          <a:bodyPr anchorCtr="0" anchor="t" bIns="91425" lIns="91425" spcFirstLastPara="1" rIns="91425" wrap="square" tIns="91425">
-            <a:spAutoFit/>
-          </a:bodyPr>
-          <a:lstStyle/>
-          <a:p>
-            <a:pPr indent="0" lvl="0" marL="0" rtl="0" algn="ctr">
-              <a:spcBef>
-                <a:spcPts val="0"/>
-              </a:spcBef>
-              <a:spcAft>
-                <a:spcPts val="0"/>
-              </a:spcAft>
-              <a:buNone/>
-            </a:pPr>
-            <a:r>
-              <a:rPr lang="en" sz="4600"/>
-              <a:t>  </a:t>
-            </a:r>
-            <a:r>
-              <a:rPr lang="en" sz="4600">
-                <a:solidFill>
-                  <a:srgbClr val="FF0000"/>
-                </a:solidFill>
-                <a:highlight>
-                  <a:srgbClr val="FFFF00"/>
-                </a:highlight>
-              </a:rPr>
-              <a:t>❤️</a:t>
-            </a:r>
-            <a:r>
-              <a:rPr b="1" lang="en" sz="3300">
-                <a:highlight>
-                  <a:srgbClr val="FFFF00"/>
-                </a:highlight>
-                <a:latin typeface="Lexend Deca"/>
-                <a:ea typeface="Lexend Deca"/>
-                <a:cs typeface="Lexend Deca"/>
-                <a:sym typeface="Lexend Deca"/>
-              </a:rPr>
-              <a:t>5月份生日的家人們</a:t>
-            </a:r>
-            <a:r>
-              <a:rPr lang="en" sz="4600">
-                <a:solidFill>
-                  <a:srgbClr val="FF0000"/>
-                </a:solidFill>
-                <a:highlight>
-                  <a:srgbClr val="FFFF00"/>
-                </a:highlight>
-              </a:rPr>
-              <a:t>❤️</a:t>
-            </a:r>
-            <a:r>
-              <a:rPr lang="en" sz="4600"/>
-              <a:t> </a:t>
-            </a:r>
-            <a:endParaRPr sz="4600">
-              <a:solidFill>
-                <a:srgbClr val="FF0000"/>
-              </a:solidFill>
-            </a:endParaRPr>
-          </a:p>
-        </p:txBody>
-      </p:sp>
-      <p:sp>
-        <p:nvSpPr>
-          <p:cNvPr id="399" name="Birthday Name 0"/>
-          <p:cNvSpPr txBox="1"/>
-          <p:nvPr/>
-        </p:nvSpPr>
-        <p:spPr>
-          <a:xfrm>
-            <a:off x="298800" y="920000"/>
-            <a:ext cx="8500000" cy="2800000"/>
-          </a:xfrm>
-          <a:prstGeom prst="rect">
-            <a:avLst/>
-          </a:prstGeom>
-          <a:noFill/>
-        </p:spPr>
-        <p:txBody>
-          <a:bodyPr wrap="none" anchor="ctr" lIns="45720" rIns="45720" tIns="0" bIns="0">
-            <a:noAutofit/>
-          </a:bodyPr>
-          <a:lstStyle/>
-          <a:p>
-            <a:pPr algn="ctr" fontAlgn="ctr">
-              <a:buNone/>
-            </a:pPr>
-            <a:r>
-              <a:rPr b="1" lang="en" sz="3600">
-                <a:solidFill>
-                  <a:srgbClr val="4C1130"/>
-                </a:solidFill>
-                <a:highlight>
-                  <a:schemeClr val="dk1"/>
-                </a:highlight>
-                <a:latin typeface="DFKai-SB"/>
-                <a:ea typeface="DFKai-SB"/>
-                <a:cs typeface="DFKai-SB"/>
-                <a:sym typeface="DFKai-SB"/>
-              </a:rPr>
-              <a:t xml:space="preserve"> </a:t>
-            </a:r>
-            <a:endParaRPr b="1" sz="3600"/>
-          </a:p>
-        </p:txBody>
-      </p:sp>
-      <p:sp>
-        <p:nvSpPr>
-          <p:cNvPr id="400" name="Google Shape;400;p67"/>
-          <p:cNvSpPr txBox="1"/>
-          <p:nvPr/>
-        </p:nvSpPr>
-        <p:spPr>
-          <a:xfrm>
-            <a:off x="0" y="2037522"/>
-            <a:ext cx="9144000" cy="400200"/>
-          </a:xfrm>
-          <a:prstGeom prst="rect">
-            <a:avLst/>
-          </a:prstGeom>
-          <a:noFill/>
-          <a:ln>
-            <a:noFill/>
-          </a:ln>
-        </p:spPr>
-        <p:txBody>
-          <a:bodyPr anchorCtr="0" anchor="t" bIns="91425" lIns="91425" spcFirstLastPara="1" rIns="91425" wrap="square" tIns="91425">
-            <a:spAutoFit/>
-          </a:bodyPr>
-          <a:lstStyle/>
-          <a:p>
-            <a:pPr indent="0" lvl="0" marL="0" rtl="0" algn="l">
-              <a:spcBef>
-                <a:spcPts val="0"/>
-              </a:spcBef>
-              <a:spcAft>
-                <a:spcPts val="0"/>
-              </a:spcAft>
-              <a:buNone/>
-            </a:pPr>
-            <a:r>
-              <a:t/>
-            </a:r>
-            <a:endParaRPr>
-              <a:latin typeface="Lato"/>
-              <a:ea typeface="Lato"/>
-              <a:cs typeface="Lato"/>
-              <a:sym typeface="Lato"/>
-            </a:endParaRPr>
-          </a:p>
-        </p:txBody>
-      </p:sp>
-      <p:sp>
-        <p:nvSpPr>
-          <p:cNvPr id="401" name="Google Shape;401;p67"/>
-          <p:cNvSpPr txBox="1"/>
-          <p:nvPr/>
-        </p:nvSpPr>
-        <p:spPr>
-          <a:xfrm>
-            <a:off x="228325" y="3894775"/>
-            <a:ext cx="4893900" cy="960600"/>
-          </a:xfrm>
-          <a:prstGeom prst="rect">
-            <a:avLst/>
-          </a:prstGeom>
-          <a:noFill/>
-          <a:ln>
-            <a:noFill/>
-          </a:ln>
-        </p:spPr>
-        <p:txBody>
-          <a:bodyPr anchorCtr="0" anchor="t" bIns="91425" lIns="91425" spcFirstLastPara="1" rIns="91425" wrap="square" tIns="91425">
-            <a:spAutoFit/>
-          </a:bodyPr>
-          <a:lstStyle/>
-          <a:p>
-            <a:pPr indent="0" lvl="0" marL="0" rtl="0" algn="ctr">
-              <a:lnSpc>
-                <a:spcPct val="90000"/>
-              </a:lnSpc>
-              <a:spcBef>
-                <a:spcPts val="0"/>
-              </a:spcBef>
-              <a:spcAft>
-                <a:spcPts val="0"/>
-              </a:spcAft>
-              <a:buNone/>
-            </a:pPr>
-            <a:r>
-              <a:rPr b="1" lang="en" sz="2800">
-                <a:solidFill>
-                  <a:srgbClr val="FF0000"/>
-                </a:solidFill>
-                <a:highlight>
-                  <a:schemeClr val="dk1"/>
-                </a:highlight>
-                <a:latin typeface="Lexend Deca"/>
-                <a:ea typeface="Lexend Deca"/>
-                <a:cs typeface="Lexend Deca"/>
-                <a:sym typeface="Lexend Deca"/>
-              </a:rPr>
-              <a:t>我們將在午餐聚會時禱告祝福</a:t>
-            </a:r>
-            <a:endParaRPr b="1" sz="2800">
-              <a:solidFill>
-                <a:srgbClr val="FF0000"/>
-              </a:solidFill>
-              <a:highlight>
-                <a:schemeClr val="dk1"/>
-              </a:highlight>
-              <a:latin typeface="Lexend Deca"/>
-              <a:ea typeface="Lexend Deca"/>
-              <a:cs typeface="Lexend Deca"/>
-              <a:sym typeface="Lexend Deca"/>
-            </a:endParaRPr>
-          </a:p>
-          <a:p>
-            <a:pPr indent="0" lvl="0" marL="0" rtl="0" algn="ctr">
-              <a:lnSpc>
-                <a:spcPct val="90000"/>
-              </a:lnSpc>
-              <a:spcBef>
-                <a:spcPts val="0"/>
-              </a:spcBef>
-              <a:spcAft>
-                <a:spcPts val="0"/>
-              </a:spcAft>
-              <a:buNone/>
-            </a:pPr>
-            <a:r>
-              <a:rPr b="1" lang="en" sz="2800">
-                <a:solidFill>
-                  <a:srgbClr val="FF0000"/>
-                </a:solidFill>
-                <a:highlight>
-                  <a:schemeClr val="dk1"/>
-                </a:highlight>
-                <a:latin typeface="Lexend Deca"/>
-                <a:ea typeface="Lexend Deca"/>
-                <a:cs typeface="Lexend Deca"/>
-                <a:sym typeface="Lexend Deca"/>
-              </a:rPr>
-              <a:t> 唱生日歌與享用生日蛋糕</a:t>
-            </a:r>
-            <a:endParaRPr/>
-          </a:p>
-        </p:txBody>
-      </p:sp>
-    </p:spTree>
-  </p:cSld>
-  <p:clrMapOvr>
-    <a:masterClrMapping/>
-  </p:clrMapOvr>
-</p:sld>
-</file>
-
-<file path=ppt/slides/slide44.xml><?xml version="1.0" encoding="utf-8"?>
-<p:sld xmlns:a="http://schemas.openxmlformats.org/drawingml/2006/main" xmlns:r="http://schemas.openxmlformats.org/officeDocument/2006/relationships" xmlns:mc="http://schemas.openxmlformats.org/markup-compatibility/2006" xmlns:mv="urn:schemas-microsoft-com:mac:vml" xmlns:p="http://schemas.openxmlformats.org/presentationml/2006/main" xmlns:c="http://schemas.openxmlformats.org/drawingml/2006/chart" xmlns:dgm="http://schemas.openxmlformats.org/drawingml/2006/diagram" xmlns:o="urn:schemas-microsoft-com:office:office" xmlns:v="urn:schemas-microsoft-com:vml" xmlns:pvml="urn:schemas-microsoft-com:office:powerpoint" xmlns:com="http://schemas.openxmlformats.org/drawingml/2006/compatibility" xmlns:p14="http://schemas.microsoft.com/office/powerpoint/2010/main" xmlns:p15="http://schemas.microsoft.com/office/powerpoint/2012/main" xmlns:ahyp="http://schemas.microsoft.com/office/drawing/2018/hyperlinkcolor" show="0">
-  <p:cSld>
-    <p:bg>
-      <p:bgPr>
-        <a:blipFill>
-          <a:blip r:embed="rId9003">
-            <a:alphaModFix/>
-          </a:blip>
-          <a:stretch>
-            <a:fillRect/>
-          </a:stretch>
-        </a:blipFill>
-      </p:bgPr>
-    </p:bg>
-    <p:spTree>
-      <p:nvGrpSpPr>
-        <p:cNvPr id="397" name="Shape 397"/>
-        <p:cNvGrpSpPr/>
-        <p:nvPr/>
-      </p:nvGrpSpPr>
-      <p:grpSpPr>
-        <a:xfrm>
-          <a:off x="0" y="0"/>
-          <a:ext cx="0" cy="0"/>
-          <a:chOff x="0" y="0"/>
-          <a:chExt cx="0" cy="0"/>
-        </a:xfrm>
-      </p:grpSpPr>
-      <p:sp>
-        <p:nvSpPr>
-          <p:cNvPr id="398" name="Google Shape;398;p67"/>
-          <p:cNvSpPr txBox="1"/>
-          <p:nvPr/>
-        </p:nvSpPr>
-        <p:spPr>
-          <a:xfrm>
-            <a:off x="0" y="0"/>
-            <a:ext cx="9144000" cy="892800"/>
-          </a:xfrm>
-          <a:prstGeom prst="rect">
-            <a:avLst/>
-          </a:prstGeom>
-          <a:noFill/>
-          <a:ln>
-            <a:noFill/>
-          </a:ln>
-        </p:spPr>
-        <p:txBody>
-          <a:bodyPr anchorCtr="0" anchor="t" bIns="91425" lIns="91425" spcFirstLastPara="1" rIns="91425" wrap="square" tIns="91425">
-            <a:spAutoFit/>
-          </a:bodyPr>
-          <a:lstStyle/>
-          <a:p>
-            <a:pPr indent="0" lvl="0" marL="0" rtl="0" algn="ctr">
-              <a:spcBef>
-                <a:spcPts val="0"/>
-              </a:spcBef>
-              <a:spcAft>
-                <a:spcPts val="0"/>
-              </a:spcAft>
-              <a:buNone/>
-            </a:pPr>
-            <a:r>
-              <a:rPr lang="en" sz="4600"/>
-              <a:t>  </a:t>
-            </a:r>
-            <a:r>
-              <a:rPr lang="en" sz="4600">
-                <a:solidFill>
-                  <a:srgbClr val="FF0000"/>
-                </a:solidFill>
-                <a:highlight>
-                  <a:srgbClr val="FFFF00"/>
-                </a:highlight>
-              </a:rPr>
-              <a:t>❤️</a:t>
-            </a:r>
-            <a:r>
-              <a:rPr b="1" lang="en" sz="3300">
-                <a:highlight>
-                  <a:srgbClr val="FFFF00"/>
-                </a:highlight>
-                <a:latin typeface="Lexend Deca"/>
-                <a:ea typeface="Lexend Deca"/>
-                <a:cs typeface="Lexend Deca"/>
-                <a:sym typeface="Lexend Deca"/>
-              </a:rPr>
-              <a:t>6月份生日的家人們</a:t>
-            </a:r>
-            <a:r>
-              <a:rPr lang="en" sz="4600">
-                <a:solidFill>
-                  <a:srgbClr val="FF0000"/>
-                </a:solidFill>
-                <a:highlight>
-                  <a:srgbClr val="FFFF00"/>
-                </a:highlight>
-              </a:rPr>
-              <a:t>❤️</a:t>
-            </a:r>
-            <a:r>
-              <a:rPr lang="en" sz="4600"/>
-              <a:t> </a:t>
-            </a:r>
-            <a:endParaRPr sz="4600">
-              <a:solidFill>
-                <a:srgbClr val="FF0000"/>
-              </a:solidFill>
-            </a:endParaRPr>
-          </a:p>
-        </p:txBody>
-      </p:sp>
-      <p:sp>
-        <p:nvSpPr>
-          <p:cNvPr id="399" name="Birthday Name 0"/>
-          <p:cNvSpPr txBox="1"/>
-          <p:nvPr/>
-        </p:nvSpPr>
-        <p:spPr>
-          <a:xfrm>
-            <a:off x="298800" y="920000"/>
-            <a:ext cx="8500000" cy="2800000"/>
-          </a:xfrm>
-          <a:prstGeom prst="rect">
-            <a:avLst/>
-          </a:prstGeom>
-          <a:noFill/>
-        </p:spPr>
-        <p:txBody>
-          <a:bodyPr wrap="none" anchor="ctr" lIns="45720" rIns="45720" tIns="0" bIns="0">
-            <a:noAutofit/>
-          </a:bodyPr>
-          <a:lstStyle/>
-          <a:p>
-            <a:pPr algn="ctr" fontAlgn="ctr">
-              <a:buNone/>
-            </a:pPr>
-            <a:r>
-              <a:rPr b="1" lang="en" sz="3600">
-                <a:solidFill>
-                  <a:srgbClr val="4C1130"/>
-                </a:solidFill>
-                <a:highlight>
-                  <a:schemeClr val="dk1"/>
-                </a:highlight>
-                <a:latin typeface="DFKai-SB"/>
-                <a:ea typeface="DFKai-SB"/>
-                <a:cs typeface="DFKai-SB"/>
-                <a:sym typeface="DFKai-SB"/>
-              </a:rPr>
-              <a:t xml:space="preserve"> </a:t>
-            </a:r>
-            <a:endParaRPr b="1" sz="3600"/>
-          </a:p>
-        </p:txBody>
-      </p:sp>
-      <p:sp>
-        <p:nvSpPr>
-          <p:cNvPr id="400" name="Google Shape;400;p67"/>
-          <p:cNvSpPr txBox="1"/>
-          <p:nvPr/>
-        </p:nvSpPr>
-        <p:spPr>
-          <a:xfrm>
-            <a:off x="0" y="2037522"/>
-            <a:ext cx="9144000" cy="400200"/>
-          </a:xfrm>
-          <a:prstGeom prst="rect">
-            <a:avLst/>
-          </a:prstGeom>
-          <a:noFill/>
-          <a:ln>
-            <a:noFill/>
-          </a:ln>
-        </p:spPr>
-        <p:txBody>
-          <a:bodyPr anchorCtr="0" anchor="t" bIns="91425" lIns="91425" spcFirstLastPara="1" rIns="91425" wrap="square" tIns="91425">
-            <a:spAutoFit/>
-          </a:bodyPr>
-          <a:lstStyle/>
-          <a:p>
-            <a:pPr indent="0" lvl="0" marL="0" rtl="0" algn="l">
-              <a:spcBef>
-                <a:spcPts val="0"/>
-              </a:spcBef>
-              <a:spcAft>
-                <a:spcPts val="0"/>
-              </a:spcAft>
-              <a:buNone/>
-            </a:pPr>
-            <a:r>
-              <a:t/>
-            </a:r>
-            <a:endParaRPr>
-              <a:latin typeface="Lato"/>
-              <a:ea typeface="Lato"/>
-              <a:cs typeface="Lato"/>
-              <a:sym typeface="Lato"/>
-            </a:endParaRPr>
-          </a:p>
-        </p:txBody>
-      </p:sp>
-      <p:sp>
-        <p:nvSpPr>
-          <p:cNvPr id="401" name="Google Shape;401;p67"/>
-          <p:cNvSpPr txBox="1"/>
-          <p:nvPr/>
-        </p:nvSpPr>
-        <p:spPr>
-          <a:xfrm>
-            <a:off x="228325" y="3894775"/>
-            <a:ext cx="4893900" cy="960600"/>
-          </a:xfrm>
-          <a:prstGeom prst="rect">
-            <a:avLst/>
-          </a:prstGeom>
-          <a:noFill/>
-          <a:ln>
-            <a:noFill/>
-          </a:ln>
-        </p:spPr>
-        <p:txBody>
-          <a:bodyPr anchorCtr="0" anchor="t" bIns="91425" lIns="91425" spcFirstLastPara="1" rIns="91425" wrap="square" tIns="91425">
-            <a:spAutoFit/>
-          </a:bodyPr>
-          <a:lstStyle/>
-          <a:p>
-            <a:pPr indent="0" lvl="0" marL="0" rtl="0" algn="ctr">
-              <a:lnSpc>
-                <a:spcPct val="90000"/>
-              </a:lnSpc>
-              <a:spcBef>
-                <a:spcPts val="0"/>
-              </a:spcBef>
-              <a:spcAft>
-                <a:spcPts val="0"/>
-              </a:spcAft>
-              <a:buNone/>
-            </a:pPr>
-            <a:r>
-              <a:rPr b="1" lang="en" sz="2800">
-                <a:solidFill>
-                  <a:srgbClr val="FF0000"/>
-                </a:solidFill>
-                <a:highlight>
-                  <a:schemeClr val="dk1"/>
-                </a:highlight>
-                <a:latin typeface="Lexend Deca"/>
-                <a:ea typeface="Lexend Deca"/>
-                <a:cs typeface="Lexend Deca"/>
-                <a:sym typeface="Lexend Deca"/>
-              </a:rPr>
-              <a:t>我們將在午餐聚會時禱告祝福</a:t>
-            </a:r>
-            <a:endParaRPr b="1" sz="2800">
-              <a:solidFill>
-                <a:srgbClr val="FF0000"/>
-              </a:solidFill>
-              <a:highlight>
-                <a:schemeClr val="dk1"/>
-              </a:highlight>
-              <a:latin typeface="Lexend Deca"/>
-              <a:ea typeface="Lexend Deca"/>
-              <a:cs typeface="Lexend Deca"/>
-              <a:sym typeface="Lexend Deca"/>
-            </a:endParaRPr>
-          </a:p>
-          <a:p>
-            <a:pPr indent="0" lvl="0" marL="0" rtl="0" algn="ctr">
-              <a:lnSpc>
-                <a:spcPct val="90000"/>
-              </a:lnSpc>
-              <a:spcBef>
-                <a:spcPts val="0"/>
-              </a:spcBef>
-              <a:spcAft>
-                <a:spcPts val="0"/>
-              </a:spcAft>
-              <a:buNone/>
-            </a:pPr>
-            <a:r>
-              <a:rPr b="1" lang="en" sz="2800">
-                <a:solidFill>
-                  <a:srgbClr val="FF0000"/>
-                </a:solidFill>
-                <a:highlight>
-                  <a:schemeClr val="dk1"/>
-                </a:highlight>
-                <a:latin typeface="Lexend Deca"/>
-                <a:ea typeface="Lexend Deca"/>
-                <a:cs typeface="Lexend Deca"/>
-                <a:sym typeface="Lexend Deca"/>
-              </a:rPr>
-              <a:t> 唱生日歌與享用生日蛋糕</a:t>
-            </a:r>
-            <a:endParaRPr/>
-          </a:p>
-        </p:txBody>
-      </p:sp>
-    </p:spTree>
-  </p:cSld>
-  <p:clrMapOvr>
-    <a:masterClrMapping/>
-  </p:clrMapOvr>
-</p:sld>
-</file>
-
-<file path=ppt/slides/slide45.xml><?xml version="1.0" encoding="utf-8"?>
-<p:sld xmlns:a="http://schemas.openxmlformats.org/drawingml/2006/main" xmlns:r="http://schemas.openxmlformats.org/officeDocument/2006/relationships" xmlns:mc="http://schemas.openxmlformats.org/markup-compatibility/2006" xmlns:mv="urn:schemas-microsoft-com:mac:vml" xmlns:p="http://schemas.openxmlformats.org/presentationml/2006/main" xmlns:c="http://schemas.openxmlformats.org/drawingml/2006/chart" xmlns:dgm="http://schemas.openxmlformats.org/drawingml/2006/diagram" xmlns:o="urn:schemas-microsoft-com:office:office" xmlns:v="urn:schemas-microsoft-com:vml" xmlns:pvml="urn:schemas-microsoft-com:office:powerpoint" xmlns:com="http://schemas.openxmlformats.org/drawingml/2006/compatibility" xmlns:p14="http://schemas.microsoft.com/office/powerpoint/2010/main" xmlns:p15="http://schemas.microsoft.com/office/powerpoint/2012/main" xmlns:ahyp="http://schemas.microsoft.com/office/drawing/2018/hyperlinkcolor" show="0">
-  <p:cSld>
-    <p:bg>
-      <p:bgPr>
-        <a:blipFill>
-          <a:blip r:embed="rId9003">
-            <a:alphaModFix/>
-          </a:blip>
-          <a:stretch>
-            <a:fillRect/>
-          </a:stretch>
-        </a:blipFill>
-      </p:bgPr>
-    </p:bg>
-    <p:spTree>
-      <p:nvGrpSpPr>
-        <p:cNvPr id="397" name="Shape 397"/>
-        <p:cNvGrpSpPr/>
-        <p:nvPr/>
-      </p:nvGrpSpPr>
-      <p:grpSpPr>
-        <a:xfrm>
-          <a:off x="0" y="0"/>
-          <a:ext cx="0" cy="0"/>
-          <a:chOff x="0" y="0"/>
-          <a:chExt cx="0" cy="0"/>
-        </a:xfrm>
-      </p:grpSpPr>
-      <p:sp>
-        <p:nvSpPr>
-          <p:cNvPr id="398" name="Google Shape;398;p67"/>
-          <p:cNvSpPr txBox="1"/>
-          <p:nvPr/>
-        </p:nvSpPr>
-        <p:spPr>
-          <a:xfrm>
-            <a:off x="0" y="0"/>
-            <a:ext cx="9144000" cy="892800"/>
-          </a:xfrm>
-          <a:prstGeom prst="rect">
-            <a:avLst/>
-          </a:prstGeom>
-          <a:noFill/>
-          <a:ln>
-            <a:noFill/>
-          </a:ln>
-        </p:spPr>
-        <p:txBody>
-          <a:bodyPr anchorCtr="0" anchor="t" bIns="91425" lIns="91425" spcFirstLastPara="1" rIns="91425" wrap="square" tIns="91425">
-            <a:spAutoFit/>
-          </a:bodyPr>
-          <a:lstStyle/>
-          <a:p>
-            <a:pPr indent="0" lvl="0" marL="0" rtl="0" algn="ctr">
-              <a:spcBef>
-                <a:spcPts val="0"/>
-              </a:spcBef>
-              <a:spcAft>
-                <a:spcPts val="0"/>
-              </a:spcAft>
-              <a:buNone/>
-            </a:pPr>
-            <a:r>
-              <a:rPr lang="en" sz="4600"/>
-              <a:t>  </a:t>
-            </a:r>
-            <a:r>
-              <a:rPr lang="en" sz="4600">
-                <a:solidFill>
-                  <a:srgbClr val="FF0000"/>
-                </a:solidFill>
-                <a:highlight>
-                  <a:srgbClr val="FFFF00"/>
-                </a:highlight>
-              </a:rPr>
-              <a:t>❤️</a:t>
-            </a:r>
-            <a:r>
-              <a:rPr b="1" lang="en" sz="3300">
-                <a:highlight>
-                  <a:srgbClr val="FFFF00"/>
-                </a:highlight>
-                <a:latin typeface="Lexend Deca"/>
-                <a:ea typeface="Lexend Deca"/>
-                <a:cs typeface="Lexend Deca"/>
-                <a:sym typeface="Lexend Deca"/>
-              </a:rPr>
-              <a:t>7月份生日的家人們</a:t>
-            </a:r>
-            <a:r>
-              <a:rPr lang="en" sz="4600">
-                <a:solidFill>
-                  <a:srgbClr val="FF0000"/>
-                </a:solidFill>
-                <a:highlight>
-                  <a:srgbClr val="FFFF00"/>
-                </a:highlight>
-              </a:rPr>
-              <a:t>❤️</a:t>
-            </a:r>
-            <a:r>
-              <a:rPr lang="en" sz="4600"/>
-              <a:t> </a:t>
-            </a:r>
-            <a:endParaRPr sz="4600">
-              <a:solidFill>
-                <a:srgbClr val="FF0000"/>
-              </a:solidFill>
-            </a:endParaRPr>
-          </a:p>
-        </p:txBody>
-      </p:sp>
-      <p:sp>
-        <p:nvSpPr>
-          <p:cNvPr id="399" name="Birthday Name 0"/>
-          <p:cNvSpPr txBox="1"/>
-          <p:nvPr/>
-        </p:nvSpPr>
-        <p:spPr>
-          <a:xfrm>
-            <a:off x="298800" y="920000"/>
-            <a:ext cx="8500000" cy="2800000"/>
-          </a:xfrm>
-          <a:prstGeom prst="rect">
-            <a:avLst/>
-          </a:prstGeom>
-          <a:noFill/>
-        </p:spPr>
-        <p:txBody>
-          <a:bodyPr wrap="none" anchor="ctr" lIns="45720" rIns="45720" tIns="0" bIns="0">
-            <a:noAutofit/>
-          </a:bodyPr>
-          <a:lstStyle/>
-          <a:p>
-            <a:pPr algn="ctr" fontAlgn="ctr">
-              <a:buNone/>
-            </a:pPr>
-            <a:r>
-              <a:rPr b="1" lang="en" sz="3600">
-                <a:solidFill>
-                  <a:srgbClr val="4C1130"/>
-                </a:solidFill>
-                <a:highlight>
-                  <a:schemeClr val="dk1"/>
-                </a:highlight>
-                <a:latin typeface="DFKai-SB"/>
-                <a:ea typeface="DFKai-SB"/>
-                <a:cs typeface="DFKai-SB"/>
-                <a:sym typeface="DFKai-SB"/>
-              </a:rPr>
-              <a:t xml:space="preserve"> </a:t>
-            </a:r>
-            <a:endParaRPr b="1" sz="3600"/>
-          </a:p>
-        </p:txBody>
-      </p:sp>
-      <p:sp>
-        <p:nvSpPr>
-          <p:cNvPr id="400" name="Google Shape;400;p67"/>
-          <p:cNvSpPr txBox="1"/>
-          <p:nvPr/>
-        </p:nvSpPr>
-        <p:spPr>
-          <a:xfrm>
-            <a:off x="0" y="2037522"/>
-            <a:ext cx="9144000" cy="400200"/>
-          </a:xfrm>
-          <a:prstGeom prst="rect">
-            <a:avLst/>
-          </a:prstGeom>
-          <a:noFill/>
-          <a:ln>
-            <a:noFill/>
-          </a:ln>
-        </p:spPr>
-        <p:txBody>
-          <a:bodyPr anchorCtr="0" anchor="t" bIns="91425" lIns="91425" spcFirstLastPara="1" rIns="91425" wrap="square" tIns="91425">
-            <a:spAutoFit/>
-          </a:bodyPr>
-          <a:lstStyle/>
-          <a:p>
-            <a:pPr indent="0" lvl="0" marL="0" rtl="0" algn="l">
-              <a:spcBef>
-                <a:spcPts val="0"/>
-              </a:spcBef>
-              <a:spcAft>
-                <a:spcPts val="0"/>
-              </a:spcAft>
-              <a:buNone/>
-            </a:pPr>
-            <a:r>
-              <a:t/>
-            </a:r>
-            <a:endParaRPr>
-              <a:latin typeface="Lato"/>
-              <a:ea typeface="Lato"/>
-              <a:cs typeface="Lato"/>
-              <a:sym typeface="Lato"/>
-            </a:endParaRPr>
-          </a:p>
-        </p:txBody>
-      </p:sp>
-      <p:sp>
-        <p:nvSpPr>
-          <p:cNvPr id="401" name="Google Shape;401;p67"/>
-          <p:cNvSpPr txBox="1"/>
-          <p:nvPr/>
-        </p:nvSpPr>
-        <p:spPr>
-          <a:xfrm>
-            <a:off x="228325" y="3894775"/>
-            <a:ext cx="4893900" cy="960600"/>
-          </a:xfrm>
-          <a:prstGeom prst="rect">
-            <a:avLst/>
-          </a:prstGeom>
-          <a:noFill/>
-          <a:ln>
-            <a:noFill/>
-          </a:ln>
-        </p:spPr>
-        <p:txBody>
-          <a:bodyPr anchorCtr="0" anchor="t" bIns="91425" lIns="91425" spcFirstLastPara="1" rIns="91425" wrap="square" tIns="91425">
-            <a:spAutoFit/>
-          </a:bodyPr>
-          <a:lstStyle/>
-          <a:p>
-            <a:pPr indent="0" lvl="0" marL="0" rtl="0" algn="ctr">
-              <a:lnSpc>
-                <a:spcPct val="90000"/>
-              </a:lnSpc>
-              <a:spcBef>
-                <a:spcPts val="0"/>
-              </a:spcBef>
-              <a:spcAft>
-                <a:spcPts val="0"/>
-              </a:spcAft>
-              <a:buNone/>
-            </a:pPr>
-            <a:r>
-              <a:rPr b="1" lang="en" sz="2800">
-                <a:solidFill>
-                  <a:srgbClr val="FF0000"/>
-                </a:solidFill>
-                <a:highlight>
-                  <a:schemeClr val="dk1"/>
-                </a:highlight>
-                <a:latin typeface="Lexend Deca"/>
-                <a:ea typeface="Lexend Deca"/>
-                <a:cs typeface="Lexend Deca"/>
-                <a:sym typeface="Lexend Deca"/>
-              </a:rPr>
-              <a:t>我們將在午餐聚會時禱告祝福</a:t>
-            </a:r>
-            <a:endParaRPr b="1" sz="2800">
-              <a:solidFill>
-                <a:srgbClr val="FF0000"/>
-              </a:solidFill>
-              <a:highlight>
-                <a:schemeClr val="dk1"/>
-              </a:highlight>
-              <a:latin typeface="Lexend Deca"/>
-              <a:ea typeface="Lexend Deca"/>
-              <a:cs typeface="Lexend Deca"/>
-              <a:sym typeface="Lexend Deca"/>
-            </a:endParaRPr>
-          </a:p>
-          <a:p>
-            <a:pPr indent="0" lvl="0" marL="0" rtl="0" algn="ctr">
-              <a:lnSpc>
-                <a:spcPct val="90000"/>
-              </a:lnSpc>
-              <a:spcBef>
-                <a:spcPts val="0"/>
-              </a:spcBef>
-              <a:spcAft>
-                <a:spcPts val="0"/>
-              </a:spcAft>
-              <a:buNone/>
-            </a:pPr>
-            <a:r>
-              <a:rPr b="1" lang="en" sz="2800">
-                <a:solidFill>
-                  <a:srgbClr val="FF0000"/>
-                </a:solidFill>
-                <a:highlight>
-                  <a:schemeClr val="dk1"/>
-                </a:highlight>
-                <a:latin typeface="Lexend Deca"/>
-                <a:ea typeface="Lexend Deca"/>
-                <a:cs typeface="Lexend Deca"/>
-                <a:sym typeface="Lexend Deca"/>
-              </a:rPr>
-              <a:t> 唱生日歌與享用生日蛋糕</a:t>
-            </a:r>
-            <a:endParaRPr/>
-          </a:p>
-        </p:txBody>
-      </p:sp>
-    </p:spTree>
-  </p:cSld>
-  <p:clrMapOvr>
-    <a:masterClrMapping/>
-  </p:clrMapOvr>
-</p:sld>
-</file>
-
-<file path=ppt/slides/slide46.xml><?xml version="1.0" encoding="utf-8"?>
-<p:sld xmlns:a="http://schemas.openxmlformats.org/drawingml/2006/main" xmlns:r="http://schemas.openxmlformats.org/officeDocument/2006/relationships" xmlns:mc="http://schemas.openxmlformats.org/markup-compatibility/2006" xmlns:mv="urn:schemas-microsoft-com:mac:vml" xmlns:p="http://schemas.openxmlformats.org/presentationml/2006/main" xmlns:c="http://schemas.openxmlformats.org/drawingml/2006/chart" xmlns:dgm="http://schemas.openxmlformats.org/drawingml/2006/diagram" xmlns:o="urn:schemas-microsoft-com:office:office" xmlns:v="urn:schemas-microsoft-com:vml" xmlns:pvml="urn:schemas-microsoft-com:office:powerpoint" xmlns:com="http://schemas.openxmlformats.org/drawingml/2006/compatibility" xmlns:p14="http://schemas.microsoft.com/office/powerpoint/2010/main" xmlns:p15="http://schemas.microsoft.com/office/powerpoint/2012/main" xmlns:ahyp="http://schemas.microsoft.com/office/drawing/2018/hyperlinkcolor" show="0">
-  <p:cSld>
-    <p:bg>
-      <p:bgPr>
-        <a:blipFill>
-          <a:blip r:embed="rId9003">
-            <a:alphaModFix/>
-          </a:blip>
-          <a:stretch>
-            <a:fillRect/>
-          </a:stretch>
-        </a:blipFill>
-      </p:bgPr>
-    </p:bg>
-    <p:spTree>
-      <p:nvGrpSpPr>
-        <p:cNvPr id="397" name="Shape 397"/>
-        <p:cNvGrpSpPr/>
-        <p:nvPr/>
-      </p:nvGrpSpPr>
-      <p:grpSpPr>
-        <a:xfrm>
-          <a:off x="0" y="0"/>
-          <a:ext cx="0" cy="0"/>
-          <a:chOff x="0" y="0"/>
-          <a:chExt cx="0" cy="0"/>
-        </a:xfrm>
-      </p:grpSpPr>
-      <p:sp>
-        <p:nvSpPr>
-          <p:cNvPr id="398" name="Google Shape;398;p67"/>
-          <p:cNvSpPr txBox="1"/>
-          <p:nvPr/>
-        </p:nvSpPr>
-        <p:spPr>
-          <a:xfrm>
-            <a:off x="0" y="0"/>
-            <a:ext cx="9144000" cy="892800"/>
-          </a:xfrm>
-          <a:prstGeom prst="rect">
-            <a:avLst/>
-          </a:prstGeom>
-          <a:noFill/>
-          <a:ln>
-            <a:noFill/>
-          </a:ln>
-        </p:spPr>
-        <p:txBody>
-          <a:bodyPr anchorCtr="0" anchor="t" bIns="91425" lIns="91425" spcFirstLastPara="1" rIns="91425" wrap="square" tIns="91425">
-            <a:spAutoFit/>
-          </a:bodyPr>
-          <a:lstStyle/>
-          <a:p>
-            <a:pPr indent="0" lvl="0" marL="0" rtl="0" algn="ctr">
-              <a:spcBef>
-                <a:spcPts val="0"/>
-              </a:spcBef>
-              <a:spcAft>
-                <a:spcPts val="0"/>
-              </a:spcAft>
-              <a:buNone/>
-            </a:pPr>
-            <a:r>
-              <a:rPr lang="en" sz="4600"/>
-              <a:t>  </a:t>
-            </a:r>
-            <a:r>
-              <a:rPr lang="en" sz="4600">
-                <a:solidFill>
-                  <a:srgbClr val="FF0000"/>
-                </a:solidFill>
-                <a:highlight>
-                  <a:srgbClr val="FFFF00"/>
-                </a:highlight>
-              </a:rPr>
-              <a:t>❤️</a:t>
-            </a:r>
-            <a:r>
-              <a:rPr b="1" lang="en" sz="3300">
-                <a:highlight>
-                  <a:srgbClr val="FFFF00"/>
-                </a:highlight>
-                <a:latin typeface="Lexend Deca"/>
-                <a:ea typeface="Lexend Deca"/>
-                <a:cs typeface="Lexend Deca"/>
-                <a:sym typeface="Lexend Deca"/>
-              </a:rPr>
-              <a:t>8月份生日的家人們</a:t>
-            </a:r>
-            <a:r>
-              <a:rPr lang="en" sz="4600">
-                <a:solidFill>
-                  <a:srgbClr val="FF0000"/>
-                </a:solidFill>
-                <a:highlight>
-                  <a:srgbClr val="FFFF00"/>
-                </a:highlight>
-              </a:rPr>
-              <a:t>❤️</a:t>
-            </a:r>
-            <a:r>
-              <a:rPr lang="en" sz="4600"/>
-              <a:t> </a:t>
-            </a:r>
-            <a:endParaRPr sz="4600">
-              <a:solidFill>
-                <a:srgbClr val="FF0000"/>
-              </a:solidFill>
-            </a:endParaRPr>
-          </a:p>
-        </p:txBody>
-      </p:sp>
-      <p:sp>
-        <p:nvSpPr>
-          <p:cNvPr id="399" name="Birthday Name 0"/>
-          <p:cNvSpPr txBox="1"/>
-          <p:nvPr/>
-        </p:nvSpPr>
-        <p:spPr>
-          <a:xfrm>
-            <a:off x="298800" y="920000"/>
-            <a:ext cx="8500000" cy="2800000"/>
-          </a:xfrm>
-          <a:prstGeom prst="rect">
-            <a:avLst/>
-          </a:prstGeom>
-          <a:noFill/>
-        </p:spPr>
-        <p:txBody>
-          <a:bodyPr wrap="none" anchor="ctr" lIns="45720" rIns="45720" tIns="0" bIns="0">
-            <a:noAutofit/>
-          </a:bodyPr>
-          <a:lstStyle/>
-          <a:p>
-            <a:pPr algn="ctr" fontAlgn="ctr">
-              <a:buNone/>
-            </a:pPr>
-            <a:r>
-              <a:rPr b="1" lang="en" sz="3600">
-                <a:solidFill>
-                  <a:srgbClr val="4C1130"/>
-                </a:solidFill>
-                <a:highlight>
-                  <a:schemeClr val="dk1"/>
-                </a:highlight>
-                <a:latin typeface="DFKai-SB"/>
-                <a:ea typeface="DFKai-SB"/>
-                <a:cs typeface="DFKai-SB"/>
-                <a:sym typeface="DFKai-SB"/>
-              </a:rPr>
-              <a:t xml:space="preserve"> </a:t>
-            </a:r>
-            <a:endParaRPr b="1" sz="3600"/>
-          </a:p>
-        </p:txBody>
-      </p:sp>
-      <p:sp>
-        <p:nvSpPr>
-          <p:cNvPr id="400" name="Google Shape;400;p67"/>
-          <p:cNvSpPr txBox="1"/>
-          <p:nvPr/>
-        </p:nvSpPr>
-        <p:spPr>
-          <a:xfrm>
-            <a:off x="0" y="2037522"/>
-            <a:ext cx="9144000" cy="400200"/>
-          </a:xfrm>
-          <a:prstGeom prst="rect">
-            <a:avLst/>
-          </a:prstGeom>
-          <a:noFill/>
-          <a:ln>
-            <a:noFill/>
-          </a:ln>
-        </p:spPr>
-        <p:txBody>
-          <a:bodyPr anchorCtr="0" anchor="t" bIns="91425" lIns="91425" spcFirstLastPara="1" rIns="91425" wrap="square" tIns="91425">
-            <a:spAutoFit/>
-          </a:bodyPr>
-          <a:lstStyle/>
-          <a:p>
-            <a:pPr indent="0" lvl="0" marL="0" rtl="0" algn="l">
-              <a:spcBef>
-                <a:spcPts val="0"/>
-              </a:spcBef>
-              <a:spcAft>
-                <a:spcPts val="0"/>
-              </a:spcAft>
-              <a:buNone/>
-            </a:pPr>
-            <a:r>
-              <a:t/>
-            </a:r>
-            <a:endParaRPr>
-              <a:latin typeface="Lato"/>
-              <a:ea typeface="Lato"/>
-              <a:cs typeface="Lato"/>
-              <a:sym typeface="Lato"/>
-            </a:endParaRPr>
-          </a:p>
-        </p:txBody>
-      </p:sp>
-      <p:sp>
-        <p:nvSpPr>
-          <p:cNvPr id="401" name="Google Shape;401;p67"/>
-          <p:cNvSpPr txBox="1"/>
-          <p:nvPr/>
-        </p:nvSpPr>
-        <p:spPr>
-          <a:xfrm>
-            <a:off x="228325" y="3894775"/>
-            <a:ext cx="4893900" cy="960600"/>
-          </a:xfrm>
-          <a:prstGeom prst="rect">
-            <a:avLst/>
-          </a:prstGeom>
-          <a:noFill/>
-          <a:ln>
-            <a:noFill/>
-          </a:ln>
-        </p:spPr>
-        <p:txBody>
-          <a:bodyPr anchorCtr="0" anchor="t" bIns="91425" lIns="91425" spcFirstLastPara="1" rIns="91425" wrap="square" tIns="91425">
-            <a:spAutoFit/>
-          </a:bodyPr>
-          <a:lstStyle/>
-          <a:p>
-            <a:pPr indent="0" lvl="0" marL="0" rtl="0" algn="ctr">
-              <a:lnSpc>
-                <a:spcPct val="90000"/>
-              </a:lnSpc>
-              <a:spcBef>
-                <a:spcPts val="0"/>
-              </a:spcBef>
-              <a:spcAft>
-                <a:spcPts val="0"/>
-              </a:spcAft>
-              <a:buNone/>
-            </a:pPr>
-            <a:r>
-              <a:rPr b="1" lang="en" sz="2800">
-                <a:solidFill>
-                  <a:srgbClr val="FF0000"/>
-                </a:solidFill>
-                <a:highlight>
-                  <a:schemeClr val="dk1"/>
-                </a:highlight>
-                <a:latin typeface="Lexend Deca"/>
-                <a:ea typeface="Lexend Deca"/>
-                <a:cs typeface="Lexend Deca"/>
-                <a:sym typeface="Lexend Deca"/>
-              </a:rPr>
-              <a:t>我們將在午餐聚會時禱告祝福</a:t>
-            </a:r>
-            <a:endParaRPr b="1" sz="2800">
-              <a:solidFill>
-                <a:srgbClr val="FF0000"/>
-              </a:solidFill>
-              <a:highlight>
-                <a:schemeClr val="dk1"/>
-              </a:highlight>
-              <a:latin typeface="Lexend Deca"/>
-              <a:ea typeface="Lexend Deca"/>
-              <a:cs typeface="Lexend Deca"/>
-              <a:sym typeface="Lexend Deca"/>
-            </a:endParaRPr>
-          </a:p>
-          <a:p>
-            <a:pPr indent="0" lvl="0" marL="0" rtl="0" algn="ctr">
-              <a:lnSpc>
-                <a:spcPct val="90000"/>
-              </a:lnSpc>
-              <a:spcBef>
-                <a:spcPts val="0"/>
-              </a:spcBef>
-              <a:spcAft>
-                <a:spcPts val="0"/>
-              </a:spcAft>
-              <a:buNone/>
-            </a:pPr>
-            <a:r>
-              <a:rPr b="1" lang="en" sz="2800">
-                <a:solidFill>
-                  <a:srgbClr val="FF0000"/>
-                </a:solidFill>
-                <a:highlight>
-                  <a:schemeClr val="dk1"/>
-                </a:highlight>
-                <a:latin typeface="Lexend Deca"/>
-                <a:ea typeface="Lexend Deca"/>
-                <a:cs typeface="Lexend Deca"/>
-                <a:sym typeface="Lexend Deca"/>
-              </a:rPr>
-              <a:t> 唱生日歌與享用生日蛋糕</a:t>
-            </a:r>
-            <a:endParaRPr/>
-          </a:p>
-        </p:txBody>
-      </p:sp>
-    </p:spTree>
-  </p:cSld>
-  <p:clrMapOvr>
-    <a:masterClrMapping/>
-  </p:clrMapOvr>
-</p:sld>
-</file>
-
-<file path=ppt/slides/slide47.xml><?xml version="1.0" encoding="utf-8"?>
-<p:sld xmlns:a="http://schemas.openxmlformats.org/drawingml/2006/main" xmlns:r="http://schemas.openxmlformats.org/officeDocument/2006/relationships" xmlns:mc="http://schemas.openxmlformats.org/markup-compatibility/2006" xmlns:mv="urn:schemas-microsoft-com:mac:vml" xmlns:p="http://schemas.openxmlformats.org/presentationml/2006/main" xmlns:c="http://schemas.openxmlformats.org/drawingml/2006/chart" xmlns:dgm="http://schemas.openxmlformats.org/drawingml/2006/diagram" xmlns:o="urn:schemas-microsoft-com:office:office" xmlns:v="urn:schemas-microsoft-com:vml" xmlns:pvml="urn:schemas-microsoft-com:office:powerpoint" xmlns:com="http://schemas.openxmlformats.org/drawingml/2006/compatibility" xmlns:p14="http://schemas.microsoft.com/office/powerpoint/2010/main" xmlns:p15="http://schemas.microsoft.com/office/powerpoint/2012/main" xmlns:ahyp="http://schemas.microsoft.com/office/drawing/2018/hyperlinkcolor" show="0">
-  <p:cSld>
-    <p:bg>
-      <p:bgPr>
-        <a:blipFill>
-          <a:blip r:embed="rId9003">
-            <a:alphaModFix/>
-          </a:blip>
-          <a:stretch>
-            <a:fillRect/>
-          </a:stretch>
-        </a:blipFill>
-      </p:bgPr>
-    </p:bg>
-    <p:spTree>
-      <p:nvGrpSpPr>
-        <p:cNvPr id="397" name="Shape 397"/>
-        <p:cNvGrpSpPr/>
-        <p:nvPr/>
-      </p:nvGrpSpPr>
-      <p:grpSpPr>
-        <a:xfrm>
-          <a:off x="0" y="0"/>
-          <a:ext cx="0" cy="0"/>
-          <a:chOff x="0" y="0"/>
-          <a:chExt cx="0" cy="0"/>
-        </a:xfrm>
-      </p:grpSpPr>
-      <p:sp>
-        <p:nvSpPr>
-          <p:cNvPr id="398" name="Google Shape;398;p67"/>
-          <p:cNvSpPr txBox="1"/>
-          <p:nvPr/>
-        </p:nvSpPr>
-        <p:spPr>
-          <a:xfrm>
-            <a:off x="0" y="0"/>
-            <a:ext cx="9144000" cy="892800"/>
-          </a:xfrm>
-          <a:prstGeom prst="rect">
-            <a:avLst/>
-          </a:prstGeom>
-          <a:noFill/>
-          <a:ln>
-            <a:noFill/>
-          </a:ln>
-        </p:spPr>
-        <p:txBody>
-          <a:bodyPr anchorCtr="0" anchor="t" bIns="91425" lIns="91425" spcFirstLastPara="1" rIns="91425" wrap="square" tIns="91425">
-            <a:spAutoFit/>
-          </a:bodyPr>
-          <a:lstStyle/>
-          <a:p>
-            <a:pPr indent="0" lvl="0" marL="0" rtl="0" algn="ctr">
-              <a:spcBef>
-                <a:spcPts val="0"/>
-              </a:spcBef>
-              <a:spcAft>
-                <a:spcPts val="0"/>
-              </a:spcAft>
-              <a:buNone/>
-            </a:pPr>
-            <a:r>
-              <a:rPr lang="en" sz="4600"/>
-              <a:t>  </a:t>
-            </a:r>
-            <a:r>
-              <a:rPr lang="en" sz="4600">
-                <a:solidFill>
-                  <a:srgbClr val="FF0000"/>
-                </a:solidFill>
-                <a:highlight>
-                  <a:srgbClr val="FFFF00"/>
-                </a:highlight>
-              </a:rPr>
-              <a:t>❤️</a:t>
-            </a:r>
-            <a:r>
-              <a:rPr b="1" lang="en" sz="3300">
-                <a:highlight>
-                  <a:srgbClr val="FFFF00"/>
-                </a:highlight>
-                <a:latin typeface="Lexend Deca"/>
-                <a:ea typeface="Lexend Deca"/>
-                <a:cs typeface="Lexend Deca"/>
-                <a:sym typeface="Lexend Deca"/>
-              </a:rPr>
-              <a:t>9月份生日的家人們</a:t>
-            </a:r>
-            <a:r>
-              <a:rPr lang="en" sz="4600">
-                <a:solidFill>
-                  <a:srgbClr val="FF0000"/>
-                </a:solidFill>
-                <a:highlight>
-                  <a:srgbClr val="FFFF00"/>
-                </a:highlight>
-              </a:rPr>
-              <a:t>❤️</a:t>
-            </a:r>
-            <a:r>
-              <a:rPr lang="en" sz="4600"/>
-              <a:t> </a:t>
-            </a:r>
-            <a:endParaRPr sz="4600">
-              <a:solidFill>
-                <a:srgbClr val="FF0000"/>
-              </a:solidFill>
-            </a:endParaRPr>
-          </a:p>
-        </p:txBody>
-      </p:sp>
-      <p:sp>
-        <p:nvSpPr>
-          <p:cNvPr id="399" name="Birthday Name 0"/>
-          <p:cNvSpPr txBox="1"/>
-          <p:nvPr/>
-        </p:nvSpPr>
-        <p:spPr>
-          <a:xfrm>
-            <a:off x="298800" y="920000"/>
-            <a:ext cx="8500000" cy="2800000"/>
-          </a:xfrm>
-          <a:prstGeom prst="rect">
-            <a:avLst/>
-          </a:prstGeom>
-          <a:noFill/>
-        </p:spPr>
-        <p:txBody>
-          <a:bodyPr wrap="none" anchor="ctr" lIns="45720" rIns="45720" tIns="0" bIns="0">
-            <a:noAutofit/>
-          </a:bodyPr>
-          <a:lstStyle/>
-          <a:p>
-            <a:pPr algn="ctr" fontAlgn="ctr">
-              <a:buNone/>
-            </a:pPr>
-            <a:r>
-              <a:rPr b="1" lang="en" sz="3600">
-                <a:solidFill>
-                  <a:srgbClr val="4C1130"/>
-                </a:solidFill>
-                <a:highlight>
-                  <a:schemeClr val="dk1"/>
-                </a:highlight>
-                <a:latin typeface="DFKai-SB"/>
-                <a:ea typeface="DFKai-SB"/>
-                <a:cs typeface="DFKai-SB"/>
-                <a:sym typeface="DFKai-SB"/>
-              </a:rPr>
-              <a:t xml:space="preserve"> </a:t>
-            </a:r>
-            <a:endParaRPr b="1" sz="3600"/>
-          </a:p>
-        </p:txBody>
-      </p:sp>
-      <p:sp>
-        <p:nvSpPr>
-          <p:cNvPr id="400" name="Google Shape;400;p67"/>
-          <p:cNvSpPr txBox="1"/>
-          <p:nvPr/>
-        </p:nvSpPr>
-        <p:spPr>
-          <a:xfrm>
-            <a:off x="0" y="2037522"/>
-            <a:ext cx="9144000" cy="400200"/>
-          </a:xfrm>
-          <a:prstGeom prst="rect">
-            <a:avLst/>
-          </a:prstGeom>
-          <a:noFill/>
-          <a:ln>
-            <a:noFill/>
-          </a:ln>
-        </p:spPr>
-        <p:txBody>
-          <a:bodyPr anchorCtr="0" anchor="t" bIns="91425" lIns="91425" spcFirstLastPara="1" rIns="91425" wrap="square" tIns="91425">
-            <a:spAutoFit/>
-          </a:bodyPr>
-          <a:lstStyle/>
-          <a:p>
-            <a:pPr indent="0" lvl="0" marL="0" rtl="0" algn="l">
-              <a:spcBef>
-                <a:spcPts val="0"/>
-              </a:spcBef>
-              <a:spcAft>
-                <a:spcPts val="0"/>
-              </a:spcAft>
-              <a:buNone/>
-            </a:pPr>
-            <a:r>
-              <a:t/>
-            </a:r>
-            <a:endParaRPr>
-              <a:latin typeface="Lato"/>
-              <a:ea typeface="Lato"/>
-              <a:cs typeface="Lato"/>
-              <a:sym typeface="Lato"/>
-            </a:endParaRPr>
-          </a:p>
-        </p:txBody>
-      </p:sp>
-      <p:sp>
-        <p:nvSpPr>
-          <p:cNvPr id="401" name="Google Shape;401;p67"/>
-          <p:cNvSpPr txBox="1"/>
-          <p:nvPr/>
-        </p:nvSpPr>
-        <p:spPr>
-          <a:xfrm>
-            <a:off x="228325" y="3894775"/>
-            <a:ext cx="4893900" cy="960600"/>
-          </a:xfrm>
-          <a:prstGeom prst="rect">
-            <a:avLst/>
-          </a:prstGeom>
-          <a:noFill/>
-          <a:ln>
-            <a:noFill/>
-          </a:ln>
-        </p:spPr>
-        <p:txBody>
-          <a:bodyPr anchorCtr="0" anchor="t" bIns="91425" lIns="91425" spcFirstLastPara="1" rIns="91425" wrap="square" tIns="91425">
-            <a:spAutoFit/>
-          </a:bodyPr>
-          <a:lstStyle/>
-          <a:p>
-            <a:pPr indent="0" lvl="0" marL="0" rtl="0" algn="ctr">
-              <a:lnSpc>
-                <a:spcPct val="90000"/>
-              </a:lnSpc>
-              <a:spcBef>
-                <a:spcPts val="0"/>
-              </a:spcBef>
-              <a:spcAft>
-                <a:spcPts val="0"/>
-              </a:spcAft>
-              <a:buNone/>
-            </a:pPr>
-            <a:r>
-              <a:rPr b="1" lang="en" sz="2800">
-                <a:solidFill>
-                  <a:srgbClr val="FF0000"/>
-                </a:solidFill>
-                <a:highlight>
-                  <a:schemeClr val="dk1"/>
-                </a:highlight>
-                <a:latin typeface="Lexend Deca"/>
-                <a:ea typeface="Lexend Deca"/>
-                <a:cs typeface="Lexend Deca"/>
-                <a:sym typeface="Lexend Deca"/>
-              </a:rPr>
-              <a:t>我們將在午餐聚會時禱告祝福</a:t>
-            </a:r>
-            <a:endParaRPr b="1" sz="2800">
-              <a:solidFill>
-                <a:srgbClr val="FF0000"/>
-              </a:solidFill>
-              <a:highlight>
-                <a:schemeClr val="dk1"/>
-              </a:highlight>
-              <a:latin typeface="Lexend Deca"/>
-              <a:ea typeface="Lexend Deca"/>
-              <a:cs typeface="Lexend Deca"/>
-              <a:sym typeface="Lexend Deca"/>
-            </a:endParaRPr>
-          </a:p>
-          <a:p>
-            <a:pPr indent="0" lvl="0" marL="0" rtl="0" algn="ctr">
-              <a:lnSpc>
-                <a:spcPct val="90000"/>
-              </a:lnSpc>
-              <a:spcBef>
-                <a:spcPts val="0"/>
-              </a:spcBef>
-              <a:spcAft>
-                <a:spcPts val="0"/>
-              </a:spcAft>
-              <a:buNone/>
-            </a:pPr>
-            <a:r>
-              <a:rPr b="1" lang="en" sz="2800">
-                <a:solidFill>
-                  <a:srgbClr val="FF0000"/>
-                </a:solidFill>
-                <a:highlight>
-                  <a:schemeClr val="dk1"/>
-                </a:highlight>
-                <a:latin typeface="Lexend Deca"/>
-                <a:ea typeface="Lexend Deca"/>
-                <a:cs typeface="Lexend Deca"/>
-                <a:sym typeface="Lexend Deca"/>
-              </a:rPr>
-              <a:t> 唱生日歌與享用生日蛋糕</a:t>
-            </a:r>
-            <a:endParaRPr/>
-          </a:p>
-        </p:txBody>
-      </p:sp>
-    </p:spTree>
-  </p:cSld>
-  <p:clrMapOvr>
-    <a:masterClrMapping/>
-  </p:clrMapOvr>
-</p:sld>
-</file>
-
-<file path=ppt/slides/slide48.xml><?xml version="1.0" encoding="utf-8"?>
-<p:sld xmlns:a="http://schemas.openxmlformats.org/drawingml/2006/main" xmlns:r="http://schemas.openxmlformats.org/officeDocument/2006/relationships" xmlns:mc="http://schemas.openxmlformats.org/markup-compatibility/2006" xmlns:mv="urn:schemas-microsoft-com:mac:vml" xmlns:p="http://schemas.openxmlformats.org/presentationml/2006/main" xmlns:c="http://schemas.openxmlformats.org/drawingml/2006/chart" xmlns:dgm="http://schemas.openxmlformats.org/drawingml/2006/diagram" xmlns:o="urn:schemas-microsoft-com:office:office" xmlns:v="urn:schemas-microsoft-com:vml" xmlns:pvml="urn:schemas-microsoft-com:office:powerpoint" xmlns:com="http://schemas.openxmlformats.org/drawingml/2006/compatibility" xmlns:p14="http://schemas.microsoft.com/office/powerpoint/2010/main" xmlns:p15="http://schemas.microsoft.com/office/powerpoint/2012/main" xmlns:ahyp="http://schemas.microsoft.com/office/drawing/2018/hyperlinkcolor" show="0">
-  <p:cSld>
-    <p:bg>
-      <p:bgPr>
-        <a:blipFill>
-          <a:blip r:embed="rId9003">
-            <a:alphaModFix/>
-          </a:blip>
-          <a:stretch>
-            <a:fillRect/>
-          </a:stretch>
-        </a:blipFill>
-      </p:bgPr>
-    </p:bg>
-    <p:spTree>
-      <p:nvGrpSpPr>
-        <p:cNvPr id="397" name="Shape 397"/>
-        <p:cNvGrpSpPr/>
-        <p:nvPr/>
-      </p:nvGrpSpPr>
-      <p:grpSpPr>
-        <a:xfrm>
-          <a:off x="0" y="0"/>
-          <a:ext cx="0" cy="0"/>
-          <a:chOff x="0" y="0"/>
-          <a:chExt cx="0" cy="0"/>
-        </a:xfrm>
-      </p:grpSpPr>
-      <p:sp>
-        <p:nvSpPr>
-          <p:cNvPr id="398" name="Google Shape;398;p67"/>
-          <p:cNvSpPr txBox="1"/>
-          <p:nvPr/>
-        </p:nvSpPr>
-        <p:spPr>
-          <a:xfrm>
-            <a:off x="0" y="0"/>
-            <a:ext cx="9144000" cy="892800"/>
-          </a:xfrm>
-          <a:prstGeom prst="rect">
-            <a:avLst/>
-          </a:prstGeom>
-          <a:noFill/>
-          <a:ln>
-            <a:noFill/>
-          </a:ln>
-        </p:spPr>
-        <p:txBody>
-          <a:bodyPr anchorCtr="0" anchor="t" bIns="91425" lIns="91425" spcFirstLastPara="1" rIns="91425" wrap="square" tIns="91425">
-            <a:spAutoFit/>
-          </a:bodyPr>
-          <a:lstStyle/>
-          <a:p>
-            <a:pPr indent="0" lvl="0" marL="0" rtl="0" algn="ctr">
-              <a:spcBef>
-                <a:spcPts val="0"/>
-              </a:spcBef>
-              <a:spcAft>
-                <a:spcPts val="0"/>
-              </a:spcAft>
-              <a:buNone/>
-            </a:pPr>
-            <a:r>
-              <a:rPr lang="en" sz="4600"/>
-              <a:t>  </a:t>
-            </a:r>
-            <a:r>
-              <a:rPr lang="en" sz="4600">
-                <a:solidFill>
-                  <a:srgbClr val="FF0000"/>
-                </a:solidFill>
-                <a:highlight>
-                  <a:srgbClr val="FFFF00"/>
-                </a:highlight>
-              </a:rPr>
-              <a:t>❤️</a:t>
-            </a:r>
-            <a:r>
-              <a:rPr b="1" lang="en" sz="3300">
-                <a:highlight>
-                  <a:srgbClr val="FFFF00"/>
-                </a:highlight>
-                <a:latin typeface="Lexend Deca"/>
-                <a:ea typeface="Lexend Deca"/>
-                <a:cs typeface="Lexend Deca"/>
-                <a:sym typeface="Lexend Deca"/>
-              </a:rPr>
-              <a:t>10月份生日的家人們</a:t>
-            </a:r>
-            <a:r>
-              <a:rPr lang="en" sz="4600">
-                <a:solidFill>
-                  <a:srgbClr val="FF0000"/>
-                </a:solidFill>
-                <a:highlight>
-                  <a:srgbClr val="FFFF00"/>
-                </a:highlight>
-              </a:rPr>
-              <a:t>❤️</a:t>
-            </a:r>
-            <a:r>
-              <a:rPr lang="en" sz="4600"/>
-              <a:t> </a:t>
-            </a:r>
-            <a:endParaRPr sz="4600">
-              <a:solidFill>
-                <a:srgbClr val="FF0000"/>
-              </a:solidFill>
-            </a:endParaRPr>
-          </a:p>
-        </p:txBody>
-      </p:sp>
-      <p:sp>
-        <p:nvSpPr>
-          <p:cNvPr id="399" name="Birthday Name 0"/>
-          <p:cNvSpPr txBox="1"/>
-          <p:nvPr/>
-        </p:nvSpPr>
-        <p:spPr>
-          <a:xfrm>
-            <a:off x="298800" y="920000"/>
-            <a:ext cx="8500000" cy="2800000"/>
-          </a:xfrm>
-          <a:prstGeom prst="rect">
-            <a:avLst/>
-          </a:prstGeom>
-          <a:noFill/>
-        </p:spPr>
-        <p:txBody>
-          <a:bodyPr wrap="none" anchor="ctr" lIns="45720" rIns="45720" tIns="0" bIns="0">
-            <a:noAutofit/>
-          </a:bodyPr>
-          <a:lstStyle/>
-          <a:p>
-            <a:pPr algn="ctr" fontAlgn="ctr">
-              <a:buNone/>
-            </a:pPr>
-            <a:r>
-              <a:rPr b="1" lang="en" sz="3600">
-                <a:solidFill>
-                  <a:srgbClr val="4C1130"/>
-                </a:solidFill>
-                <a:highlight>
-                  <a:schemeClr val="dk1"/>
-                </a:highlight>
-                <a:latin typeface="DFKai-SB"/>
-                <a:ea typeface="DFKai-SB"/>
-                <a:cs typeface="DFKai-SB"/>
-                <a:sym typeface="DFKai-SB"/>
-              </a:rPr>
-              <a:t xml:space="preserve"> </a:t>
-            </a:r>
-            <a:endParaRPr b="1" sz="3600"/>
-          </a:p>
-        </p:txBody>
-      </p:sp>
-      <p:sp>
-        <p:nvSpPr>
-          <p:cNvPr id="400" name="Google Shape;400;p67"/>
-          <p:cNvSpPr txBox="1"/>
-          <p:nvPr/>
-        </p:nvSpPr>
-        <p:spPr>
-          <a:xfrm>
-            <a:off x="0" y="2037522"/>
-            <a:ext cx="9144000" cy="400200"/>
-          </a:xfrm>
-          <a:prstGeom prst="rect">
-            <a:avLst/>
-          </a:prstGeom>
-          <a:noFill/>
-          <a:ln>
-            <a:noFill/>
-          </a:ln>
-        </p:spPr>
-        <p:txBody>
-          <a:bodyPr anchorCtr="0" anchor="t" bIns="91425" lIns="91425" spcFirstLastPara="1" rIns="91425" wrap="square" tIns="91425">
-            <a:spAutoFit/>
-          </a:bodyPr>
-          <a:lstStyle/>
-          <a:p>
-            <a:pPr indent="0" lvl="0" marL="0" rtl="0" algn="l">
-              <a:spcBef>
-                <a:spcPts val="0"/>
-              </a:spcBef>
-              <a:spcAft>
-                <a:spcPts val="0"/>
-              </a:spcAft>
-              <a:buNone/>
-            </a:pPr>
-            <a:r>
-              <a:t/>
-            </a:r>
-            <a:endParaRPr>
-              <a:latin typeface="Lato"/>
-              <a:ea typeface="Lato"/>
-              <a:cs typeface="Lato"/>
-              <a:sym typeface="Lato"/>
-            </a:endParaRPr>
-          </a:p>
-        </p:txBody>
-      </p:sp>
-      <p:sp>
-        <p:nvSpPr>
-          <p:cNvPr id="401" name="Google Shape;401;p67"/>
-          <p:cNvSpPr txBox="1"/>
-          <p:nvPr/>
-        </p:nvSpPr>
-        <p:spPr>
-          <a:xfrm>
-            <a:off x="228325" y="3894775"/>
-            <a:ext cx="4893900" cy="960600"/>
-          </a:xfrm>
-          <a:prstGeom prst="rect">
-            <a:avLst/>
-          </a:prstGeom>
-          <a:noFill/>
-          <a:ln>
-            <a:noFill/>
-          </a:ln>
-        </p:spPr>
-        <p:txBody>
-          <a:bodyPr anchorCtr="0" anchor="t" bIns="91425" lIns="91425" spcFirstLastPara="1" rIns="91425" wrap="square" tIns="91425">
-            <a:spAutoFit/>
-          </a:bodyPr>
-          <a:lstStyle/>
-          <a:p>
-            <a:pPr indent="0" lvl="0" marL="0" rtl="0" algn="ctr">
-              <a:lnSpc>
-                <a:spcPct val="90000"/>
-              </a:lnSpc>
-              <a:spcBef>
-                <a:spcPts val="0"/>
-              </a:spcBef>
-              <a:spcAft>
-                <a:spcPts val="0"/>
-              </a:spcAft>
-              <a:buNone/>
-            </a:pPr>
-            <a:r>
-              <a:rPr b="1" lang="en" sz="2800">
-                <a:solidFill>
-                  <a:srgbClr val="FF0000"/>
-                </a:solidFill>
-                <a:highlight>
-                  <a:schemeClr val="dk1"/>
-                </a:highlight>
-                <a:latin typeface="Lexend Deca"/>
-                <a:ea typeface="Lexend Deca"/>
-                <a:cs typeface="Lexend Deca"/>
-                <a:sym typeface="Lexend Deca"/>
-              </a:rPr>
-              <a:t>我們將在午餐聚會時禱告祝福</a:t>
-            </a:r>
-            <a:endParaRPr b="1" sz="2800">
-              <a:solidFill>
-                <a:srgbClr val="FF0000"/>
-              </a:solidFill>
-              <a:highlight>
-                <a:schemeClr val="dk1"/>
-              </a:highlight>
-              <a:latin typeface="Lexend Deca"/>
-              <a:ea typeface="Lexend Deca"/>
-              <a:cs typeface="Lexend Deca"/>
-              <a:sym typeface="Lexend Deca"/>
-            </a:endParaRPr>
-          </a:p>
-          <a:p>
-            <a:pPr indent="0" lvl="0" marL="0" rtl="0" algn="ctr">
-              <a:lnSpc>
-                <a:spcPct val="90000"/>
-              </a:lnSpc>
-              <a:spcBef>
-                <a:spcPts val="0"/>
-              </a:spcBef>
-              <a:spcAft>
-                <a:spcPts val="0"/>
-              </a:spcAft>
-              <a:buNone/>
-            </a:pPr>
-            <a:r>
-              <a:rPr b="1" lang="en" sz="2800">
-                <a:solidFill>
-                  <a:srgbClr val="FF0000"/>
-                </a:solidFill>
-                <a:highlight>
-                  <a:schemeClr val="dk1"/>
-                </a:highlight>
-                <a:latin typeface="Lexend Deca"/>
-                <a:ea typeface="Lexend Deca"/>
-                <a:cs typeface="Lexend Deca"/>
-                <a:sym typeface="Lexend Deca"/>
-              </a:rPr>
-              <a:t> 唱生日歌與享用生日蛋糕</a:t>
-            </a:r>
-            <a:endParaRPr/>
-          </a:p>
-        </p:txBody>
-      </p:sp>
-    </p:spTree>
-  </p:cSld>
-  <p:clrMapOvr>
-    <a:masterClrMapping/>
-  </p:clrMapOvr>
-</p:sld>
-</file>
-
-<file path=ppt/slides/slide49.xml><?xml version="1.0" encoding="utf-8"?>
-<p:sld xmlns:a="http://schemas.openxmlformats.org/drawingml/2006/main" xmlns:r="http://schemas.openxmlformats.org/officeDocument/2006/relationships" xmlns:mc="http://schemas.openxmlformats.org/markup-compatibility/2006" xmlns:mv="urn:schemas-microsoft-com:mac:vml" xmlns:p="http://schemas.openxmlformats.org/presentationml/2006/main" xmlns:c="http://schemas.openxmlformats.org/drawingml/2006/chart" xmlns:dgm="http://schemas.openxmlformats.org/drawingml/2006/diagram" xmlns:o="urn:schemas-microsoft-com:office:office" xmlns:v="urn:schemas-microsoft-com:vml" xmlns:pvml="urn:schemas-microsoft-com:office:powerpoint" xmlns:com="http://schemas.openxmlformats.org/drawingml/2006/compatibility" xmlns:p14="http://schemas.microsoft.com/office/powerpoint/2010/main" xmlns:p15="http://schemas.microsoft.com/office/powerpoint/2012/main" xmlns:ahyp="http://schemas.microsoft.com/office/drawing/2018/hyperlinkcolor" show="0">
-  <p:cSld>
-    <p:bg>
-      <p:bgPr>
-        <a:blipFill>
-          <a:blip r:embed="rId9003">
-            <a:alphaModFix/>
-          </a:blip>
-          <a:stretch>
-            <a:fillRect/>
-          </a:stretch>
-        </a:blipFill>
-      </p:bgPr>
-    </p:bg>
-    <p:spTree>
-      <p:nvGrpSpPr>
-        <p:cNvPr id="397" name="Shape 397"/>
-        <p:cNvGrpSpPr/>
-        <p:nvPr/>
-      </p:nvGrpSpPr>
-      <p:grpSpPr>
-        <a:xfrm>
-          <a:off x="0" y="0"/>
-          <a:ext cx="0" cy="0"/>
-          <a:chOff x="0" y="0"/>
-          <a:chExt cx="0" cy="0"/>
-        </a:xfrm>
-      </p:grpSpPr>
-      <p:sp>
-        <p:nvSpPr>
-          <p:cNvPr id="398" name="Google Shape;398;p67"/>
-          <p:cNvSpPr txBox="1"/>
-          <p:nvPr/>
-        </p:nvSpPr>
-        <p:spPr>
-          <a:xfrm>
-            <a:off x="0" y="0"/>
-            <a:ext cx="9144000" cy="892800"/>
-          </a:xfrm>
-          <a:prstGeom prst="rect">
-            <a:avLst/>
-          </a:prstGeom>
-          <a:noFill/>
-          <a:ln>
-            <a:noFill/>
-          </a:ln>
-        </p:spPr>
-        <p:txBody>
-          <a:bodyPr anchorCtr="0" anchor="t" bIns="91425" lIns="91425" spcFirstLastPara="1" rIns="91425" wrap="square" tIns="91425">
-            <a:spAutoFit/>
-          </a:bodyPr>
-          <a:lstStyle/>
-          <a:p>
-            <a:pPr indent="0" lvl="0" marL="0" rtl="0" algn="ctr">
-              <a:spcBef>
-                <a:spcPts val="0"/>
-              </a:spcBef>
-              <a:spcAft>
-                <a:spcPts val="0"/>
-              </a:spcAft>
-              <a:buNone/>
-            </a:pPr>
-            <a:r>
-              <a:rPr lang="en" sz="4600"/>
-              <a:t>  </a:t>
-            </a:r>
-            <a:r>
-              <a:rPr lang="en" sz="4600">
-                <a:solidFill>
-                  <a:srgbClr val="FF0000"/>
-                </a:solidFill>
-                <a:highlight>
-                  <a:srgbClr val="FFFF00"/>
-                </a:highlight>
-              </a:rPr>
-              <a:t>❤️</a:t>
-            </a:r>
-            <a:r>
-              <a:rPr b="1" lang="en" sz="3300">
-                <a:highlight>
-                  <a:srgbClr val="FFFF00"/>
-                </a:highlight>
-                <a:latin typeface="Lexend Deca"/>
-                <a:ea typeface="Lexend Deca"/>
-                <a:cs typeface="Lexend Deca"/>
-                <a:sym typeface="Lexend Deca"/>
-              </a:rPr>
-              <a:t>11月份生日的家人們</a:t>
-            </a:r>
-            <a:r>
-              <a:rPr lang="en" sz="4600">
-                <a:solidFill>
-                  <a:srgbClr val="FF0000"/>
-                </a:solidFill>
-                <a:highlight>
-                  <a:srgbClr val="FFFF00"/>
-                </a:highlight>
-              </a:rPr>
-              <a:t>❤️</a:t>
-            </a:r>
-            <a:r>
-              <a:rPr lang="en" sz="4600"/>
-              <a:t> </a:t>
-            </a:r>
-            <a:endParaRPr sz="4600">
-              <a:solidFill>
-                <a:srgbClr val="FF0000"/>
-              </a:solidFill>
-            </a:endParaRPr>
-          </a:p>
-        </p:txBody>
-      </p:sp>
-      <p:sp>
-        <p:nvSpPr>
-          <p:cNvPr id="399" name="Birthday Name 0"/>
-          <p:cNvSpPr txBox="1"/>
-          <p:nvPr/>
-        </p:nvSpPr>
-        <p:spPr>
-          <a:xfrm>
-            <a:off x="298800" y="920000"/>
-            <a:ext cx="8500000" cy="2800000"/>
-          </a:xfrm>
-          <a:prstGeom prst="rect">
-            <a:avLst/>
-          </a:prstGeom>
-          <a:noFill/>
-        </p:spPr>
-        <p:txBody>
-          <a:bodyPr wrap="none" anchor="ctr" lIns="45720" rIns="45720" tIns="0" bIns="0">
-            <a:noAutofit/>
-          </a:bodyPr>
-          <a:lstStyle/>
-          <a:p>
-            <a:pPr algn="ctr" fontAlgn="ctr">
-              <a:buNone/>
-            </a:pPr>
-            <a:r>
-              <a:rPr b="1" lang="en" sz="3600">
-                <a:solidFill>
-                  <a:srgbClr val="4C1130"/>
-                </a:solidFill>
-                <a:highlight>
-                  <a:schemeClr val="dk1"/>
-                </a:highlight>
-                <a:latin typeface="DFKai-SB"/>
-                <a:ea typeface="DFKai-SB"/>
-                <a:cs typeface="DFKai-SB"/>
-                <a:sym typeface="DFKai-SB"/>
-              </a:rPr>
-              <a:t xml:space="preserve"> </a:t>
-            </a:r>
-            <a:endParaRPr b="1" sz="3600"/>
-          </a:p>
-        </p:txBody>
-      </p:sp>
-      <p:sp>
-        <p:nvSpPr>
-          <p:cNvPr id="400" name="Google Shape;400;p67"/>
-          <p:cNvSpPr txBox="1"/>
-          <p:nvPr/>
-        </p:nvSpPr>
-        <p:spPr>
-          <a:xfrm>
-            <a:off x="0" y="2037522"/>
-            <a:ext cx="9144000" cy="400200"/>
-          </a:xfrm>
-          <a:prstGeom prst="rect">
-            <a:avLst/>
-          </a:prstGeom>
-          <a:noFill/>
-          <a:ln>
-            <a:noFill/>
-          </a:ln>
-        </p:spPr>
-        <p:txBody>
-          <a:bodyPr anchorCtr="0" anchor="t" bIns="91425" lIns="91425" spcFirstLastPara="1" rIns="91425" wrap="square" tIns="91425">
-            <a:spAutoFit/>
-          </a:bodyPr>
-          <a:lstStyle/>
-          <a:p>
-            <a:pPr indent="0" lvl="0" marL="0" rtl="0" algn="l">
-              <a:spcBef>
-                <a:spcPts val="0"/>
-              </a:spcBef>
-              <a:spcAft>
-                <a:spcPts val="0"/>
-              </a:spcAft>
-              <a:buNone/>
-            </a:pPr>
-            <a:r>
-              <a:t/>
-            </a:r>
-            <a:endParaRPr>
-              <a:latin typeface="Lato"/>
-              <a:ea typeface="Lato"/>
-              <a:cs typeface="Lato"/>
-              <a:sym typeface="Lato"/>
-            </a:endParaRPr>
-          </a:p>
-        </p:txBody>
-      </p:sp>
-      <p:sp>
-        <p:nvSpPr>
-          <p:cNvPr id="401" name="Google Shape;401;p67"/>
-          <p:cNvSpPr txBox="1"/>
-          <p:nvPr/>
-        </p:nvSpPr>
-        <p:spPr>
-          <a:xfrm>
-            <a:off x="228325" y="3894775"/>
-            <a:ext cx="4893900" cy="960600"/>
-          </a:xfrm>
-          <a:prstGeom prst="rect">
-            <a:avLst/>
-          </a:prstGeom>
-          <a:noFill/>
-          <a:ln>
-            <a:noFill/>
-          </a:ln>
-        </p:spPr>
-        <p:txBody>
-          <a:bodyPr anchorCtr="0" anchor="t" bIns="91425" lIns="91425" spcFirstLastPara="1" rIns="91425" wrap="square" tIns="91425">
-            <a:spAutoFit/>
-          </a:bodyPr>
-          <a:lstStyle/>
-          <a:p>
-            <a:pPr indent="0" lvl="0" marL="0" rtl="0" algn="ctr">
-              <a:lnSpc>
-                <a:spcPct val="90000"/>
-              </a:lnSpc>
-              <a:spcBef>
-                <a:spcPts val="0"/>
-              </a:spcBef>
-              <a:spcAft>
-                <a:spcPts val="0"/>
-              </a:spcAft>
-              <a:buNone/>
-            </a:pPr>
-            <a:r>
-              <a:rPr b="1" lang="en" sz="2800">
-                <a:solidFill>
-                  <a:srgbClr val="FF0000"/>
-                </a:solidFill>
-                <a:highlight>
-                  <a:schemeClr val="dk1"/>
-                </a:highlight>
-                <a:latin typeface="Lexend Deca"/>
-                <a:ea typeface="Lexend Deca"/>
-                <a:cs typeface="Lexend Deca"/>
-                <a:sym typeface="Lexend Deca"/>
-              </a:rPr>
-              <a:t>我們將在午餐聚會時禱告祝福</a:t>
-            </a:r>
-            <a:endParaRPr b="1" sz="2800">
-              <a:solidFill>
-                <a:srgbClr val="FF0000"/>
-              </a:solidFill>
-              <a:highlight>
-                <a:schemeClr val="dk1"/>
-              </a:highlight>
-              <a:latin typeface="Lexend Deca"/>
-              <a:ea typeface="Lexend Deca"/>
-              <a:cs typeface="Lexend Deca"/>
-              <a:sym typeface="Lexend Deca"/>
-            </a:endParaRPr>
-          </a:p>
-          <a:p>
-            <a:pPr indent="0" lvl="0" marL="0" rtl="0" algn="ctr">
-              <a:lnSpc>
-                <a:spcPct val="90000"/>
-              </a:lnSpc>
-              <a:spcBef>
-                <a:spcPts val="0"/>
-              </a:spcBef>
-              <a:spcAft>
-                <a:spcPts val="0"/>
-              </a:spcAft>
-              <a:buNone/>
-            </a:pPr>
-            <a:r>
-              <a:rPr b="1" lang="en" sz="2800">
-                <a:solidFill>
-                  <a:srgbClr val="FF0000"/>
-                </a:solidFill>
-                <a:highlight>
-                  <a:schemeClr val="dk1"/>
-                </a:highlight>
-                <a:latin typeface="Lexend Deca"/>
-                <a:ea typeface="Lexend Deca"/>
-                <a:cs typeface="Lexend Deca"/>
-                <a:sym typeface="Lexend Deca"/>
-              </a:rPr>
-              <a:t> 唱生日歌與享用生日蛋糕</a:t>
-            </a:r>
-            <a:endParaRPr/>
           </a:p>
         </p:txBody>
       </p:sp>
@@ -44129,314 +40729,6 @@
                 <a:schemeClr val="dk2"/>
               </a:solidFill>
             </a:endParaRPr>
-          </a:p>
-        </p:txBody>
-      </p:sp>
-    </p:spTree>
-  </p:cSld>
-  <p:clrMapOvr>
-    <a:masterClrMapping/>
-  </p:clrMapOvr>
-</p:sld>
-</file>
-
-<file path=ppt/slides/slide50.xml><?xml version="1.0" encoding="utf-8"?>
-<p:sld xmlns:a="http://schemas.openxmlformats.org/drawingml/2006/main" xmlns:r="http://schemas.openxmlformats.org/officeDocument/2006/relationships" xmlns:mc="http://schemas.openxmlformats.org/markup-compatibility/2006" xmlns:mv="urn:schemas-microsoft-com:mac:vml" xmlns:p="http://schemas.openxmlformats.org/presentationml/2006/main" xmlns:c="http://schemas.openxmlformats.org/drawingml/2006/chart" xmlns:dgm="http://schemas.openxmlformats.org/drawingml/2006/diagram" xmlns:o="urn:schemas-microsoft-com:office:office" xmlns:v="urn:schemas-microsoft-com:vml" xmlns:pvml="urn:schemas-microsoft-com:office:powerpoint" xmlns:com="http://schemas.openxmlformats.org/drawingml/2006/compatibility" xmlns:p14="http://schemas.microsoft.com/office/powerpoint/2010/main" xmlns:p15="http://schemas.microsoft.com/office/powerpoint/2012/main" xmlns:ahyp="http://schemas.microsoft.com/office/drawing/2018/hyperlinkcolor" show="0">
-  <p:cSld>
-    <p:bg>
-      <p:bgPr>
-        <a:blipFill>
-          <a:blip r:embed="rId9003">
-            <a:alphaModFix/>
-          </a:blip>
-          <a:stretch>
-            <a:fillRect/>
-          </a:stretch>
-        </a:blipFill>
-      </p:bgPr>
-    </p:bg>
-    <p:spTree>
-      <p:nvGrpSpPr>
-        <p:cNvPr id="397" name="Shape 397"/>
-        <p:cNvGrpSpPr/>
-        <p:nvPr/>
-      </p:nvGrpSpPr>
-      <p:grpSpPr>
-        <a:xfrm>
-          <a:off x="0" y="0"/>
-          <a:ext cx="0" cy="0"/>
-          <a:chOff x="0" y="0"/>
-          <a:chExt cx="0" cy="0"/>
-        </a:xfrm>
-      </p:grpSpPr>
-      <p:sp>
-        <p:nvSpPr>
-          <p:cNvPr id="398" name="Google Shape;398;p67"/>
-          <p:cNvSpPr txBox="1"/>
-          <p:nvPr/>
-        </p:nvSpPr>
-        <p:spPr>
-          <a:xfrm>
-            <a:off x="0" y="0"/>
-            <a:ext cx="9144000" cy="892800"/>
-          </a:xfrm>
-          <a:prstGeom prst="rect">
-            <a:avLst/>
-          </a:prstGeom>
-          <a:noFill/>
-          <a:ln>
-            <a:noFill/>
-          </a:ln>
-        </p:spPr>
-        <p:txBody>
-          <a:bodyPr anchorCtr="0" anchor="t" bIns="91425" lIns="91425" spcFirstLastPara="1" rIns="91425" wrap="square" tIns="91425">
-            <a:spAutoFit/>
-          </a:bodyPr>
-          <a:lstStyle/>
-          <a:p>
-            <a:pPr indent="0" lvl="0" marL="0" rtl="0" algn="ctr">
-              <a:spcBef>
-                <a:spcPts val="0"/>
-              </a:spcBef>
-              <a:spcAft>
-                <a:spcPts val="0"/>
-              </a:spcAft>
-              <a:buNone/>
-            </a:pPr>
-            <a:r>
-              <a:rPr lang="en" sz="4600"/>
-              <a:t>  </a:t>
-            </a:r>
-            <a:r>
-              <a:rPr lang="en" sz="4600">
-                <a:solidFill>
-                  <a:srgbClr val="FF0000"/>
-                </a:solidFill>
-                <a:highlight>
-                  <a:srgbClr val="FFFF00"/>
-                </a:highlight>
-              </a:rPr>
-              <a:t>❤️</a:t>
-            </a:r>
-            <a:r>
-              <a:rPr b="1" lang="en" sz="3300">
-                <a:highlight>
-                  <a:srgbClr val="FFFF00"/>
-                </a:highlight>
-                <a:latin typeface="Lexend Deca"/>
-                <a:ea typeface="Lexend Deca"/>
-                <a:cs typeface="Lexend Deca"/>
-                <a:sym typeface="Lexend Deca"/>
-              </a:rPr>
-              <a:t>12月份生日的家人們</a:t>
-            </a:r>
-            <a:r>
-              <a:rPr lang="en" sz="4600">
-                <a:solidFill>
-                  <a:srgbClr val="FF0000"/>
-                </a:solidFill>
-                <a:highlight>
-                  <a:srgbClr val="FFFF00"/>
-                </a:highlight>
-              </a:rPr>
-              <a:t>❤️</a:t>
-            </a:r>
-            <a:r>
-              <a:rPr lang="en" sz="4600"/>
-              <a:t> </a:t>
-            </a:r>
-            <a:endParaRPr sz="4600">
-              <a:solidFill>
-                <a:srgbClr val="FF0000"/>
-              </a:solidFill>
-            </a:endParaRPr>
-          </a:p>
-        </p:txBody>
-      </p:sp>
-      <p:sp>
-        <p:nvSpPr>
-          <p:cNvPr id="399" name="Birthday Name 0"/>
-          <p:cNvSpPr txBox="1"/>
-          <p:nvPr/>
-        </p:nvSpPr>
-        <p:spPr>
-          <a:xfrm>
-            <a:off x="298800" y="920000"/>
-            <a:ext cx="8500000" cy="2800000"/>
-          </a:xfrm>
-          <a:prstGeom prst="rect">
-            <a:avLst/>
-          </a:prstGeom>
-          <a:noFill/>
-        </p:spPr>
-        <p:txBody>
-          <a:bodyPr wrap="none" anchor="ctr" lIns="45720" rIns="45720" tIns="0" bIns="0">
-            <a:noAutofit/>
-          </a:bodyPr>
-          <a:lstStyle/>
-          <a:p>
-            <a:pPr algn="ctr" fontAlgn="ctr">
-              <a:buNone/>
-            </a:pPr>
-            <a:r>
-              <a:rPr b="1" lang="en" sz="3600">
-                <a:solidFill>
-                  <a:srgbClr val="4C1130"/>
-                </a:solidFill>
-                <a:highlight>
-                  <a:schemeClr val="dk1"/>
-                </a:highlight>
-                <a:latin typeface="DFKai-SB"/>
-                <a:ea typeface="DFKai-SB"/>
-                <a:cs typeface="DFKai-SB"/>
-                <a:sym typeface="DFKai-SB"/>
-              </a:rPr>
-              <a:t xml:space="preserve"> </a:t>
-            </a:r>
-            <a:endParaRPr b="1" sz="3600"/>
-          </a:p>
-        </p:txBody>
-      </p:sp>
-      <p:sp>
-        <p:nvSpPr>
-          <p:cNvPr id="400" name="Google Shape;400;p67"/>
-          <p:cNvSpPr txBox="1"/>
-          <p:nvPr/>
-        </p:nvSpPr>
-        <p:spPr>
-          <a:xfrm>
-            <a:off x="0" y="2037522"/>
-            <a:ext cx="9144000" cy="400200"/>
-          </a:xfrm>
-          <a:prstGeom prst="rect">
-            <a:avLst/>
-          </a:prstGeom>
-          <a:noFill/>
-          <a:ln>
-            <a:noFill/>
-          </a:ln>
-        </p:spPr>
-        <p:txBody>
-          <a:bodyPr anchorCtr="0" anchor="t" bIns="91425" lIns="91425" spcFirstLastPara="1" rIns="91425" wrap="square" tIns="91425">
-            <a:spAutoFit/>
-          </a:bodyPr>
-          <a:lstStyle/>
-          <a:p>
-            <a:pPr indent="0" lvl="0" marL="0" rtl="0" algn="l">
-              <a:spcBef>
-                <a:spcPts val="0"/>
-              </a:spcBef>
-              <a:spcAft>
-                <a:spcPts val="0"/>
-              </a:spcAft>
-              <a:buNone/>
-            </a:pPr>
-            <a:r>
-              <a:t/>
-            </a:r>
-            <a:endParaRPr>
-              <a:latin typeface="Lato"/>
-              <a:ea typeface="Lato"/>
-              <a:cs typeface="Lato"/>
-              <a:sym typeface="Lato"/>
-            </a:endParaRPr>
-          </a:p>
-        </p:txBody>
-      </p:sp>
-      <p:sp>
-        <p:nvSpPr>
-          <p:cNvPr id="401" name="Google Shape;401;p67"/>
-          <p:cNvSpPr txBox="1"/>
-          <p:nvPr/>
-        </p:nvSpPr>
-        <p:spPr>
-          <a:xfrm>
-            <a:off x="228325" y="3894775"/>
-            <a:ext cx="4893900" cy="960600"/>
-          </a:xfrm>
-          <a:prstGeom prst="rect">
-            <a:avLst/>
-          </a:prstGeom>
-          <a:noFill/>
-          <a:ln>
-            <a:noFill/>
-          </a:ln>
-        </p:spPr>
-        <p:txBody>
-          <a:bodyPr anchorCtr="0" anchor="t" bIns="91425" lIns="91425" spcFirstLastPara="1" rIns="91425" wrap="square" tIns="91425">
-            <a:spAutoFit/>
-          </a:bodyPr>
-          <a:lstStyle/>
-          <a:p>
-            <a:pPr indent="0" lvl="0" marL="0" rtl="0" algn="ctr">
-              <a:lnSpc>
-                <a:spcPct val="90000"/>
-              </a:lnSpc>
-              <a:spcBef>
-                <a:spcPts val="0"/>
-              </a:spcBef>
-              <a:spcAft>
-                <a:spcPts val="0"/>
-              </a:spcAft>
-              <a:buNone/>
-            </a:pPr>
-            <a:r>
-              <a:rPr b="1" lang="en" sz="2800">
-                <a:solidFill>
-                  <a:srgbClr val="FF0000"/>
-                </a:solidFill>
-                <a:highlight>
-                  <a:schemeClr val="dk1"/>
-                </a:highlight>
-                <a:latin typeface="Lexend Deca"/>
-                <a:ea typeface="Lexend Deca"/>
-                <a:cs typeface="Lexend Deca"/>
-                <a:sym typeface="Lexend Deca"/>
-              </a:rPr>
-              <a:t>我們將在午餐聚會時禱告祝福</a:t>
-            </a:r>
-            <a:endParaRPr b="1" sz="2800">
-              <a:solidFill>
-                <a:srgbClr val="FF0000"/>
-              </a:solidFill>
-              <a:highlight>
-                <a:schemeClr val="dk1"/>
-              </a:highlight>
-              <a:latin typeface="Lexend Deca"/>
-              <a:ea typeface="Lexend Deca"/>
-              <a:cs typeface="Lexend Deca"/>
-              <a:sym typeface="Lexend Deca"/>
-            </a:endParaRPr>
-          </a:p>
-          <a:p>
-            <a:pPr indent="0" lvl="0" marL="0" rtl="0" algn="ctr">
-              <a:lnSpc>
-                <a:spcPct val="90000"/>
-              </a:lnSpc>
-              <a:spcBef>
-                <a:spcPts val="0"/>
-              </a:spcBef>
-              <a:spcAft>
-                <a:spcPts val="0"/>
-              </a:spcAft>
-              <a:buNone/>
-            </a:pPr>
-            <a:r>
-              <a:rPr b="1" lang="en" sz="2800">
-                <a:solidFill>
-                  <a:srgbClr val="FF0000"/>
-                </a:solidFill>
-                <a:highlight>
-                  <a:schemeClr val="dk1"/>
-                </a:highlight>
-                <a:latin typeface="Lexend Deca"/>
-                <a:ea typeface="Lexend Deca"/>
-                <a:cs typeface="Lexend Deca"/>
-                <a:sym typeface="Lexend Deca"/>
-              </a:rPr>
-              <a:t> 唱生日歌與享用生日蛋糕</a:t>
-            </a:r>
-            <a:endParaRPr/>
           </a:p>
         </p:txBody>
       </p:sp>

--- a/shared/templates/bulletin/06_14_2026.pptx
+++ b/shared/templates/bulletin/06_14_2026.pptx
@@ -36851,7 +36851,7 @@
               <a:buNone/>
             </a:pPr>
             <a:r>
-              <a:rPr b="1" lang="en" sz="4400">
+              <a:rPr b="1" lang="en" sz="3600">
                 <a:latin typeface="Corbel"/>
                 <a:ea typeface="Corbel"/>
                 <a:cs typeface="Corbel"/>
@@ -36860,16 +36860,16 @@
               <a:t>週五  細胞小家</a:t>
             </a:r>
             <a:r>
-              <a:rPr b="1" lang="en" sz="3000">
+              <a:rPr b="1" lang="en" sz="2400">
                 <a:latin typeface="Corbel"/>
                 <a:ea typeface="Corbel"/>
                 <a:cs typeface="Corbel"/>
                 <a:sym typeface="Corbel"/>
               </a:rPr>
-              <a:t>聚會  </a:t>
-            </a:r>
-            <a:r>
-              <a:rPr b="1" lang="en" sz="3200">
+              <a:t>聚會 </a:t>
+            </a:r>
+            <a:r>
+              <a:rPr b="1" lang="en" sz="2600">
                 <a:solidFill>
                   <a:srgbClr val="FF4D00"/>
                 </a:solidFill>
@@ -36881,7 +36881,7 @@
               <a:t>本</a:t>
             </a:r>
             <a:r>
-              <a:rPr b="1" lang="en" sz="3000">
+              <a:rPr b="1" lang="en" sz="2400">
                 <a:solidFill>
                   <a:srgbClr val="FF4D00"/>
                 </a:solidFill>
@@ -36893,7 +36893,7 @@
               <a:t>週</a:t>
             </a:r>
             <a:r>
-              <a:rPr b="1" lang="en" sz="3000">
+              <a:rPr b="1" lang="en" sz="2400">
                 <a:solidFill>
                   <a:srgbClr val="FF4D00"/>
                 </a:solidFill>
@@ -36905,7 +36905,7 @@
               <a:t>暫停一次</a:t>
             </a:r>
             <a:r>
-              <a:rPr b="1" i="1" lang="en" sz="1600">
+              <a:rPr b="1" i="1" lang="en" sz="1200">
                 <a:solidFill>
                   <a:schemeClr val="lt1"/>
                 </a:solidFill>
@@ -36914,9 +36914,9 @@
                 <a:cs typeface="Corbel"/>
                 <a:sym typeface="Corbel"/>
               </a:rPr>
-              <a:t>( 每月第一與三週聚會)</a:t>
-            </a:r>
-            <a:endParaRPr b="1" i="1" sz="1300">
+              <a:t>(每月第一與三週聚會)</a:t>
+            </a:r>
+            <a:endParaRPr b="1" i="1" sz="1200">
               <a:solidFill>
                 <a:schemeClr val="lt1"/>
               </a:solidFill>
@@ -37343,7 +37343,7 @@
           </a:ln>
         </p:spPr>
         <p:txBody>
-          <a:bodyPr anchorCtr="0" anchor="t" bIns="91425" lIns="91425" spcFirstLastPara="1" rIns="91425" wrap="square" tIns="91425">
+          <a:bodyPr anchorCtr="0" anchor="t" bIns="91425" lIns="45720" spcFirstLastPara="1" rIns="45720" wrap="square" tIns="91425">
             <a:spAutoFit/>
           </a:bodyPr>
           <a:lstStyle/>
@@ -37361,16 +37361,16 @@
               <a:buNone/>
             </a:pPr>
             <a:r>
-              <a:rPr b="1" lang="en" sz="3600">
+              <a:rPr b="1" lang="en" sz="2800">
                 <a:latin typeface="Corbel"/>
                 <a:ea typeface="Corbel"/>
                 <a:cs typeface="Corbel"/>
                 <a:sym typeface="Corbel"/>
               </a:rPr>
-              <a:t>週二  查經班                 </a:t>
-            </a:r>
-            <a:r>
-              <a:rPr b="1" lang="en" sz="3600">
+              <a:t>週二  查經班            </a:t>
+            </a:r>
+            <a:r>
+              <a:rPr b="1" lang="en" sz="2800">
                 <a:highlight>
                   <a:schemeClr val="accent6"/>
                 </a:highlight>
@@ -37382,7 +37382,7 @@
               <a:t> 線上 </a:t>
             </a:r>
             <a:r>
-              <a:rPr b="1" lang="en" sz="3600">
+              <a:rPr b="1" lang="en" sz="2800">
                 <a:latin typeface="Corbel"/>
                 <a:ea typeface="Corbel"/>
                 <a:cs typeface="Corbel"/>
@@ -37391,7 +37391,7 @@
               <a:t>    </a:t>
             </a:r>
             <a:r>
-              <a:rPr b="1" lang="en" sz="3600">
+              <a:rPr b="1" lang="en" sz="2800">
                 <a:solidFill>
                   <a:srgbClr val="0000FF"/>
                 </a:solidFill>
@@ -37402,7 +37402,7 @@
               </a:rPr>
               <a:t>晚上 8:30- 9:30</a:t>
             </a:r>
-            <a:endParaRPr b="1" sz="3600">
+            <a:endParaRPr b="1" sz="2800">
               <a:solidFill>
                 <a:srgbClr val="0000FF"/>
               </a:solidFill>
@@ -37426,16 +37426,16 @@
               <a:buNone/>
             </a:pPr>
             <a:r>
-              <a:rPr b="1" lang="en" sz="3600">
+              <a:rPr b="1" lang="en" sz="2800">
                 <a:latin typeface="Corbel"/>
                 <a:ea typeface="Corbel"/>
                 <a:cs typeface="Corbel"/>
                 <a:sym typeface="Corbel"/>
               </a:rPr>
-              <a:t>週三  禱告會                 </a:t>
-            </a:r>
-            <a:r>
-              <a:rPr b="1" lang="en" sz="3600">
+              <a:t>週三  禱告會            </a:t>
+            </a:r>
+            <a:r>
+              <a:rPr b="1" lang="en" sz="2800">
                 <a:highlight>
                   <a:schemeClr val="accent6"/>
                 </a:highlight>
@@ -37447,7 +37447,7 @@
               <a:t> 線上 </a:t>
             </a:r>
             <a:r>
-              <a:rPr b="1" lang="en" sz="3600">
+              <a:rPr b="1" lang="en" sz="2800">
                 <a:latin typeface="Corbel"/>
                 <a:ea typeface="Corbel"/>
                 <a:cs typeface="Corbel"/>
@@ -37456,7 +37456,7 @@
               <a:t>    </a:t>
             </a:r>
             <a:r>
-              <a:rPr b="1" lang="en" sz="3600">
+              <a:rPr b="1" lang="en" sz="2800">
                 <a:solidFill>
                   <a:srgbClr val="0000FF"/>
                 </a:solidFill>
@@ -37467,7 +37467,7 @@
               </a:rPr>
               <a:t>晚上 8:30- 10:00</a:t>
             </a:r>
-            <a:endParaRPr b="1" sz="3600">
+            <a:endParaRPr b="1" sz="2800">
               <a:solidFill>
                 <a:schemeClr val="dk1"/>
               </a:solidFill>
@@ -37494,16 +37494,16 @@
               <a:buNone/>
             </a:pPr>
             <a:r>
-              <a:rPr b="1" lang="en" sz="3600">
+              <a:rPr b="1" lang="en" sz="2800">
                 <a:latin typeface="Corbel"/>
                 <a:ea typeface="Corbel"/>
                 <a:cs typeface="Corbel"/>
                 <a:sym typeface="Corbel"/>
               </a:rPr>
-              <a:t>週五  通宵禱告會       </a:t>
-            </a:r>
-            <a:r>
-              <a:rPr b="1" lang="en" sz="3600">
+              <a:t>週五  通宵禱告會    </a:t>
+            </a:r>
+            <a:r>
+              <a:rPr b="1" lang="en" sz="2800">
                 <a:highlight>
                   <a:srgbClr val="F6B26B"/>
                 </a:highlight>
@@ -37515,7 +37515,7 @@
               <a:t> 教會 </a:t>
             </a:r>
             <a:r>
-              <a:rPr b="1" lang="en" sz="3600">
+              <a:rPr b="1" lang="en" sz="2800">
                 <a:latin typeface="Corbel"/>
                 <a:ea typeface="Corbel"/>
                 <a:cs typeface="Corbel"/>
@@ -37524,7 +37524,7 @@
               <a:t>    </a:t>
             </a:r>
             <a:r>
-              <a:rPr b="1" lang="en" sz="3600">
+              <a:rPr b="1" lang="en" sz="2800">
                 <a:solidFill>
                   <a:srgbClr val="0000FF"/>
                 </a:solidFill>
@@ -37535,52 +37535,7 @@
               </a:rPr>
               <a:t>半夜 12:30開始</a:t>
             </a:r>
-            <a:r>
-              <a:rPr b="1" lang="en" sz="3600">
-                <a:latin typeface="Corbel"/>
-                <a:ea typeface="Corbel"/>
-                <a:cs typeface="Corbel"/>
-                <a:sym typeface="Corbel"/>
-              </a:rPr>
-              <a:t> </a:t>
-            </a:r>
-            <a:r>
-              <a:rPr b="1" lang="en" sz="3500">
-                <a:latin typeface="Corbel"/>
-                <a:ea typeface="Corbel"/>
-                <a:cs typeface="Corbel"/>
-                <a:sym typeface="Corbel"/>
-              </a:rPr>
-              <a:t>  </a:t>
-            </a:r>
-            <a:r>
-              <a:rPr b="1" lang="en" sz="3000">
-                <a:solidFill>
-                  <a:srgbClr val="0000FF"/>
-                </a:solidFill>
-                <a:latin typeface="Corbel"/>
-                <a:ea typeface="Corbel"/>
-                <a:cs typeface="Corbel"/>
-                <a:sym typeface="Corbel"/>
-              </a:rPr>
-              <a:t>    </a:t>
-            </a:r>
-            <a:r>
-              <a:rPr b="1" lang="en" sz="3000">
-                <a:solidFill>
-                  <a:srgbClr val="0000FF"/>
-                </a:solidFill>
-                <a:highlight>
-                  <a:srgbClr val="FF4D00"/>
-                </a:highlight>
-                <a:latin typeface="Corbel"/>
-                <a:ea typeface="Corbel"/>
-                <a:cs typeface="Corbel"/>
-                <a:sym typeface="Corbel"/>
-              </a:rPr>
-              <a:t>   </a:t>
-            </a:r>
-            <a:endParaRPr b="1" sz="2900">
+            <a:endParaRPr b="1" sz="2600">
               <a:solidFill>
                 <a:srgbClr val="0000FF"/>
               </a:solidFill>

--- a/shared/templates/bulletin/06_14_2026.pptx
+++ b/shared/templates/bulletin/06_14_2026.pptx
@@ -36778,9 +36778,6 @@
               <a:t>晚上 8:30- 10:00</a:t>
             </a:r>
             <a:endParaRPr b="1" sz="3000">
-              <a:solidFill>
-                <a:srgbClr val="0000FF"/>
-              </a:solidFill>
               <a:latin typeface="Corbel"/>
               <a:ea typeface="Corbel"/>
               <a:cs typeface="Corbel"/>
@@ -36816,7 +36813,7 @@
                 <a:cs typeface="Corbel"/>
                 <a:sym typeface="Corbel"/>
               </a:rPr>
-              <a:t>聚會                </a:t>
+              <a:t>聚會                       </a:t>
             </a:r>
             <a:r>
               <a:rPr b="1" lang="en" sz="3000">
@@ -36851,37 +36848,34 @@
               <a:buNone/>
             </a:pPr>
             <a:r>
-              <a:rPr b="1" lang="en" sz="3600">
+              <a:rPr b="1" lang="en" sz="4400">
                 <a:latin typeface="Corbel"/>
                 <a:ea typeface="Corbel"/>
                 <a:cs typeface="Corbel"/>
                 <a:sym typeface="Corbel"/>
               </a:rPr>
-              <a:t>週五  細胞小家</a:t>
-            </a:r>
-            <a:r>
-              <a:rPr b="1" lang="en" sz="2400">
+              <a:t>週五  </a:t>
+            </a:r>
+            <a:r>
+              <a:rPr b="1" lang="en" sz="4400">
                 <a:latin typeface="Corbel"/>
                 <a:ea typeface="Corbel"/>
                 <a:cs typeface="Corbel"/>
                 <a:sym typeface="Corbel"/>
               </a:rPr>
-              <a:t>聚會 </a:t>
-            </a:r>
-            <a:r>
-              <a:rPr b="1" lang="en" sz="2600">
-                <a:solidFill>
-                  <a:srgbClr val="FF4D00"/>
-                </a:solidFill>
+              <a:t>細胞小家</a:t>
+            </a:r>
+            <a:r>
+              <a:rPr b="1" lang="en" sz="3000">
                 <a:latin typeface="Corbel"/>
                 <a:ea typeface="Corbel"/>
                 <a:cs typeface="Corbel"/>
                 <a:sym typeface="Corbel"/>
               </a:rPr>
-              <a:t>本</a:t>
-            </a:r>
-            <a:r>
-              <a:rPr b="1" lang="en" sz="2400">
+              <a:t>聚會  </a:t>
+            </a:r>
+            <a:r>
+              <a:rPr b="1" lang="en" sz="2200">
                 <a:solidFill>
                   <a:srgbClr val="FF4D00"/>
                 </a:solidFill>
@@ -36890,25 +36884,10 @@
                 <a:cs typeface="Corbel"/>
                 <a:sym typeface="Corbel"/>
               </a:rPr>
-              <a:t>週</a:t>
-            </a:r>
-            <a:r>
-              <a:rPr b="1" lang="en" sz="2400">
-                <a:solidFill>
-                  <a:srgbClr val="FF4D00"/>
-                </a:solidFill>
-                <a:latin typeface="Corbel"/>
-                <a:ea typeface="Corbel"/>
-                <a:cs typeface="Corbel"/>
-                <a:sym typeface="Corbel"/>
-              </a:rPr>
-              <a:t>暫停一次</a:t>
-            </a:r>
-            <a:r>
-              <a:rPr b="1" i="1" lang="en" sz="1200">
-                <a:solidFill>
-                  <a:schemeClr val="lt1"/>
-                </a:solidFill>
+              <a:t>本週暫停一次</a:t>
+            </a:r>
+            <a:r>
+              <a:rPr b="1" i="1" lang="en" sz="1800">
                 <a:latin typeface="Corbel"/>
                 <a:ea typeface="Corbel"/>
                 <a:cs typeface="Corbel"/>
@@ -36916,13 +36895,7 @@
               </a:rPr>
               <a:t>(每月第一與三週聚會)</a:t>
             </a:r>
-            <a:endParaRPr b="1" i="1" sz="1200">
-              <a:solidFill>
-                <a:schemeClr val="lt1"/>
-              </a:solidFill>
-              <a:highlight>
-                <a:srgbClr val="FFFF00"/>
-              </a:highlight>
+            <a:endParaRPr b="1" sz="1800">
               <a:latin typeface="Corbel"/>
               <a:ea typeface="Corbel"/>
               <a:cs typeface="Corbel"/>
@@ -37331,8 +37304,8 @@
         </p:nvSpPr>
         <p:spPr>
           <a:xfrm>
-            <a:off x="0" y="1146550"/>
-            <a:ext cx="9144000" cy="2013300"/>
+            <a:off x="0" y="1356875"/>
+            <a:ext cx="9144000" cy="2419800"/>
           </a:xfrm>
           <a:prstGeom prst="rect">
             <a:avLst/>
@@ -37343,7 +37316,7 @@
           </a:ln>
         </p:spPr>
         <p:txBody>
-          <a:bodyPr anchorCtr="0" anchor="t" bIns="91425" lIns="45720" spcFirstLastPara="1" rIns="45720" wrap="square" tIns="91425">
+          <a:bodyPr anchorCtr="0" anchor="t" bIns="91425" lIns="91425" spcFirstLastPara="1" rIns="91425" wrap="square" tIns="91425">
             <a:spAutoFit/>
           </a:bodyPr>
           <a:lstStyle/>
@@ -37361,13 +37334,31 @@
               <a:buNone/>
             </a:pPr>
             <a:r>
-              <a:rPr b="1" lang="en" sz="2800">
+              <a:rPr b="1" lang="en" sz="4300">
                 <a:latin typeface="Corbel"/>
                 <a:ea typeface="Corbel"/>
                 <a:cs typeface="Corbel"/>
                 <a:sym typeface="Corbel"/>
               </a:rPr>
-              <a:t>週二  查經班            </a:t>
+              <a:t>週二  </a:t>
+            </a:r>
+            <a:r>
+              <a:rPr b="1" lang="en" sz="4400">
+                <a:latin typeface="Corbel"/>
+                <a:ea typeface="Corbel"/>
+                <a:cs typeface="Corbel"/>
+                <a:sym typeface="Corbel"/>
+              </a:rPr>
+              <a:t>查經班</a:t>
+            </a:r>
+            <a:r>
+              <a:rPr b="1" lang="en" sz="2500">
+                <a:latin typeface="Corbel"/>
+                <a:ea typeface="Corbel"/>
+                <a:cs typeface="Corbel"/>
+                <a:sym typeface="Corbel"/>
+              </a:rPr>
+              <a:t>          </a:t>
             </a:r>
             <a:r>
               <a:rPr b="1" lang="en" sz="2800">
@@ -37382,7 +37373,7 @@
               <a:t> 線上 </a:t>
             </a:r>
             <a:r>
-              <a:rPr b="1" lang="en" sz="2800">
+              <a:rPr b="1" lang="en" sz="2500">
                 <a:latin typeface="Corbel"/>
                 <a:ea typeface="Corbel"/>
                 <a:cs typeface="Corbel"/>
@@ -37391,7 +37382,7 @@
               <a:t>    </a:t>
             </a:r>
             <a:r>
-              <a:rPr b="1" lang="en" sz="2800">
+              <a:rPr b="1" lang="en" sz="3000">
                 <a:solidFill>
                   <a:srgbClr val="0000FF"/>
                 </a:solidFill>
@@ -37402,10 +37393,7 @@
               </a:rPr>
               <a:t>晚上 8:30- 9:30</a:t>
             </a:r>
-            <a:endParaRPr b="1" sz="2800">
-              <a:solidFill>
-                <a:srgbClr val="0000FF"/>
-              </a:solidFill>
+            <a:endParaRPr b="1" sz="3000">
               <a:latin typeface="Corbel"/>
               <a:ea typeface="Corbel"/>
               <a:cs typeface="Corbel"/>
@@ -37426,13 +37414,31 @@
               <a:buNone/>
             </a:pPr>
             <a:r>
-              <a:rPr b="1" lang="en" sz="2800">
+              <a:rPr b="1" lang="en" sz="4400">
                 <a:latin typeface="Corbel"/>
                 <a:ea typeface="Corbel"/>
                 <a:cs typeface="Corbel"/>
                 <a:sym typeface="Corbel"/>
               </a:rPr>
-              <a:t>週三  禱告會            </a:t>
+              <a:t>週三  </a:t>
+            </a:r>
+            <a:r>
+              <a:rPr b="1" lang="en" sz="4400">
+                <a:latin typeface="Corbel"/>
+                <a:ea typeface="Corbel"/>
+                <a:cs typeface="Corbel"/>
+                <a:sym typeface="Corbel"/>
+              </a:rPr>
+              <a:t>禱告會</a:t>
+            </a:r>
+            <a:r>
+              <a:rPr b="1" lang="en" sz="2500">
+                <a:latin typeface="Corbel"/>
+                <a:ea typeface="Corbel"/>
+                <a:cs typeface="Corbel"/>
+                <a:sym typeface="Corbel"/>
+              </a:rPr>
+              <a:t>          </a:t>
             </a:r>
             <a:r>
               <a:rPr b="1" lang="en" sz="2800">
@@ -37447,7 +37453,7 @@
               <a:t> 線上 </a:t>
             </a:r>
             <a:r>
-              <a:rPr b="1" lang="en" sz="2800">
+              <a:rPr b="1" lang="en" sz="2500">
                 <a:latin typeface="Corbel"/>
                 <a:ea typeface="Corbel"/>
                 <a:cs typeface="Corbel"/>
@@ -37456,7 +37462,7 @@
               <a:t>    </a:t>
             </a:r>
             <a:r>
-              <a:rPr b="1" lang="en" sz="2800">
+              <a:rPr b="1" lang="en" sz="3000">
                 <a:solidFill>
                   <a:srgbClr val="0000FF"/>
                 </a:solidFill>
@@ -37467,13 +37473,7 @@
               </a:rPr>
               <a:t>晚上 8:30- 10:00</a:t>
             </a:r>
-            <a:endParaRPr b="1" sz="2800">
-              <a:solidFill>
-                <a:schemeClr val="dk1"/>
-              </a:solidFill>
-              <a:highlight>
-                <a:schemeClr val="accent5"/>
-              </a:highlight>
+            <a:endParaRPr b="1" sz="2500">
               <a:latin typeface="Corbel"/>
               <a:ea typeface="Corbel"/>
               <a:cs typeface="Corbel"/>
@@ -37483,7 +37483,7 @@
           <a:p>
             <a:pPr indent="0" lvl="0" marL="0" rtl="0" algn="l">
               <a:lnSpc>
-                <a:spcPct val="100000"/>
+                <a:spcPct val="115000"/>
               </a:lnSpc>
               <a:spcBef>
                 <a:spcPts val="0"/>
@@ -37494,13 +37494,31 @@
               <a:buNone/>
             </a:pPr>
             <a:r>
-              <a:rPr b="1" lang="en" sz="2800">
+              <a:rPr b="1" lang="en" sz="4400">
                 <a:latin typeface="Corbel"/>
                 <a:ea typeface="Corbel"/>
                 <a:cs typeface="Corbel"/>
                 <a:sym typeface="Corbel"/>
               </a:rPr>
-              <a:t>週五  通宵禱告會    </a:t>
+              <a:t>週五  </a:t>
+            </a:r>
+            <a:r>
+              <a:rPr b="1" lang="en" sz="4000">
+                <a:latin typeface="Corbel"/>
+                <a:ea typeface="Corbel"/>
+                <a:cs typeface="Corbel"/>
+                <a:sym typeface="Corbel"/>
+              </a:rPr>
+              <a:t>通宵禱告會</a:t>
+            </a:r>
+            <a:r>
+              <a:rPr b="1" lang="en" sz="2500">
+                <a:latin typeface="Corbel"/>
+                <a:ea typeface="Corbel"/>
+                <a:cs typeface="Corbel"/>
+                <a:sym typeface="Corbel"/>
+              </a:rPr>
+              <a:t>    </a:t>
             </a:r>
             <a:r>
               <a:rPr b="1" lang="en" sz="2800">
@@ -37515,7 +37533,7 @@
               <a:t> 教會 </a:t>
             </a:r>
             <a:r>
-              <a:rPr b="1" lang="en" sz="2800">
+              <a:rPr b="1" lang="en" sz="2500">
                 <a:latin typeface="Corbel"/>
                 <a:ea typeface="Corbel"/>
                 <a:cs typeface="Corbel"/>
@@ -37524,7 +37542,7 @@
               <a:t>    </a:t>
             </a:r>
             <a:r>
-              <a:rPr b="1" lang="en" sz="2800">
+              <a:rPr b="1" lang="en" sz="3000">
                 <a:solidFill>
                   <a:srgbClr val="0000FF"/>
                 </a:solidFill>
@@ -37536,9 +37554,6 @@
               <a:t>半夜 12:30開始</a:t>
             </a:r>
             <a:endParaRPr b="1" sz="2600">
-              <a:solidFill>
-                <a:srgbClr val="0000FF"/>
-              </a:solidFill>
               <a:latin typeface="Corbel"/>
               <a:ea typeface="Corbel"/>
               <a:cs typeface="Corbel"/>
